--- a/docs/slide/post01_eks_breach.pptx
+++ b/docs/slide/post01_eks_breach.pptx
@@ -144,7 +144,7 @@
 <file path=ppt/revisionInfo.xml><?xml version="1.0" encoding="utf-8"?>
 <p1510:revInfo xmlns:a="http://schemas.openxmlformats.org/drawingml/2006/main" xmlns:r="http://schemas.openxmlformats.org/officeDocument/2006/relationships" xmlns:p1510="http://schemas.microsoft.com/office/powerpoint/2015/10/main">
   <p1510:revLst>
-    <p1510:client id="{90388DFC-2480-48D6-ACA5-3B253BE164C6}" v="5681" dt="2026-10-21T21:52:59.412"/>
+    <p1510:client id="{90388DFC-2480-48D6-ACA5-3B253BE164C6}" v="5682" dt="2026-10-23T20:28:44.836"/>
   </p1510:revLst>
 </p1510:revInfo>
 </file>
@@ -154,12 +154,12 @@
   <pc:docChgLst>
     <pc:chgData name="Simon Fong" userId="0989948daaec8292" providerId="LiveId" clId="{F12E0490-60F3-4147-9D04-93D87D41D5A0}"/>
     <pc:docChg chg="undo redo custSel addSld delSld modSld sldOrd modMainMaster">
-      <pc:chgData name="Simon Fong" userId="0989948daaec8292" providerId="LiveId" clId="{F12E0490-60F3-4147-9D04-93D87D41D5A0}" dt="2026-10-22T20:46:24.781" v="11836" actId="2890"/>
+      <pc:chgData name="Simon Fong" userId="0989948daaec8292" providerId="LiveId" clId="{F12E0490-60F3-4147-9D04-93D87D41D5A0}" dt="2026-10-23T20:28:44.836" v="11837"/>
       <pc:docMkLst>
         <pc:docMk/>
       </pc:docMkLst>
       <pc:sldChg chg="addSp delSp modSp new mod modTransition setBg modClrScheme addAnim delAnim modAnim setClrOvrMap delDesignElem chgLayout">
-        <pc:chgData name="Simon Fong" userId="0989948daaec8292" providerId="LiveId" clId="{F12E0490-60F3-4147-9D04-93D87D41D5A0}" dt="2026-10-21T18:52:23.940" v="11643"/>
+        <pc:chgData name="Simon Fong" userId="0989948daaec8292" providerId="LiveId" clId="{F12E0490-60F3-4147-9D04-93D87D41D5A0}" dt="2026-10-23T20:28:44.836" v="11837"/>
         <pc:sldMkLst>
           <pc:docMk/>
           <pc:sldMk cId="500054961" sldId="256"/>
@@ -173,7 +173,7 @@
           </ac:spMkLst>
         </pc:spChg>
         <pc:spChg chg="mod">
-          <ac:chgData name="Simon Fong" userId="0989948daaec8292" providerId="LiveId" clId="{F12E0490-60F3-4147-9D04-93D87D41D5A0}" dt="2026-10-21T02:57:13.816" v="9107" actId="6549"/>
+          <ac:chgData name="Simon Fong" userId="0989948daaec8292" providerId="LiveId" clId="{F12E0490-60F3-4147-9D04-93D87D41D5A0}" dt="2026-10-23T20:28:44.836" v="11837"/>
           <ac:spMkLst>
             <pc:docMk/>
             <pc:sldMk cId="500054961" sldId="256"/>
@@ -188,213 +188,6 @@
             <ac:picMk id="32" creationId="{7158F0ED-9F1D-EFEC-3544-41B5BB8F4EAA}"/>
           </ac:picMkLst>
         </pc:picChg>
-      </pc:sldChg>
-      <pc:sldChg chg="addSp delSp modSp del mod modTransition setBg addAnim delAnim modAnim">
-        <pc:chgData name="Simon Fong" userId="0989948daaec8292" providerId="LiveId" clId="{F12E0490-60F3-4147-9D04-93D87D41D5A0}" dt="2026-10-21T12:25:18.662" v="10543" actId="2696"/>
-        <pc:sldMkLst>
-          <pc:docMk/>
-          <pc:sldMk cId="2614099860" sldId="299"/>
-        </pc:sldMkLst>
-        <pc:spChg chg="mod">
-          <ac:chgData name="Simon Fong" userId="0989948daaec8292" providerId="LiveId" clId="{F12E0490-60F3-4147-9D04-93D87D41D5A0}" dt="2026-10-21T02:59:25.117" v="9127" actId="20577"/>
-          <ac:spMkLst>
-            <pc:docMk/>
-            <pc:sldMk cId="2614099860" sldId="299"/>
-            <ac:spMk id="2" creationId="{376E43E4-9D12-5EDA-E94F-09F811677D74}"/>
-          </ac:spMkLst>
-        </pc:spChg>
-        <pc:spChg chg="add mod">
-          <ac:chgData name="Simon Fong" userId="0989948daaec8292" providerId="LiveId" clId="{F12E0490-60F3-4147-9D04-93D87D41D5A0}" dt="2026-10-21T12:25:09.460" v="10542" actId="6549"/>
-          <ac:spMkLst>
-            <pc:docMk/>
-            <pc:sldMk cId="2614099860" sldId="299"/>
-            <ac:spMk id="5" creationId="{53750D2B-5767-BF89-0278-6F14B78CCAE9}"/>
-          </ac:spMkLst>
-        </pc:spChg>
-        <pc:picChg chg="add del mod modCrop">
-          <ac:chgData name="Simon Fong" userId="0989948daaec8292" providerId="LiveId" clId="{F12E0490-60F3-4147-9D04-93D87D41D5A0}" dt="2026-10-21T12:25:04.646" v="10541" actId="478"/>
-          <ac:picMkLst>
-            <pc:docMk/>
-            <pc:sldMk cId="2614099860" sldId="299"/>
-            <ac:picMk id="15" creationId="{FE5B35CD-2239-6B58-7260-8A80856CCAEB}"/>
-          </ac:picMkLst>
-        </pc:picChg>
-      </pc:sldChg>
-      <pc:sldChg chg="del">
-        <pc:chgData name="Simon Fong" userId="0989948daaec8292" providerId="LiveId" clId="{F12E0490-60F3-4147-9D04-93D87D41D5A0}" dt="2026-10-21T01:53:59.202" v="9011" actId="47"/>
-        <pc:sldMkLst>
-          <pc:docMk/>
-          <pc:sldMk cId="3152548219" sldId="303"/>
-        </pc:sldMkLst>
-      </pc:sldChg>
-      <pc:sldChg chg="del">
-        <pc:chgData name="Simon Fong" userId="0989948daaec8292" providerId="LiveId" clId="{F12E0490-60F3-4147-9D04-93D87D41D5A0}" dt="2026-10-21T00:15:41.004" v="6188" actId="47"/>
-        <pc:sldMkLst>
-          <pc:docMk/>
-          <pc:sldMk cId="154950490" sldId="304"/>
-        </pc:sldMkLst>
-      </pc:sldChg>
-      <pc:sldChg chg="del">
-        <pc:chgData name="Simon Fong" userId="0989948daaec8292" providerId="LiveId" clId="{F12E0490-60F3-4147-9D04-93D87D41D5A0}" dt="2026-10-21T00:15:41.913" v="6189" actId="47"/>
-        <pc:sldMkLst>
-          <pc:docMk/>
-          <pc:sldMk cId="458410333" sldId="305"/>
-        </pc:sldMkLst>
-      </pc:sldChg>
-      <pc:sldChg chg="del">
-        <pc:chgData name="Simon Fong" userId="0989948daaec8292" providerId="LiveId" clId="{F12E0490-60F3-4147-9D04-93D87D41D5A0}" dt="2026-10-21T00:15:42.656" v="6190" actId="47"/>
-        <pc:sldMkLst>
-          <pc:docMk/>
-          <pc:sldMk cId="2965289231" sldId="307"/>
-        </pc:sldMkLst>
-      </pc:sldChg>
-      <pc:sldChg chg="del">
-        <pc:chgData name="Simon Fong" userId="0989948daaec8292" providerId="LiveId" clId="{F12E0490-60F3-4147-9D04-93D87D41D5A0}" dt="2026-10-21T00:15:45.381" v="6192" actId="47"/>
-        <pc:sldMkLst>
-          <pc:docMk/>
-          <pc:sldMk cId="1253844731" sldId="309"/>
-        </pc:sldMkLst>
-      </pc:sldChg>
-      <pc:sldChg chg="del">
-        <pc:chgData name="Simon Fong" userId="0989948daaec8292" providerId="LiveId" clId="{F12E0490-60F3-4147-9D04-93D87D41D5A0}" dt="2026-10-21T00:15:46.212" v="6193" actId="47"/>
-        <pc:sldMkLst>
-          <pc:docMk/>
-          <pc:sldMk cId="1940810225" sldId="310"/>
-        </pc:sldMkLst>
-      </pc:sldChg>
-      <pc:sldChg chg="del">
-        <pc:chgData name="Simon Fong" userId="0989948daaec8292" providerId="LiveId" clId="{F12E0490-60F3-4147-9D04-93D87D41D5A0}" dt="2026-10-21T00:15:46.988" v="6194" actId="47"/>
-        <pc:sldMkLst>
-          <pc:docMk/>
-          <pc:sldMk cId="445451169" sldId="311"/>
-        </pc:sldMkLst>
-      </pc:sldChg>
-      <pc:sldChg chg="del">
-        <pc:chgData name="Simon Fong" userId="0989948daaec8292" providerId="LiveId" clId="{F12E0490-60F3-4147-9D04-93D87D41D5A0}" dt="2026-10-21T00:15:47.797" v="6195" actId="47"/>
-        <pc:sldMkLst>
-          <pc:docMk/>
-          <pc:sldMk cId="629098228" sldId="312"/>
-        </pc:sldMkLst>
-      </pc:sldChg>
-      <pc:sldChg chg="del">
-        <pc:chgData name="Simon Fong" userId="0989948daaec8292" providerId="LiveId" clId="{F12E0490-60F3-4147-9D04-93D87D41D5A0}" dt="2026-10-21T00:15:48.600" v="6196" actId="47"/>
-        <pc:sldMkLst>
-          <pc:docMk/>
-          <pc:sldMk cId="3118197996" sldId="314"/>
-        </pc:sldMkLst>
-      </pc:sldChg>
-      <pc:sldChg chg="del">
-        <pc:chgData name="Simon Fong" userId="0989948daaec8292" providerId="LiveId" clId="{F12E0490-60F3-4147-9D04-93D87D41D5A0}" dt="2026-10-21T00:15:49.248" v="6197" actId="47"/>
-        <pc:sldMkLst>
-          <pc:docMk/>
-          <pc:sldMk cId="1980785618" sldId="315"/>
-        </pc:sldMkLst>
-      </pc:sldChg>
-      <pc:sldChg chg="del">
-        <pc:chgData name="Simon Fong" userId="0989948daaec8292" providerId="LiveId" clId="{F12E0490-60F3-4147-9D04-93D87D41D5A0}" dt="2026-10-21T00:15:50.110" v="6198" actId="47"/>
-        <pc:sldMkLst>
-          <pc:docMk/>
-          <pc:sldMk cId="336396854" sldId="316"/>
-        </pc:sldMkLst>
-      </pc:sldChg>
-      <pc:sldChg chg="del">
-        <pc:chgData name="Simon Fong" userId="0989948daaec8292" providerId="LiveId" clId="{F12E0490-60F3-4147-9D04-93D87D41D5A0}" dt="2026-10-21T00:15:50.862" v="6199" actId="47"/>
-        <pc:sldMkLst>
-          <pc:docMk/>
-          <pc:sldMk cId="3223453815" sldId="317"/>
-        </pc:sldMkLst>
-      </pc:sldChg>
-      <pc:sldChg chg="del">
-        <pc:chgData name="Simon Fong" userId="0989948daaec8292" providerId="LiveId" clId="{F12E0490-60F3-4147-9D04-93D87D41D5A0}" dt="2026-10-21T00:15:51.964" v="6200" actId="47"/>
-        <pc:sldMkLst>
-          <pc:docMk/>
-          <pc:sldMk cId="3040432693" sldId="318"/>
-        </pc:sldMkLst>
-      </pc:sldChg>
-      <pc:sldChg chg="del">
-        <pc:chgData name="Simon Fong" userId="0989948daaec8292" providerId="LiveId" clId="{F12E0490-60F3-4147-9D04-93D87D41D5A0}" dt="2026-10-21T00:15:53.010" v="6201" actId="47"/>
-        <pc:sldMkLst>
-          <pc:docMk/>
-          <pc:sldMk cId="3178247567" sldId="319"/>
-        </pc:sldMkLst>
-      </pc:sldChg>
-      <pc:sldChg chg="del">
-        <pc:chgData name="Simon Fong" userId="0989948daaec8292" providerId="LiveId" clId="{F12E0490-60F3-4147-9D04-93D87D41D5A0}" dt="2026-10-21T00:15:53.940" v="6202" actId="47"/>
-        <pc:sldMkLst>
-          <pc:docMk/>
-          <pc:sldMk cId="1051266353" sldId="320"/>
-        </pc:sldMkLst>
-      </pc:sldChg>
-      <pc:sldChg chg="del">
-        <pc:chgData name="Simon Fong" userId="0989948daaec8292" providerId="LiveId" clId="{F12E0490-60F3-4147-9D04-93D87D41D5A0}" dt="2026-10-21T00:15:54.842" v="6203" actId="47"/>
-        <pc:sldMkLst>
-          <pc:docMk/>
-          <pc:sldMk cId="3116010713" sldId="321"/>
-        </pc:sldMkLst>
-      </pc:sldChg>
-      <pc:sldChg chg="del">
-        <pc:chgData name="Simon Fong" userId="0989948daaec8292" providerId="LiveId" clId="{F12E0490-60F3-4147-9D04-93D87D41D5A0}" dt="2026-10-21T00:15:55.609" v="6204" actId="47"/>
-        <pc:sldMkLst>
-          <pc:docMk/>
-          <pc:sldMk cId="3774111530" sldId="322"/>
-        </pc:sldMkLst>
-      </pc:sldChg>
-      <pc:sldChg chg="del">
-        <pc:chgData name="Simon Fong" userId="0989948daaec8292" providerId="LiveId" clId="{F12E0490-60F3-4147-9D04-93D87D41D5A0}" dt="2026-10-21T00:15:56.781" v="6205" actId="47"/>
-        <pc:sldMkLst>
-          <pc:docMk/>
-          <pc:sldMk cId="168713412" sldId="323"/>
-        </pc:sldMkLst>
-      </pc:sldChg>
-      <pc:sldChg chg="del">
-        <pc:chgData name="Simon Fong" userId="0989948daaec8292" providerId="LiveId" clId="{F12E0490-60F3-4147-9D04-93D87D41D5A0}" dt="2026-10-21T00:15:43.591" v="6191" actId="47"/>
-        <pc:sldMkLst>
-          <pc:docMk/>
-          <pc:sldMk cId="1105254801" sldId="324"/>
-        </pc:sldMkLst>
-      </pc:sldChg>
-      <pc:sldChg chg="del">
-        <pc:chgData name="Simon Fong" userId="0989948daaec8292" providerId="LiveId" clId="{F12E0490-60F3-4147-9D04-93D87D41D5A0}" dt="2026-10-21T00:16:00.975" v="6206" actId="47"/>
-        <pc:sldMkLst>
-          <pc:docMk/>
-          <pc:sldMk cId="2202765662" sldId="325"/>
-        </pc:sldMkLst>
-      </pc:sldChg>
-      <pc:sldChg chg="modSp add del mod">
-        <pc:chgData name="Simon Fong" userId="0989948daaec8292" providerId="LiveId" clId="{F12E0490-60F3-4147-9D04-93D87D41D5A0}" dt="2026-10-21T16:06:14.539" v="11495" actId="47"/>
-        <pc:sldMkLst>
-          <pc:docMk/>
-          <pc:sldMk cId="2139981956" sldId="327"/>
-        </pc:sldMkLst>
-        <pc:spChg chg="mod">
-          <ac:chgData name="Simon Fong" userId="0989948daaec8292" providerId="LiveId" clId="{F12E0490-60F3-4147-9D04-93D87D41D5A0}" dt="2026-10-21T01:54:55.218" v="9059" actId="20577"/>
-          <ac:spMkLst>
-            <pc:docMk/>
-            <pc:sldMk cId="2139981956" sldId="327"/>
-            <ac:spMk id="7" creationId="{7E09983B-0D3F-4767-7BF1-6D71DA878A88}"/>
-          </ac:spMkLst>
-        </pc:spChg>
-      </pc:sldChg>
-      <pc:sldChg chg="addSp delSp modSp add del mod setBg modAnim">
-        <pc:chgData name="Simon Fong" userId="0989948daaec8292" providerId="LiveId" clId="{F12E0490-60F3-4147-9D04-93D87D41D5A0}" dt="2026-10-21T00:15:32.247" v="6185" actId="2696"/>
-        <pc:sldMkLst>
-          <pc:docMk/>
-          <pc:sldMk cId="2543258771" sldId="328"/>
-        </pc:sldMkLst>
-      </pc:sldChg>
-      <pc:sldChg chg="modSp add del setBg modAnim">
-        <pc:chgData name="Simon Fong" userId="0989948daaec8292" providerId="LiveId" clId="{F12E0490-60F3-4147-9D04-93D87D41D5A0}" dt="2026-10-21T00:15:37.994" v="6187" actId="2696"/>
-        <pc:sldMkLst>
-          <pc:docMk/>
-          <pc:sldMk cId="3602892923" sldId="329"/>
-        </pc:sldMkLst>
-      </pc:sldChg>
-      <pc:sldChg chg="addSp delSp modSp add del mod setBg modAnim">
-        <pc:chgData name="Simon Fong" userId="0989948daaec8292" providerId="LiveId" clId="{F12E0490-60F3-4147-9D04-93D87D41D5A0}" dt="2026-10-21T00:15:35.562" v="6186" actId="2696"/>
-        <pc:sldMkLst>
-          <pc:docMk/>
-          <pc:sldMk cId="1392044893" sldId="330"/>
-        </pc:sldMkLst>
       </pc:sldChg>
       <pc:sldChg chg="addSp delSp modSp add mod modTransition setBg addAnim delAnim modAnim">
         <pc:chgData name="Simon Fong" userId="0989948daaec8292" providerId="LiveId" clId="{F12E0490-60F3-4147-9D04-93D87D41D5A0}" dt="2026-10-21T18:52:23.940" v="11643"/>
@@ -441,36 +234,12 @@
           <pc:docMk/>
           <pc:sldMk cId="4215080606" sldId="333"/>
         </pc:sldMkLst>
-        <pc:spChg chg="add del">
-          <ac:chgData name="Simon Fong" userId="0989948daaec8292" providerId="LiveId" clId="{F12E0490-60F3-4147-9D04-93D87D41D5A0}" dt="2026-10-21T03:02:01.152" v="9203" actId="22"/>
-          <ac:spMkLst>
-            <pc:docMk/>
-            <pc:sldMk cId="4215080606" sldId="333"/>
-            <ac:spMk id="3" creationId="{591BAF78-434B-D696-1AE3-ED1BC22EECCC}"/>
-          </ac:spMkLst>
-        </pc:spChg>
         <pc:spChg chg="mod">
           <ac:chgData name="Simon Fong" userId="0989948daaec8292" providerId="LiveId" clId="{F12E0490-60F3-4147-9D04-93D87D41D5A0}" dt="2026-10-21T12:41:59.232" v="10694" actId="20577"/>
           <ac:spMkLst>
             <pc:docMk/>
             <pc:sldMk cId="4215080606" sldId="333"/>
             <ac:spMk id="5" creationId="{8F83ECEE-842B-5C7A-4B24-15265F3F8B3F}"/>
-          </ac:spMkLst>
-        </pc:spChg>
-        <pc:spChg chg="add mod">
-          <ac:chgData name="Simon Fong" userId="0989948daaec8292" providerId="LiveId" clId="{F12E0490-60F3-4147-9D04-93D87D41D5A0}" dt="2026-10-21T03:02:04.759" v="9205" actId="767"/>
-          <ac:spMkLst>
-            <pc:docMk/>
-            <pc:sldMk cId="4215080606" sldId="333"/>
-            <ac:spMk id="6" creationId="{EF492B55-2C98-A8AD-CB36-FB4A44485042}"/>
-          </ac:spMkLst>
-        </pc:spChg>
-        <pc:spChg chg="add del">
-          <ac:chgData name="Simon Fong" userId="0989948daaec8292" providerId="LiveId" clId="{F12E0490-60F3-4147-9D04-93D87D41D5A0}" dt="2026-10-21T03:02:14.614" v="9208" actId="22"/>
-          <ac:spMkLst>
-            <pc:docMk/>
-            <pc:sldMk cId="4215080606" sldId="333"/>
-            <ac:spMk id="8" creationId="{94D0F96A-9C28-78CF-0DD3-607CA5F742F6}"/>
           </ac:spMkLst>
         </pc:spChg>
         <pc:spChg chg="mod">
@@ -590,14 +359,6 @@
             <ac:picMk id="3" creationId="{64E2470D-C606-3B08-AAD2-1EFFB9EC9667}"/>
           </ac:picMkLst>
         </pc:picChg>
-        <pc:picChg chg="del mod">
-          <ac:chgData name="Simon Fong" userId="0989948daaec8292" providerId="LiveId" clId="{F12E0490-60F3-4147-9D04-93D87D41D5A0}" dt="2026-10-21T00:07:36.816" v="5984" actId="478"/>
-          <ac:picMkLst>
-            <pc:docMk/>
-            <pc:sldMk cId="396072384" sldId="337"/>
-            <ac:picMk id="6" creationId="{E34EDDB3-4C33-212A-1978-327E3B24DAE6}"/>
-          </ac:picMkLst>
-        </pc:picChg>
         <pc:picChg chg="add mod modCrop">
           <ac:chgData name="Simon Fong" userId="0989948daaec8292" providerId="LiveId" clId="{F12E0490-60F3-4147-9D04-93D87D41D5A0}" dt="2026-10-21T12:44:39.277" v="10708" actId="1076"/>
           <ac:picMkLst>
@@ -645,14 +406,6 @@
             <ac:picMk id="6" creationId="{0113398F-8067-9FCA-DFB9-D1306EC3AEB1}"/>
           </ac:picMkLst>
         </pc:picChg>
-        <pc:picChg chg="del">
-          <ac:chgData name="Simon Fong" userId="0989948daaec8292" providerId="LiveId" clId="{F12E0490-60F3-4147-9D04-93D87D41D5A0}" dt="2026-10-21T00:10:13.651" v="6073" actId="478"/>
-          <ac:picMkLst>
-            <pc:docMk/>
-            <pc:sldMk cId="1375253281" sldId="338"/>
-            <ac:picMk id="7" creationId="{D7D0E1C6-D4D6-E8AC-5163-1063C0E91BBE}"/>
-          </ac:picMkLst>
-        </pc:picChg>
       </pc:sldChg>
       <pc:sldChg chg="addSp delSp modSp add mod modTransition addAnim delAnim modAnim">
         <pc:chgData name="Simon Fong" userId="0989948daaec8292" providerId="LiveId" clId="{F12E0490-60F3-4147-9D04-93D87D41D5A0}" dt="2026-10-21T18:56:22.208" v="11676"/>
@@ -682,14 +435,6 @@
             <pc:docMk/>
             <pc:sldMk cId="505333135" sldId="339"/>
             <ac:picMk id="3" creationId="{07108D16-3AF3-F9D0-65BD-BACF91D127F8}"/>
-          </ac:picMkLst>
-        </pc:picChg>
-        <pc:picChg chg="del">
-          <ac:chgData name="Simon Fong" userId="0989948daaec8292" providerId="LiveId" clId="{F12E0490-60F3-4147-9D04-93D87D41D5A0}" dt="2026-10-21T00:11:38.446" v="6094" actId="478"/>
-          <ac:picMkLst>
-            <pc:docMk/>
-            <pc:sldMk cId="505333135" sldId="339"/>
-            <ac:picMk id="6" creationId="{9804ADE4-1FEE-6A60-9693-02E5E2067AB8}"/>
           </ac:picMkLst>
         </pc:picChg>
         <pc:picChg chg="add mod modCrop">
@@ -729,22 +474,6 @@
             <pc:docMk/>
             <pc:sldMk cId="1423773880" sldId="340"/>
             <ac:picMk id="3" creationId="{CD1A1FB7-074D-D384-F826-BC2EADFC39C4}"/>
-          </ac:picMkLst>
-        </pc:picChg>
-        <pc:picChg chg="add del mod">
-          <ac:chgData name="Simon Fong" userId="0989948daaec8292" providerId="LiveId" clId="{F12E0490-60F3-4147-9D04-93D87D41D5A0}" dt="2026-10-21T00:17:25.052" v="6305" actId="478"/>
-          <ac:picMkLst>
-            <pc:docMk/>
-            <pc:sldMk cId="1423773880" sldId="340"/>
-            <ac:picMk id="6" creationId="{7DFB5EBC-5A32-60B9-6B6E-7733FC8DF021}"/>
-          </ac:picMkLst>
-        </pc:picChg>
-        <pc:picChg chg="del">
-          <ac:chgData name="Simon Fong" userId="0989948daaec8292" providerId="LiveId" clId="{F12E0490-60F3-4147-9D04-93D87D41D5A0}" dt="2026-10-21T00:16:24.014" v="6210" actId="478"/>
-          <ac:picMkLst>
-            <pc:docMk/>
-            <pc:sldMk cId="1423773880" sldId="340"/>
-            <ac:picMk id="7" creationId="{461C6E9C-8D81-57C8-2692-F9A6B3EC6907}"/>
           </ac:picMkLst>
         </pc:picChg>
         <pc:picChg chg="add mod">
@@ -880,14 +609,6 @@
             <ac:picMk id="3" creationId="{62AF3FED-C925-2B51-D9A7-7EB468310F54}"/>
           </ac:picMkLst>
         </pc:picChg>
-        <pc:picChg chg="del">
-          <ac:chgData name="Simon Fong" userId="0989948daaec8292" providerId="LiveId" clId="{F12E0490-60F3-4147-9D04-93D87D41D5A0}" dt="2026-10-21T00:33:53.313" v="6934" actId="478"/>
-          <ac:picMkLst>
-            <pc:docMk/>
-            <pc:sldMk cId="3076117219" sldId="343"/>
-            <ac:picMk id="6" creationId="{F65D134C-EA81-8FB9-71AB-E6DA305D4A49}"/>
-          </ac:picMkLst>
-        </pc:picChg>
         <pc:picChg chg="add mod modCrop">
           <ac:chgData name="Simon Fong" userId="0989948daaec8292" providerId="LiveId" clId="{F12E0490-60F3-4147-9D04-93D87D41D5A0}" dt="2026-10-21T12:54:18.031" v="10828" actId="14100"/>
           <ac:picMkLst>
@@ -982,14 +703,6 @@
             <ac:picMk id="3" creationId="{BC3F6471-9A9C-796A-4CB1-543C5ECDD3FE}"/>
           </ac:picMkLst>
         </pc:picChg>
-        <pc:picChg chg="add del">
-          <ac:chgData name="Simon Fong" userId="0989948daaec8292" providerId="LiveId" clId="{F12E0490-60F3-4147-9D04-93D87D41D5A0}" dt="2026-10-21T00:39:49.828" v="7041" actId="22"/>
-          <ac:picMkLst>
-            <pc:docMk/>
-            <pc:sldMk cId="2281329578" sldId="345"/>
-            <ac:picMk id="6" creationId="{ECD6B820-D9C2-EF60-1D3F-745F0396A26A}"/>
-          </ac:picMkLst>
-        </pc:picChg>
         <pc:picChg chg="add mod">
           <ac:chgData name="Simon Fong" userId="0989948daaec8292" providerId="LiveId" clId="{F12E0490-60F3-4147-9D04-93D87D41D5A0}" dt="2026-10-21T03:34:42.062" v="9928" actId="1038"/>
           <ac:picMkLst>
@@ -1076,14 +789,6 @@
             <ac:spMk id="5" creationId="{C3177B20-FA5E-288D-B5DF-5FC6921A267B}"/>
           </ac:spMkLst>
         </pc:spChg>
-        <pc:spChg chg="add del">
-          <ac:chgData name="Simon Fong" userId="0989948daaec8292" providerId="LiveId" clId="{F12E0490-60F3-4147-9D04-93D87D41D5A0}" dt="2026-10-21T00:59:53.080" v="7401" actId="22"/>
-          <ac:spMkLst>
-            <pc:docMk/>
-            <pc:sldMk cId="1132955163" sldId="347"/>
-            <ac:spMk id="9" creationId="{D56ED7A4-3821-7C3C-49E6-1EF1EA4463D0}"/>
-          </ac:spMkLst>
-        </pc:spChg>
         <pc:spChg chg="add mod">
           <ac:chgData name="Simon Fong" userId="0989948daaec8292" providerId="LiveId" clId="{F12E0490-60F3-4147-9D04-93D87D41D5A0}" dt="2026-10-21T01:16:34.868" v="7670" actId="164"/>
           <ac:spMkLst>
@@ -1117,14 +822,6 @@
           </ac:spMkLst>
         </pc:spChg>
         <pc:grpChg chg="add mod">
-          <ac:chgData name="Simon Fong" userId="0989948daaec8292" providerId="LiveId" clId="{F12E0490-60F3-4147-9D04-93D87D41D5A0}" dt="2026-10-21T01:16:26.717" v="7669" actId="164"/>
-          <ac:grpSpMkLst>
-            <pc:docMk/>
-            <pc:sldMk cId="1132955163" sldId="347"/>
-            <ac:grpSpMk id="26" creationId="{C062F457-9B80-36D5-E12B-26B318CFE729}"/>
-          </ac:grpSpMkLst>
-        </pc:grpChg>
-        <pc:grpChg chg="add mod">
           <ac:chgData name="Simon Fong" userId="0989948daaec8292" providerId="LiveId" clId="{F12E0490-60F3-4147-9D04-93D87D41D5A0}" dt="2026-10-21T01:16:37.696" v="7678" actId="1037"/>
           <ac:grpSpMkLst>
             <pc:docMk/>
@@ -1138,14 +835,6 @@
             <pc:docMk/>
             <pc:sldMk cId="1132955163" sldId="347"/>
             <ac:picMk id="3" creationId="{704F9162-1995-0B33-DE0C-A591DD97D287}"/>
-          </ac:picMkLst>
-        </pc:picChg>
-        <pc:picChg chg="del">
-          <ac:chgData name="Simon Fong" userId="0989948daaec8292" providerId="LiveId" clId="{F12E0490-60F3-4147-9D04-93D87D41D5A0}" dt="2026-10-21T00:58:17.025" v="7363" actId="478"/>
-          <ac:picMkLst>
-            <pc:docMk/>
-            <pc:sldMk cId="1132955163" sldId="347"/>
-            <ac:picMk id="6" creationId="{A3B022F2-2AB9-2DC6-641B-C2C2D813D41C}"/>
           </ac:picMkLst>
         </pc:picChg>
         <pc:picChg chg="mod">
@@ -1219,36 +908,12 @@
             <ac:spMk id="5" creationId="{0EB6E484-19CC-C114-9DEE-B0273D5D8E11}"/>
           </ac:spMkLst>
         </pc:spChg>
-        <pc:spChg chg="del">
-          <ac:chgData name="Simon Fong" userId="0989948daaec8292" providerId="LiveId" clId="{F12E0490-60F3-4147-9D04-93D87D41D5A0}" dt="2026-10-21T01:16:53.745" v="7679" actId="478"/>
-          <ac:spMkLst>
-            <pc:docMk/>
-            <pc:sldMk cId="944892801" sldId="348"/>
-            <ac:spMk id="19" creationId="{212E7FC7-0C3A-4D9D-FB54-2209C3EC9548}"/>
-          </ac:spMkLst>
-        </pc:spChg>
         <pc:spChg chg="mod">
           <ac:chgData name="Simon Fong" userId="0989948daaec8292" providerId="LiveId" clId="{F12E0490-60F3-4147-9D04-93D87D41D5A0}" dt="2026-10-21T13:02:06.422" v="10936" actId="2085"/>
           <ac:spMkLst>
             <pc:docMk/>
             <pc:sldMk cId="944892801" sldId="348"/>
             <ac:spMk id="21" creationId="{352C6DE9-F32F-7217-21DA-18494A14E2B8}"/>
-          </ac:spMkLst>
-        </pc:spChg>
-        <pc:spChg chg="del">
-          <ac:chgData name="Simon Fong" userId="0989948daaec8292" providerId="LiveId" clId="{F12E0490-60F3-4147-9D04-93D87D41D5A0}" dt="2026-10-21T01:16:53.745" v="7679" actId="478"/>
-          <ac:spMkLst>
-            <pc:docMk/>
-            <pc:sldMk cId="944892801" sldId="348"/>
-            <ac:spMk id="22" creationId="{AAE13F48-738B-9EA0-E55D-989A1284F9B6}"/>
-          </ac:spMkLst>
-        </pc:spChg>
-        <pc:spChg chg="del">
-          <ac:chgData name="Simon Fong" userId="0989948daaec8292" providerId="LiveId" clId="{F12E0490-60F3-4147-9D04-93D87D41D5A0}" dt="2026-10-21T01:16:53.745" v="7679" actId="478"/>
-          <ac:spMkLst>
-            <pc:docMk/>
-            <pc:sldMk cId="944892801" sldId="348"/>
-            <ac:spMk id="24" creationId="{DD2192DC-8BD1-E46C-D2AD-4ED5A2385799}"/>
           </ac:spMkLst>
         </pc:spChg>
         <pc:picChg chg="mod">
@@ -1283,46 +948,6 @@
             <ac:picMk id="8" creationId="{F62D9AFC-ED56-E949-DE18-FFCFB6C858DE}"/>
           </ac:picMkLst>
         </pc:picChg>
-        <pc:picChg chg="del">
-          <ac:chgData name="Simon Fong" userId="0989948daaec8292" providerId="LiveId" clId="{F12E0490-60F3-4147-9D04-93D87D41D5A0}" dt="2026-10-21T01:16:53.745" v="7679" actId="478"/>
-          <ac:picMkLst>
-            <pc:docMk/>
-            <pc:sldMk cId="944892801" sldId="348"/>
-            <ac:picMk id="11" creationId="{7539AE32-9030-2418-E148-5F97D4A74946}"/>
-          </ac:picMkLst>
-        </pc:picChg>
-        <pc:picChg chg="del">
-          <ac:chgData name="Simon Fong" userId="0989948daaec8292" providerId="LiveId" clId="{F12E0490-60F3-4147-9D04-93D87D41D5A0}" dt="2026-10-21T01:16:53.745" v="7679" actId="478"/>
-          <ac:picMkLst>
-            <pc:docMk/>
-            <pc:sldMk cId="944892801" sldId="348"/>
-            <ac:picMk id="13" creationId="{B762DE06-9771-0939-CB53-2425371FE04E}"/>
-          </ac:picMkLst>
-        </pc:picChg>
-        <pc:picChg chg="del">
-          <ac:chgData name="Simon Fong" userId="0989948daaec8292" providerId="LiveId" clId="{F12E0490-60F3-4147-9D04-93D87D41D5A0}" dt="2026-10-21T01:16:53.745" v="7679" actId="478"/>
-          <ac:picMkLst>
-            <pc:docMk/>
-            <pc:sldMk cId="944892801" sldId="348"/>
-            <ac:picMk id="15" creationId="{B21C0BAA-2B62-7556-2010-49959A14671D}"/>
-          </ac:picMkLst>
-        </pc:picChg>
-        <pc:cxnChg chg="del mod">
-          <ac:chgData name="Simon Fong" userId="0989948daaec8292" providerId="LiveId" clId="{F12E0490-60F3-4147-9D04-93D87D41D5A0}" dt="2026-10-21T01:16:53.745" v="7679" actId="478"/>
-          <ac:cxnSpMkLst>
-            <pc:docMk/>
-            <pc:sldMk cId="944892801" sldId="348"/>
-            <ac:cxnSpMk id="17" creationId="{3FD279FD-7FAD-6421-27DA-CC79C1BBD65D}"/>
-          </ac:cxnSpMkLst>
-        </pc:cxnChg>
-        <pc:cxnChg chg="del">
-          <ac:chgData name="Simon Fong" userId="0989948daaec8292" providerId="LiveId" clId="{F12E0490-60F3-4147-9D04-93D87D41D5A0}" dt="2026-10-21T01:16:53.745" v="7679" actId="478"/>
-          <ac:cxnSpMkLst>
-            <pc:docMk/>
-            <pc:sldMk cId="944892801" sldId="348"/>
-            <ac:cxnSpMk id="18" creationId="{481999CD-8E26-33A2-FD66-5345BD21CB7C}"/>
-          </ac:cxnSpMkLst>
-        </pc:cxnChg>
       </pc:sldChg>
       <pc:sldChg chg="addSp delSp modSp add mod modTransition addAnim delAnim modAnim modNotesTx">
         <pc:chgData name="Simon Fong" userId="0989948daaec8292" providerId="LiveId" clId="{F12E0490-60F3-4147-9D04-93D87D41D5A0}" dt="2026-10-21T19:07:54.844" v="11765"/>
@@ -1352,14 +977,6 @@
             <pc:docMk/>
             <pc:sldMk cId="3024977880" sldId="349"/>
             <ac:picMk id="3" creationId="{8E027EEA-3421-82EA-F581-A2E44FFE522A}"/>
-          </ac:picMkLst>
-        </pc:picChg>
-        <pc:picChg chg="del">
-          <ac:chgData name="Simon Fong" userId="0989948daaec8292" providerId="LiveId" clId="{F12E0490-60F3-4147-9D04-93D87D41D5A0}" dt="2026-10-21T01:24:06.748" v="7814" actId="478"/>
-          <ac:picMkLst>
-            <pc:docMk/>
-            <pc:sldMk cId="3024977880" sldId="349"/>
-            <ac:picMk id="6" creationId="{8FD5C782-A16B-1F66-D513-D0434A1D2D1B}"/>
           </ac:picMkLst>
         </pc:picChg>
         <pc:picChg chg="mod">
@@ -1441,14 +1058,6 @@
             <ac:picMk id="8" creationId="{1F626FD9-84B5-5477-E4E1-7CE57E0CB7CB}"/>
           </ac:picMkLst>
         </pc:picChg>
-        <pc:picChg chg="del">
-          <ac:chgData name="Simon Fong" userId="0989948daaec8292" providerId="LiveId" clId="{F12E0490-60F3-4147-9D04-93D87D41D5A0}" dt="2026-10-21T01:26:13.247" v="7912" actId="478"/>
-          <ac:picMkLst>
-            <pc:docMk/>
-            <pc:sldMk cId="949559913" sldId="350"/>
-            <ac:picMk id="9" creationId="{8DAC61F1-D710-D532-F0BB-E15236367CB5}"/>
-          </ac:picMkLst>
-        </pc:picChg>
       </pc:sldChg>
       <pc:sldChg chg="addSp modSp add mod ord modTransition addAnim delAnim modAnim">
         <pc:chgData name="Simon Fong" userId="0989948daaec8292" providerId="LiveId" clId="{F12E0490-60F3-4147-9D04-93D87D41D5A0}" dt="2026-10-21T19:10:25.893" v="11786"/>
@@ -1511,14 +1120,6 @@
           <pc:docMk/>
           <pc:sldMk cId="3509043029" sldId="352"/>
         </pc:sldMkLst>
-        <pc:spChg chg="add del mod">
-          <ac:chgData name="Simon Fong" userId="0989948daaec8292" providerId="LiveId" clId="{F12E0490-60F3-4147-9D04-93D87D41D5A0}" dt="2026-10-21T15:44:47.267" v="11156" actId="478"/>
-          <ac:spMkLst>
-            <pc:docMk/>
-            <pc:sldMk cId="3509043029" sldId="352"/>
-            <ac:spMk id="4" creationId="{1A9BB750-2024-D94A-FB28-94DB7B44C532}"/>
-          </ac:spMkLst>
-        </pc:spChg>
         <pc:spChg chg="mod">
           <ac:chgData name="Simon Fong" userId="0989948daaec8292" providerId="LiveId" clId="{F12E0490-60F3-4147-9D04-93D87D41D5A0}" dt="2026-10-21T15:41:11.683" v="11113" actId="20577"/>
           <ac:spMkLst>
@@ -1543,22 +1144,6 @@
             <ac:spMk id="21" creationId="{E39DA962-E80A-58D4-CA24-ED389FFC3611}"/>
           </ac:spMkLst>
         </pc:spChg>
-        <pc:picChg chg="del">
-          <ac:chgData name="Simon Fong" userId="0989948daaec8292" providerId="LiveId" clId="{F12E0490-60F3-4147-9D04-93D87D41D5A0}" dt="2026-10-21T01:39:01.170" v="8434" actId="478"/>
-          <ac:picMkLst>
-            <pc:docMk/>
-            <pc:sldMk cId="3509043029" sldId="352"/>
-            <ac:picMk id="2" creationId="{E4C10581-6728-955E-B621-55F3C0533202}"/>
-          </ac:picMkLst>
-        </pc:picChg>
-        <pc:picChg chg="del">
-          <ac:chgData name="Simon Fong" userId="0989948daaec8292" providerId="LiveId" clId="{F12E0490-60F3-4147-9D04-93D87D41D5A0}" dt="2026-10-21T01:39:04.218" v="8437" actId="478"/>
-          <ac:picMkLst>
-            <pc:docMk/>
-            <pc:sldMk cId="3509043029" sldId="352"/>
-            <ac:picMk id="3" creationId="{17B3222E-0A71-47BB-A67F-AD137F569B64}"/>
-          </ac:picMkLst>
-        </pc:picChg>
         <pc:picChg chg="add mod">
           <ac:chgData name="Simon Fong" userId="0989948daaec8292" providerId="LiveId" clId="{F12E0490-60F3-4147-9D04-93D87D41D5A0}" dt="2026-10-21T16:02:08.647" v="11470" actId="14826"/>
           <ac:picMkLst>
@@ -1567,53 +1152,6 @@
             <ac:picMk id="3" creationId="{362CCE02-A1FF-37A2-6E6D-D2F5AF82E309}"/>
           </ac:picMkLst>
         </pc:picChg>
-        <pc:picChg chg="del">
-          <ac:chgData name="Simon Fong" userId="0989948daaec8292" providerId="LiveId" clId="{F12E0490-60F3-4147-9D04-93D87D41D5A0}" dt="2026-10-21T01:39:10.936" v="8438" actId="478"/>
-          <ac:picMkLst>
-            <pc:docMk/>
-            <pc:sldMk cId="3509043029" sldId="352"/>
-            <ac:picMk id="4" creationId="{9FEF0806-AB6A-A976-3597-2B062635A67C}"/>
-          </ac:picMkLst>
-        </pc:picChg>
-        <pc:picChg chg="del">
-          <ac:chgData name="Simon Fong" userId="0989948daaec8292" providerId="LiveId" clId="{F12E0490-60F3-4147-9D04-93D87D41D5A0}" dt="2026-10-21T01:39:02.600" v="8435" actId="478"/>
-          <ac:picMkLst>
-            <pc:docMk/>
-            <pc:sldMk cId="3509043029" sldId="352"/>
-            <ac:picMk id="7" creationId="{21D133E3-BE84-BAEA-62DC-23EA81893F17}"/>
-          </ac:picMkLst>
-        </pc:picChg>
-        <pc:picChg chg="del">
-          <ac:chgData name="Simon Fong" userId="0989948daaec8292" providerId="LiveId" clId="{F12E0490-60F3-4147-9D04-93D87D41D5A0}" dt="2026-10-21T01:39:03.472" v="8436" actId="478"/>
-          <ac:picMkLst>
-            <pc:docMk/>
-            <pc:sldMk cId="3509043029" sldId="352"/>
-            <ac:picMk id="8" creationId="{ACE0A5DB-EDC8-1B1A-3223-84C6EF9F989B}"/>
-          </ac:picMkLst>
-        </pc:picChg>
-      </pc:sldChg>
-      <pc:sldChg chg="modSp add del mod modTransition modAnim">
-        <pc:chgData name="Simon Fong" userId="0989948daaec8292" providerId="LiveId" clId="{F12E0490-60F3-4147-9D04-93D87D41D5A0}" dt="2026-10-21T16:17:20.058" v="11516" actId="47"/>
-        <pc:sldMkLst>
-          <pc:docMk/>
-          <pc:sldMk cId="2288475341" sldId="353"/>
-        </pc:sldMkLst>
-        <pc:spChg chg="mod">
-          <ac:chgData name="Simon Fong" userId="0989948daaec8292" providerId="LiveId" clId="{F12E0490-60F3-4147-9D04-93D87D41D5A0}" dt="2026-10-21T03:52:44.965" v="10486" actId="207"/>
-          <ac:spMkLst>
-            <pc:docMk/>
-            <pc:sldMk cId="2288475341" sldId="353"/>
-            <ac:spMk id="5" creationId="{2F486437-8353-4EE1-0B36-381A28C60947}"/>
-          </ac:spMkLst>
-        </pc:spChg>
-        <pc:spChg chg="mod">
-          <ac:chgData name="Simon Fong" userId="0989948daaec8292" providerId="LiveId" clId="{F12E0490-60F3-4147-9D04-93D87D41D5A0}" dt="2026-10-21T13:10:11.278" v="11027" actId="179"/>
-          <ac:spMkLst>
-            <pc:docMk/>
-            <pc:sldMk cId="2288475341" sldId="353"/>
-            <ac:spMk id="21" creationId="{64829C5F-7205-4D25-5D75-E2EE5D0EA75D}"/>
-          </ac:spMkLst>
-        </pc:spChg>
       </pc:sldChg>
       <pc:sldChg chg="modSp add mod modTransition addAnim delAnim modAnim modNotesTx">
         <pc:chgData name="Simon Fong" userId="0989948daaec8292" providerId="LiveId" clId="{F12E0490-60F3-4147-9D04-93D87D41D5A0}" dt="2026-10-21T18:52:23.940" v="11643"/>
@@ -1637,13 +1175,6 @@
             <ac:picMk id="15" creationId="{8A30C845-2B6A-C67B-FAAA-D62650087A95}"/>
           </ac:picMkLst>
         </pc:picChg>
-      </pc:sldChg>
-      <pc:sldChg chg="add del">
-        <pc:chgData name="Simon Fong" userId="0989948daaec8292" providerId="LiveId" clId="{F12E0490-60F3-4147-9D04-93D87D41D5A0}" dt="2026-10-21T16:17:18.525" v="11515" actId="47"/>
-        <pc:sldMkLst>
-          <pc:docMk/>
-          <pc:sldMk cId="2882348766" sldId="355"/>
-        </pc:sldMkLst>
       </pc:sldChg>
       <pc:sldChg chg="modSp add mod modTransition modAnim modNotesTx">
         <pc:chgData name="Simon Fong" userId="0989948daaec8292" providerId="LiveId" clId="{F12E0490-60F3-4147-9D04-93D87D41D5A0}" dt="2026-10-21T19:11:58.499" v="11804"/>
@@ -1737,68 +1268,6 @@
           </ac:picMkLst>
         </pc:picChg>
       </pc:sldChg>
-      <pc:sldChg chg="addSp delSp modSp add del mod ord modAnim">
-        <pc:chgData name="Simon Fong" userId="0989948daaec8292" providerId="LiveId" clId="{F12E0490-60F3-4147-9D04-93D87D41D5A0}" dt="2026-10-21T16:26:16.958" v="11521" actId="47"/>
-        <pc:sldMkLst>
-          <pc:docMk/>
-          <pc:sldMk cId="1680775075" sldId="360"/>
-        </pc:sldMkLst>
-        <pc:spChg chg="mod">
-          <ac:chgData name="Simon Fong" userId="0989948daaec8292" providerId="LiveId" clId="{F12E0490-60F3-4147-9D04-93D87D41D5A0}" dt="2026-10-21T16:06:19.652" v="11496" actId="6549"/>
-          <ac:spMkLst>
-            <pc:docMk/>
-            <pc:sldMk cId="1680775075" sldId="360"/>
-            <ac:spMk id="24" creationId="{B2AD38A4-933B-FD5B-9076-F68F658375BB}"/>
-          </ac:spMkLst>
-        </pc:spChg>
-        <pc:picChg chg="add del">
-          <ac:chgData name="Simon Fong" userId="0989948daaec8292" providerId="LiveId" clId="{F12E0490-60F3-4147-9D04-93D87D41D5A0}" dt="2026-10-21T16:25:46.364" v="11519" actId="478"/>
-          <ac:picMkLst>
-            <pc:docMk/>
-            <pc:sldMk cId="1680775075" sldId="360"/>
-            <ac:picMk id="32" creationId="{9DC1DDB9-497D-8B88-4CD4-839ECD382119}"/>
-          </ac:picMkLst>
-        </pc:picChg>
-      </pc:sldChg>
-      <pc:sldChg chg="addSp delSp modSp add del mod">
-        <pc:chgData name="Simon Fong" userId="0989948daaec8292" providerId="LiveId" clId="{F12E0490-60F3-4147-9D04-93D87D41D5A0}" dt="2026-10-21T16:33:17.911" v="11530" actId="2696"/>
-        <pc:sldMkLst>
-          <pc:docMk/>
-          <pc:sldMk cId="3816560892" sldId="361"/>
-        </pc:sldMkLst>
-        <pc:spChg chg="add mod">
-          <ac:chgData name="Simon Fong" userId="0989948daaec8292" providerId="LiveId" clId="{F12E0490-60F3-4147-9D04-93D87D41D5A0}" dt="2026-10-21T16:33:04.352" v="11526" actId="767"/>
-          <ac:spMkLst>
-            <pc:docMk/>
-            <pc:sldMk cId="3816560892" sldId="361"/>
-            <ac:spMk id="2" creationId="{A4ED4B4B-66AE-1466-4274-8981F4B4E026}"/>
-          </ac:spMkLst>
-        </pc:spChg>
-        <pc:spChg chg="del">
-          <ac:chgData name="Simon Fong" userId="0989948daaec8292" providerId="LiveId" clId="{F12E0490-60F3-4147-9D04-93D87D41D5A0}" dt="2026-10-21T16:26:21.029" v="11523" actId="478"/>
-          <ac:spMkLst>
-            <pc:docMk/>
-            <pc:sldMk cId="3816560892" sldId="361"/>
-            <ac:spMk id="6" creationId="{AD36CEF3-907A-5FAA-A0AA-00F3AA75DF6A}"/>
-          </ac:spMkLst>
-        </pc:spChg>
-        <pc:spChg chg="mod">
-          <ac:chgData name="Simon Fong" userId="0989948daaec8292" providerId="LiveId" clId="{F12E0490-60F3-4147-9D04-93D87D41D5A0}" dt="2026-10-21T16:33:01.954" v="11524" actId="6549"/>
-          <ac:spMkLst>
-            <pc:docMk/>
-            <pc:sldMk cId="3816560892" sldId="361"/>
-            <ac:spMk id="21" creationId="{B4BF7C72-A591-B7DE-8384-D5728952FAB5}"/>
-          </ac:spMkLst>
-        </pc:spChg>
-        <pc:picChg chg="del">
-          <ac:chgData name="Simon Fong" userId="0989948daaec8292" providerId="LiveId" clId="{F12E0490-60F3-4147-9D04-93D87D41D5A0}" dt="2026-10-21T16:26:19.726" v="11522" actId="478"/>
-          <ac:picMkLst>
-            <pc:docMk/>
-            <pc:sldMk cId="3816560892" sldId="361"/>
-            <ac:picMk id="3" creationId="{351619FB-5C3B-9F5F-D261-555764810D54}"/>
-          </ac:picMkLst>
-        </pc:picChg>
-      </pc:sldChg>
       <pc:sldChg chg="delSp modSp add mod ord modTransition delAnim modAnim">
         <pc:chgData name="Simon Fong" userId="0989948daaec8292" providerId="LiveId" clId="{F12E0490-60F3-4147-9D04-93D87D41D5A0}" dt="2026-10-21T21:52:59.412" v="11834"/>
         <pc:sldMkLst>
@@ -1821,46 +1290,6 @@
             <ac:spMk id="21" creationId="{6858D4A1-E58F-932C-99AE-B99C27499249}"/>
           </ac:spMkLst>
         </pc:spChg>
-        <pc:picChg chg="del">
-          <ac:chgData name="Simon Fong" userId="0989948daaec8292" providerId="LiveId" clId="{F12E0490-60F3-4147-9D04-93D87D41D5A0}" dt="2026-10-21T16:33:30.173" v="11536" actId="478"/>
-          <ac:picMkLst>
-            <pc:docMk/>
-            <pc:sldMk cId="1607717512" sldId="362"/>
-            <ac:picMk id="2" creationId="{CDBD5C7E-692D-E1FA-DAB2-2CB4B42A46F8}"/>
-          </ac:picMkLst>
-        </pc:picChg>
-        <pc:picChg chg="del">
-          <ac:chgData name="Simon Fong" userId="0989948daaec8292" providerId="LiveId" clId="{F12E0490-60F3-4147-9D04-93D87D41D5A0}" dt="2026-10-21T16:33:27.421" v="11533" actId="478"/>
-          <ac:picMkLst>
-            <pc:docMk/>
-            <pc:sldMk cId="1607717512" sldId="362"/>
-            <ac:picMk id="3" creationId="{C9C2669A-78EB-885C-E3F8-A6332C39F64D}"/>
-          </ac:picMkLst>
-        </pc:picChg>
-        <pc:picChg chg="del">
-          <ac:chgData name="Simon Fong" userId="0989948daaec8292" providerId="LiveId" clId="{F12E0490-60F3-4147-9D04-93D87D41D5A0}" dt="2026-10-21T16:33:25.989" v="11532" actId="478"/>
-          <ac:picMkLst>
-            <pc:docMk/>
-            <pc:sldMk cId="1607717512" sldId="362"/>
-            <ac:picMk id="4" creationId="{DA75CFDA-51D7-560A-695D-1A14CDE67B5F}"/>
-          </ac:picMkLst>
-        </pc:picChg>
-        <pc:picChg chg="del">
-          <ac:chgData name="Simon Fong" userId="0989948daaec8292" providerId="LiveId" clId="{F12E0490-60F3-4147-9D04-93D87D41D5A0}" dt="2026-10-21T16:33:29.261" v="11535" actId="478"/>
-          <ac:picMkLst>
-            <pc:docMk/>
-            <pc:sldMk cId="1607717512" sldId="362"/>
-            <ac:picMk id="7" creationId="{11056B17-B6C3-85D6-2263-BDF546DF4F9D}"/>
-          </ac:picMkLst>
-        </pc:picChg>
-        <pc:picChg chg="del">
-          <ac:chgData name="Simon Fong" userId="0989948daaec8292" providerId="LiveId" clId="{F12E0490-60F3-4147-9D04-93D87D41D5A0}" dt="2026-10-21T16:33:28.207" v="11534" actId="478"/>
-          <ac:picMkLst>
-            <pc:docMk/>
-            <pc:sldMk cId="1607717512" sldId="362"/>
-            <ac:picMk id="8" creationId="{6B74F5B2-4564-46F5-77D3-47C592773978}"/>
-          </ac:picMkLst>
-        </pc:picChg>
       </pc:sldChg>
       <pc:sldChg chg="add del">
         <pc:chgData name="Simon Fong" userId="0989948daaec8292" providerId="LiveId" clId="{F12E0490-60F3-4147-9D04-93D87D41D5A0}" dt="2026-10-22T20:46:24.781" v="11836" actId="2890"/>
@@ -2059,7 +1488,7 @@
           <a:p>
             <a:fld id="{DE5C3641-D97D-4221-8E4A-4CE191803EE4}" type="datetimeFigureOut">
               <a:rPr lang="en-CA" smtClean="0"/>
-              <a:t>2026-10-22</a:t>
+              <a:t>2026-10-23</a:t>
             </a:fld>
             <a:endParaRPr lang="en-CA"/>
           </a:p>
@@ -5624,7 +5053,7 @@
           <a:p>
             <a:fld id="{8D757EAC-F02C-41AB-966A-B857386BB5B4}" type="datetimeFigureOut">
               <a:rPr lang="en-CA" smtClean="0"/>
-              <a:t>2026-10-22</a:t>
+              <a:t>2026-10-23</a:t>
             </a:fld>
             <a:endParaRPr lang="en-CA"/>
           </a:p>
@@ -5824,7 +5253,7 @@
           <a:p>
             <a:fld id="{8D757EAC-F02C-41AB-966A-B857386BB5B4}" type="datetimeFigureOut">
               <a:rPr lang="en-CA" smtClean="0"/>
-              <a:t>2026-10-22</a:t>
+              <a:t>2026-10-23</a:t>
             </a:fld>
             <a:endParaRPr lang="en-CA"/>
           </a:p>
@@ -6034,7 +5463,7 @@
           <a:p>
             <a:fld id="{8D757EAC-F02C-41AB-966A-B857386BB5B4}" type="datetimeFigureOut">
               <a:rPr lang="en-CA" smtClean="0"/>
-              <a:t>2026-10-22</a:t>
+              <a:t>2026-10-23</a:t>
             </a:fld>
             <a:endParaRPr lang="en-CA"/>
           </a:p>
@@ -6325,7 +5754,7 @@
           <a:p>
             <a:fld id="{9961397C-706D-4EB8-B1E1-D1B680D284C3}" type="datetime1">
               <a:rPr lang="en-US" smtClean="0"/>
-              <a:t>10/22/2026</a:t>
+              <a:t>10/23/2026</a:t>
             </a:fld>
             <a:endParaRPr lang="en-US"/>
           </a:p>
@@ -6530,7 +5959,7 @@
           <a:p>
             <a:fld id="{8D757EAC-F02C-41AB-966A-B857386BB5B4}" type="datetimeFigureOut">
               <a:rPr lang="en-CA" smtClean="0"/>
-              <a:t>2026-10-22</a:t>
+              <a:t>2026-10-23</a:t>
             </a:fld>
             <a:endParaRPr lang="en-CA"/>
           </a:p>
@@ -6806,7 +6235,7 @@
           <a:p>
             <a:fld id="{8D757EAC-F02C-41AB-966A-B857386BB5B4}" type="datetimeFigureOut">
               <a:rPr lang="en-CA" smtClean="0"/>
-              <a:t>2026-10-22</a:t>
+              <a:t>2026-10-23</a:t>
             </a:fld>
             <a:endParaRPr lang="en-CA"/>
           </a:p>
@@ -7074,7 +6503,7 @@
           <a:p>
             <a:fld id="{8D757EAC-F02C-41AB-966A-B857386BB5B4}" type="datetimeFigureOut">
               <a:rPr lang="en-CA" smtClean="0"/>
-              <a:t>2026-10-22</a:t>
+              <a:t>2026-10-23</a:t>
             </a:fld>
             <a:endParaRPr lang="en-CA"/>
           </a:p>
@@ -7489,7 +6918,7 @@
           <a:p>
             <a:fld id="{8D757EAC-F02C-41AB-966A-B857386BB5B4}" type="datetimeFigureOut">
               <a:rPr lang="en-CA" smtClean="0"/>
-              <a:t>2026-10-22</a:t>
+              <a:t>2026-10-23</a:t>
             </a:fld>
             <a:endParaRPr lang="en-CA"/>
           </a:p>
@@ -7631,7 +7060,7 @@
           <a:p>
             <a:fld id="{8D757EAC-F02C-41AB-966A-B857386BB5B4}" type="datetimeFigureOut">
               <a:rPr lang="en-CA" smtClean="0"/>
-              <a:t>2026-10-22</a:t>
+              <a:t>2026-10-23</a:t>
             </a:fld>
             <a:endParaRPr lang="en-CA"/>
           </a:p>
@@ -7744,7 +7173,7 @@
           <a:p>
             <a:fld id="{8D757EAC-F02C-41AB-966A-B857386BB5B4}" type="datetimeFigureOut">
               <a:rPr lang="en-CA" smtClean="0"/>
-              <a:t>2026-10-22</a:t>
+              <a:t>2026-10-23</a:t>
             </a:fld>
             <a:endParaRPr lang="en-CA"/>
           </a:p>
@@ -8057,7 +7486,7 @@
           <a:p>
             <a:fld id="{8D757EAC-F02C-41AB-966A-B857386BB5B4}" type="datetimeFigureOut">
               <a:rPr lang="en-CA" smtClean="0"/>
-              <a:t>2026-10-22</a:t>
+              <a:t>2026-10-23</a:t>
             </a:fld>
             <a:endParaRPr lang="en-CA"/>
           </a:p>
@@ -8346,7 +7775,7 @@
           <a:p>
             <a:fld id="{8D757EAC-F02C-41AB-966A-B857386BB5B4}" type="datetimeFigureOut">
               <a:rPr lang="en-CA" smtClean="0"/>
-              <a:t>2026-10-22</a:t>
+              <a:t>2026-10-23</a:t>
             </a:fld>
             <a:endParaRPr lang="en-CA"/>
           </a:p>
@@ -8599,7 +8028,7 @@
           <a:p>
             <a:fld id="{8D757EAC-F02C-41AB-966A-B857386BB5B4}" type="datetimeFigureOut">
               <a:rPr lang="en-CA" smtClean="0"/>
-              <a:t>2026-10-22</a:t>
+              <a:t>2026-10-23</a:t>
             </a:fld>
             <a:endParaRPr lang="en-CA"/>
           </a:p>
@@ -9288,7 +8717,7 @@
                 </a:solidFill>
                 <a:latin typeface="Consolas" panose="020B0609020204030204" pitchFamily="49" charset="0"/>
               </a:rPr>
-              <a:t>Attack. Detect. Harden.</a:t>
+              <a:t>Attack. Detect. Harden. Integrate</a:t>
             </a:r>
           </a:p>
         </p:txBody>

--- a/docs/slide/post01_eks_breach.pptx
+++ b/docs/slide/post01_eks_breach.pptx
@@ -144,7 +144,7 @@
 <file path=ppt/revisionInfo.xml><?xml version="1.0" encoding="utf-8"?>
 <p1510:revInfo xmlns:a="http://schemas.openxmlformats.org/drawingml/2006/main" xmlns:r="http://schemas.openxmlformats.org/officeDocument/2006/relationships" xmlns:p1510="http://schemas.microsoft.com/office/powerpoint/2015/10/main">
   <p1510:revLst>
-    <p1510:client id="{90388DFC-2480-48D6-ACA5-3B253BE164C6}" v="5682" dt="2026-10-23T20:28:44.836"/>
+    <p1510:client id="{90388DFC-2480-48D6-ACA5-3B253BE164C6}" v="5701" dt="2026-10-23T21:31:42.544"/>
   </p1510:revLst>
 </p1510:revInfo>
 </file>
@@ -154,7 +154,7 @@
   <pc:docChgLst>
     <pc:chgData name="Simon Fong" userId="0989948daaec8292" providerId="LiveId" clId="{F12E0490-60F3-4147-9D04-93D87D41D5A0}"/>
     <pc:docChg chg="undo redo custSel addSld delSld modSld sldOrd modMainMaster">
-      <pc:chgData name="Simon Fong" userId="0989948daaec8292" providerId="LiveId" clId="{F12E0490-60F3-4147-9D04-93D87D41D5A0}" dt="2026-10-23T20:28:44.836" v="11837"/>
+      <pc:chgData name="Simon Fong" userId="0989948daaec8292" providerId="LiveId" clId="{F12E0490-60F3-4147-9D04-93D87D41D5A0}" dt="2026-10-23T21:31:53.240" v="11957" actId="6549"/>
       <pc:docMkLst>
         <pc:docMk/>
       </pc:docMkLst>
@@ -190,13 +190,13 @@
         </pc:picChg>
       </pc:sldChg>
       <pc:sldChg chg="addSp delSp modSp add mod modTransition setBg addAnim delAnim modAnim">
-        <pc:chgData name="Simon Fong" userId="0989948daaec8292" providerId="LiveId" clId="{F12E0490-60F3-4147-9D04-93D87D41D5A0}" dt="2026-10-21T18:52:23.940" v="11643"/>
+        <pc:chgData name="Simon Fong" userId="0989948daaec8292" providerId="LiveId" clId="{F12E0490-60F3-4147-9D04-93D87D41D5A0}" dt="2026-10-23T21:28:56.328" v="11870" actId="14100"/>
         <pc:sldMkLst>
           <pc:docMk/>
           <pc:sldMk cId="1681895122" sldId="331"/>
         </pc:sldMkLst>
         <pc:spChg chg="mod">
-          <ac:chgData name="Simon Fong" userId="0989948daaec8292" providerId="LiveId" clId="{F12E0490-60F3-4147-9D04-93D87D41D5A0}" dt="2026-10-21T12:40:59.055" v="10689" actId="20577"/>
+          <ac:chgData name="Simon Fong" userId="0989948daaec8292" providerId="LiveId" clId="{F12E0490-60F3-4147-9D04-93D87D41D5A0}" dt="2026-10-23T21:28:24.104" v="11838" actId="6549"/>
           <ac:spMkLst>
             <pc:docMk/>
             <pc:sldMk cId="1681895122" sldId="331"/>
@@ -220,7 +220,7 @@
           </ac:picMkLst>
         </pc:picChg>
         <pc:picChg chg="add mod">
-          <ac:chgData name="Simon Fong" userId="0989948daaec8292" providerId="LiveId" clId="{F12E0490-60F3-4147-9D04-93D87D41D5A0}" dt="2026-10-21T12:41:19.991" v="10692" actId="1076"/>
+          <ac:chgData name="Simon Fong" userId="0989948daaec8292" providerId="LiveId" clId="{F12E0490-60F3-4147-9D04-93D87D41D5A0}" dt="2026-10-23T21:28:56.328" v="11870" actId="14100"/>
           <ac:picMkLst>
             <pc:docMk/>
             <pc:sldMk cId="1681895122" sldId="331"/>
@@ -229,13 +229,13 @@
         </pc:picChg>
       </pc:sldChg>
       <pc:sldChg chg="addSp delSp modSp add mod modTransition setBg addAnim delAnim modAnim">
-        <pc:chgData name="Simon Fong" userId="0989948daaec8292" providerId="LiveId" clId="{F12E0490-60F3-4147-9D04-93D87D41D5A0}" dt="2026-10-21T18:52:23.940" v="11643"/>
+        <pc:chgData name="Simon Fong" userId="0989948daaec8292" providerId="LiveId" clId="{F12E0490-60F3-4147-9D04-93D87D41D5A0}" dt="2026-10-23T21:28:47.249" v="11869" actId="1076"/>
         <pc:sldMkLst>
           <pc:docMk/>
           <pc:sldMk cId="4215080606" sldId="333"/>
         </pc:sldMkLst>
         <pc:spChg chg="mod">
-          <ac:chgData name="Simon Fong" userId="0989948daaec8292" providerId="LiveId" clId="{F12E0490-60F3-4147-9D04-93D87D41D5A0}" dt="2026-10-21T12:41:59.232" v="10694" actId="20577"/>
+          <ac:chgData name="Simon Fong" userId="0989948daaec8292" providerId="LiveId" clId="{F12E0490-60F3-4147-9D04-93D87D41D5A0}" dt="2026-10-23T21:28:36.711" v="11866" actId="6549"/>
           <ac:spMkLst>
             <pc:docMk/>
             <pc:sldMk cId="4215080606" sldId="333"/>
@@ -251,7 +251,7 @@
           </ac:spMkLst>
         </pc:spChg>
         <pc:picChg chg="mod modCrop">
-          <ac:chgData name="Simon Fong" userId="0989948daaec8292" providerId="LiveId" clId="{F12E0490-60F3-4147-9D04-93D87D41D5A0}" dt="2026-10-21T12:42:09.463" v="10695" actId="14100"/>
+          <ac:chgData name="Simon Fong" userId="0989948daaec8292" providerId="LiveId" clId="{F12E0490-60F3-4147-9D04-93D87D41D5A0}" dt="2026-10-23T21:28:47.249" v="11869" actId="1076"/>
           <ac:picMkLst>
             <pc:docMk/>
             <pc:sldMk cId="4215080606" sldId="333"/>
@@ -260,13 +260,13 @@
         </pc:picChg>
       </pc:sldChg>
       <pc:sldChg chg="addSp delSp modSp add mod modTransition addAnim delAnim modAnim">
-        <pc:chgData name="Simon Fong" userId="0989948daaec8292" providerId="LiveId" clId="{F12E0490-60F3-4147-9D04-93D87D41D5A0}" dt="2026-10-21T18:53:11.933" v="11658"/>
+        <pc:chgData name="Simon Fong" userId="0989948daaec8292" providerId="LiveId" clId="{F12E0490-60F3-4147-9D04-93D87D41D5A0}" dt="2026-10-23T21:29:01.195" v="11871" actId="6549"/>
         <pc:sldMkLst>
           <pc:docMk/>
           <pc:sldMk cId="1266063993" sldId="335"/>
         </pc:sldMkLst>
         <pc:spChg chg="mod">
-          <ac:chgData name="Simon Fong" userId="0989948daaec8292" providerId="LiveId" clId="{F12E0490-60F3-4147-9D04-93D87D41D5A0}" dt="2026-10-21T12:42:39.741" v="10697" actId="20577"/>
+          <ac:chgData name="Simon Fong" userId="0989948daaec8292" providerId="LiveId" clId="{F12E0490-60F3-4147-9D04-93D87D41D5A0}" dt="2026-10-23T21:29:01.195" v="11871" actId="6549"/>
           <ac:spMkLst>
             <pc:docMk/>
             <pc:sldMk cId="1266063993" sldId="335"/>
@@ -291,13 +291,13 @@
         </pc:picChg>
       </pc:sldChg>
       <pc:sldChg chg="addSp modSp add mod modTransition addAnim delAnim modAnim">
-        <pc:chgData name="Simon Fong" userId="0989948daaec8292" providerId="LiveId" clId="{F12E0490-60F3-4147-9D04-93D87D41D5A0}" dt="2026-10-21T18:54:08.916" v="11668"/>
+        <pc:chgData name="Simon Fong" userId="0989948daaec8292" providerId="LiveId" clId="{F12E0490-60F3-4147-9D04-93D87D41D5A0}" dt="2026-10-23T21:29:06.188" v="11872" actId="6549"/>
         <pc:sldMkLst>
           <pc:docMk/>
           <pc:sldMk cId="1291358676" sldId="336"/>
         </pc:sldMkLst>
         <pc:spChg chg="mod">
-          <ac:chgData name="Simon Fong" userId="0989948daaec8292" providerId="LiveId" clId="{F12E0490-60F3-4147-9D04-93D87D41D5A0}" dt="2026-10-21T12:43:52.623" v="10705" actId="5793"/>
+          <ac:chgData name="Simon Fong" userId="0989948daaec8292" providerId="LiveId" clId="{F12E0490-60F3-4147-9D04-93D87D41D5A0}" dt="2026-10-23T21:29:06.188" v="11872" actId="6549"/>
           <ac:spMkLst>
             <pc:docMk/>
             <pc:sldMk cId="1291358676" sldId="336"/>
@@ -330,13 +330,13 @@
         </pc:picChg>
       </pc:sldChg>
       <pc:sldChg chg="addSp delSp modSp add mod modTransition addAnim delAnim modAnim">
-        <pc:chgData name="Simon Fong" userId="0989948daaec8292" providerId="LiveId" clId="{F12E0490-60F3-4147-9D04-93D87D41D5A0}" dt="2026-10-21T18:54:44.247" v="11673"/>
+        <pc:chgData name="Simon Fong" userId="0989948daaec8292" providerId="LiveId" clId="{F12E0490-60F3-4147-9D04-93D87D41D5A0}" dt="2026-10-23T21:29:34.415" v="11878" actId="1076"/>
         <pc:sldMkLst>
           <pc:docMk/>
           <pc:sldMk cId="396072384" sldId="337"/>
         </pc:sldMkLst>
         <pc:spChg chg="mod">
-          <ac:chgData name="Simon Fong" userId="0989948daaec8292" providerId="LiveId" clId="{F12E0490-60F3-4147-9D04-93D87D41D5A0}" dt="2026-10-21T12:44:31.004" v="10707" actId="20577"/>
+          <ac:chgData name="Simon Fong" userId="0989948daaec8292" providerId="LiveId" clId="{F12E0490-60F3-4147-9D04-93D87D41D5A0}" dt="2026-10-23T21:29:14.607" v="11873" actId="6549"/>
           <ac:spMkLst>
             <pc:docMk/>
             <pc:sldMk cId="396072384" sldId="337"/>
@@ -360,7 +360,7 @@
           </ac:picMkLst>
         </pc:picChg>
         <pc:picChg chg="add mod modCrop">
-          <ac:chgData name="Simon Fong" userId="0989948daaec8292" providerId="LiveId" clId="{F12E0490-60F3-4147-9D04-93D87D41D5A0}" dt="2026-10-21T12:44:39.277" v="10708" actId="1076"/>
+          <ac:chgData name="Simon Fong" userId="0989948daaec8292" providerId="LiveId" clId="{F12E0490-60F3-4147-9D04-93D87D41D5A0}" dt="2026-10-23T21:29:34.415" v="11878" actId="1076"/>
           <ac:picMkLst>
             <pc:docMk/>
             <pc:sldMk cId="396072384" sldId="337"/>
@@ -369,13 +369,13 @@
         </pc:picChg>
       </pc:sldChg>
       <pc:sldChg chg="addSp delSp modSp add mod modTransition addAnim delAnim modAnim">
-        <pc:chgData name="Simon Fong" userId="0989948daaec8292" providerId="LiveId" clId="{F12E0490-60F3-4147-9D04-93D87D41D5A0}" dt="2026-10-21T18:55:21.935" v="11674"/>
+        <pc:chgData name="Simon Fong" userId="0989948daaec8292" providerId="LiveId" clId="{F12E0490-60F3-4147-9D04-93D87D41D5A0}" dt="2026-10-23T21:29:31.230" v="11877" actId="1076"/>
         <pc:sldMkLst>
           <pc:docMk/>
           <pc:sldMk cId="1375253281" sldId="338"/>
         </pc:sldMkLst>
         <pc:spChg chg="mod">
-          <ac:chgData name="Simon Fong" userId="0989948daaec8292" providerId="LiveId" clId="{F12E0490-60F3-4147-9D04-93D87D41D5A0}" dt="2026-10-21T12:45:03.431" v="10709" actId="20577"/>
+          <ac:chgData name="Simon Fong" userId="0989948daaec8292" providerId="LiveId" clId="{F12E0490-60F3-4147-9D04-93D87D41D5A0}" dt="2026-10-23T21:29:22.414" v="11875" actId="6549"/>
           <ac:spMkLst>
             <pc:docMk/>
             <pc:sldMk cId="1375253281" sldId="338"/>
@@ -399,7 +399,7 @@
           </ac:picMkLst>
         </pc:picChg>
         <pc:picChg chg="add mod modCrop">
-          <ac:chgData name="Simon Fong" userId="0989948daaec8292" providerId="LiveId" clId="{F12E0490-60F3-4147-9D04-93D87D41D5A0}" dt="2026-10-21T12:45:09.624" v="10710" actId="1076"/>
+          <ac:chgData name="Simon Fong" userId="0989948daaec8292" providerId="LiveId" clId="{F12E0490-60F3-4147-9D04-93D87D41D5A0}" dt="2026-10-23T21:29:31.230" v="11877" actId="1076"/>
           <ac:picMkLst>
             <pc:docMk/>
             <pc:sldMk cId="1375253281" sldId="338"/>
@@ -408,13 +408,13 @@
         </pc:picChg>
       </pc:sldChg>
       <pc:sldChg chg="addSp delSp modSp add mod modTransition addAnim delAnim modAnim">
-        <pc:chgData name="Simon Fong" userId="0989948daaec8292" providerId="LiveId" clId="{F12E0490-60F3-4147-9D04-93D87D41D5A0}" dt="2026-10-21T18:56:22.208" v="11676"/>
+        <pc:chgData name="Simon Fong" userId="0989948daaec8292" providerId="LiveId" clId="{F12E0490-60F3-4147-9D04-93D87D41D5A0}" dt="2026-10-23T21:29:44.980" v="11881" actId="14100"/>
         <pc:sldMkLst>
           <pc:docMk/>
           <pc:sldMk cId="505333135" sldId="339"/>
         </pc:sldMkLst>
         <pc:spChg chg="mod">
-          <ac:chgData name="Simon Fong" userId="0989948daaec8292" providerId="LiveId" clId="{F12E0490-60F3-4147-9D04-93D87D41D5A0}" dt="2026-10-21T12:45:43.912" v="10713" actId="20577"/>
+          <ac:chgData name="Simon Fong" userId="0989948daaec8292" providerId="LiveId" clId="{F12E0490-60F3-4147-9D04-93D87D41D5A0}" dt="2026-10-23T21:29:38.895" v="11879" actId="6549"/>
           <ac:spMkLst>
             <pc:docMk/>
             <pc:sldMk cId="505333135" sldId="339"/>
@@ -438,7 +438,7 @@
           </ac:picMkLst>
         </pc:picChg>
         <pc:picChg chg="add mod modCrop">
-          <ac:chgData name="Simon Fong" userId="0989948daaec8292" providerId="LiveId" clId="{F12E0490-60F3-4147-9D04-93D87D41D5A0}" dt="2026-10-21T12:46:19.148" v="10730" actId="14100"/>
+          <ac:chgData name="Simon Fong" userId="0989948daaec8292" providerId="LiveId" clId="{F12E0490-60F3-4147-9D04-93D87D41D5A0}" dt="2026-10-23T21:29:44.980" v="11881" actId="14100"/>
           <ac:picMkLst>
             <pc:docMk/>
             <pc:sldMk cId="505333135" sldId="339"/>
@@ -447,13 +447,13 @@
         </pc:picChg>
       </pc:sldChg>
       <pc:sldChg chg="addSp delSp modSp add mod modTransition addAnim delAnim modAnim">
-        <pc:chgData name="Simon Fong" userId="0989948daaec8292" providerId="LiveId" clId="{F12E0490-60F3-4147-9D04-93D87D41D5A0}" dt="2026-10-21T18:56:50.800" v="11689"/>
+        <pc:chgData name="Simon Fong" userId="0989948daaec8292" providerId="LiveId" clId="{F12E0490-60F3-4147-9D04-93D87D41D5A0}" dt="2026-10-23T21:29:50.396" v="11882" actId="6549"/>
         <pc:sldMkLst>
           <pc:docMk/>
           <pc:sldMk cId="1423773880" sldId="340"/>
         </pc:sldMkLst>
         <pc:spChg chg="mod">
-          <ac:chgData name="Simon Fong" userId="0989948daaec8292" providerId="LiveId" clId="{F12E0490-60F3-4147-9D04-93D87D41D5A0}" dt="2026-10-21T13:16:50.560" v="11075" actId="5793"/>
+          <ac:chgData name="Simon Fong" userId="0989948daaec8292" providerId="LiveId" clId="{F12E0490-60F3-4147-9D04-93D87D41D5A0}" dt="2026-10-23T21:29:50.396" v="11882" actId="6549"/>
           <ac:spMkLst>
             <pc:docMk/>
             <pc:sldMk cId="1423773880" sldId="340"/>
@@ -486,13 +486,13 @@
         </pc:picChg>
       </pc:sldChg>
       <pc:sldChg chg="addSp modSp add mod modTransition addAnim delAnim modAnim">
-        <pc:chgData name="Simon Fong" userId="0989948daaec8292" providerId="LiveId" clId="{F12E0490-60F3-4147-9D04-93D87D41D5A0}" dt="2026-10-21T18:57:44.884" v="11698"/>
+        <pc:chgData name="Simon Fong" userId="0989948daaec8292" providerId="LiveId" clId="{F12E0490-60F3-4147-9D04-93D87D41D5A0}" dt="2026-10-23T21:30:00.160" v="11885" actId="14100"/>
         <pc:sldMkLst>
           <pc:docMk/>
           <pc:sldMk cId="1129737174" sldId="341"/>
         </pc:sldMkLst>
         <pc:spChg chg="mod">
-          <ac:chgData name="Simon Fong" userId="0989948daaec8292" providerId="LiveId" clId="{F12E0490-60F3-4147-9D04-93D87D41D5A0}" dt="2026-10-21T12:50:43.345" v="10795" actId="207"/>
+          <ac:chgData name="Simon Fong" userId="0989948daaec8292" providerId="LiveId" clId="{F12E0490-60F3-4147-9D04-93D87D41D5A0}" dt="2026-10-23T21:29:54.176" v="11883" actId="6549"/>
           <ac:spMkLst>
             <pc:docMk/>
             <pc:sldMk cId="1129737174" sldId="341"/>
@@ -516,7 +516,7 @@
           </ac:picMkLst>
         </pc:picChg>
         <pc:picChg chg="add mod modCrop">
-          <ac:chgData name="Simon Fong" userId="0989948daaec8292" providerId="LiveId" clId="{F12E0490-60F3-4147-9D04-93D87D41D5A0}" dt="2026-10-21T12:48:56.700" v="10773" actId="1076"/>
+          <ac:chgData name="Simon Fong" userId="0989948daaec8292" providerId="LiveId" clId="{F12E0490-60F3-4147-9D04-93D87D41D5A0}" dt="2026-10-23T21:30:00.160" v="11885" actId="14100"/>
           <ac:picMkLst>
             <pc:docMk/>
             <pc:sldMk cId="1129737174" sldId="341"/>
@@ -533,13 +533,13 @@
         </pc:picChg>
       </pc:sldChg>
       <pc:sldChg chg="modSp add mod modTransition addAnim delAnim modAnim">
-        <pc:chgData name="Simon Fong" userId="0989948daaec8292" providerId="LiveId" clId="{F12E0490-60F3-4147-9D04-93D87D41D5A0}" dt="2026-10-21T18:58:35.473" v="11708"/>
+        <pc:chgData name="Simon Fong" userId="0989948daaec8292" providerId="LiveId" clId="{F12E0490-60F3-4147-9D04-93D87D41D5A0}" dt="2026-10-23T21:30:07.926" v="11901" actId="1036"/>
         <pc:sldMkLst>
           <pc:docMk/>
           <pc:sldMk cId="2851113903" sldId="342"/>
         </pc:sldMkLst>
         <pc:spChg chg="mod">
-          <ac:chgData name="Simon Fong" userId="0989948daaec8292" providerId="LiveId" clId="{F12E0490-60F3-4147-9D04-93D87D41D5A0}" dt="2026-10-21T12:51:50.883" v="10805" actId="20577"/>
+          <ac:chgData name="Simon Fong" userId="0989948daaec8292" providerId="LiveId" clId="{F12E0490-60F3-4147-9D04-93D87D41D5A0}" dt="2026-10-23T21:30:04.010" v="11886" actId="6549"/>
           <ac:spMkLst>
             <pc:docMk/>
             <pc:sldMk cId="2851113903" sldId="342"/>
@@ -563,7 +563,7 @@
           </ac:picMkLst>
         </pc:picChg>
         <pc:picChg chg="mod modCrop">
-          <ac:chgData name="Simon Fong" userId="0989948daaec8292" providerId="LiveId" clId="{F12E0490-60F3-4147-9D04-93D87D41D5A0}" dt="2026-10-21T00:31:00.854" v="6791" actId="1076"/>
+          <ac:chgData name="Simon Fong" userId="0989948daaec8292" providerId="LiveId" clId="{F12E0490-60F3-4147-9D04-93D87D41D5A0}" dt="2026-10-23T21:30:07.926" v="11901" actId="1036"/>
           <ac:picMkLst>
             <pc:docMk/>
             <pc:sldMk cId="2851113903" sldId="342"/>
@@ -580,13 +580,13 @@
         </pc:picChg>
       </pc:sldChg>
       <pc:sldChg chg="addSp delSp modSp add mod modTransition addAnim delAnim modAnim">
-        <pc:chgData name="Simon Fong" userId="0989948daaec8292" providerId="LiveId" clId="{F12E0490-60F3-4147-9D04-93D87D41D5A0}" dt="2026-10-21T18:52:23.940" v="11643"/>
+        <pc:chgData name="Simon Fong" userId="0989948daaec8292" providerId="LiveId" clId="{F12E0490-60F3-4147-9D04-93D87D41D5A0}" dt="2026-10-23T21:30:17.474" v="11904" actId="14100"/>
         <pc:sldMkLst>
           <pc:docMk/>
           <pc:sldMk cId="3076117219" sldId="343"/>
         </pc:sldMkLst>
         <pc:spChg chg="mod">
-          <ac:chgData name="Simon Fong" userId="0989948daaec8292" providerId="LiveId" clId="{F12E0490-60F3-4147-9D04-93D87D41D5A0}" dt="2026-10-21T12:55:22.581" v="10844" actId="207"/>
+          <ac:chgData name="Simon Fong" userId="0989948daaec8292" providerId="LiveId" clId="{F12E0490-60F3-4147-9D04-93D87D41D5A0}" dt="2026-10-23T21:30:11.348" v="11902" actId="6549"/>
           <ac:spMkLst>
             <pc:docMk/>
             <pc:sldMk cId="3076117219" sldId="343"/>
@@ -610,7 +610,7 @@
           </ac:picMkLst>
         </pc:picChg>
         <pc:picChg chg="add mod modCrop">
-          <ac:chgData name="Simon Fong" userId="0989948daaec8292" providerId="LiveId" clId="{F12E0490-60F3-4147-9D04-93D87D41D5A0}" dt="2026-10-21T12:54:18.031" v="10828" actId="14100"/>
+          <ac:chgData name="Simon Fong" userId="0989948daaec8292" providerId="LiveId" clId="{F12E0490-60F3-4147-9D04-93D87D41D5A0}" dt="2026-10-23T21:30:17.474" v="11904" actId="14100"/>
           <ac:picMkLst>
             <pc:docMk/>
             <pc:sldMk cId="3076117219" sldId="343"/>
@@ -627,13 +627,13 @@
         </pc:picChg>
       </pc:sldChg>
       <pc:sldChg chg="modSp add mod modTransition addAnim delAnim modAnim">
-        <pc:chgData name="Simon Fong" userId="0989948daaec8292" providerId="LiveId" clId="{F12E0490-60F3-4147-9D04-93D87D41D5A0}" dt="2026-10-21T18:59:16.956" v="11709"/>
+        <pc:chgData name="Simon Fong" userId="0989948daaec8292" providerId="LiveId" clId="{F12E0490-60F3-4147-9D04-93D87D41D5A0}" dt="2026-10-23T21:30:25.745" v="11918" actId="1035"/>
         <pc:sldMkLst>
           <pc:docMk/>
           <pc:sldMk cId="673011083" sldId="344"/>
         </pc:sldMkLst>
         <pc:spChg chg="mod">
-          <ac:chgData name="Simon Fong" userId="0989948daaec8292" providerId="LiveId" clId="{F12E0490-60F3-4147-9D04-93D87D41D5A0}" dt="2026-10-21T13:18:14.529" v="11078" actId="20577"/>
+          <ac:chgData name="Simon Fong" userId="0989948daaec8292" providerId="LiveId" clId="{F12E0490-60F3-4147-9D04-93D87D41D5A0}" dt="2026-10-23T21:30:21.808" v="11905" actId="6549"/>
           <ac:spMkLst>
             <pc:docMk/>
             <pc:sldMk cId="673011083" sldId="344"/>
@@ -657,7 +657,7 @@
           </ac:picMkLst>
         </pc:picChg>
         <pc:picChg chg="mod modCrop">
-          <ac:chgData name="Simon Fong" userId="0989948daaec8292" providerId="LiveId" clId="{F12E0490-60F3-4147-9D04-93D87D41D5A0}" dt="2026-10-21T13:18:18.563" v="11079" actId="1076"/>
+          <ac:chgData name="Simon Fong" userId="0989948daaec8292" providerId="LiveId" clId="{F12E0490-60F3-4147-9D04-93D87D41D5A0}" dt="2026-10-23T21:30:25.745" v="11918" actId="1035"/>
           <ac:picMkLst>
             <pc:docMk/>
             <pc:sldMk cId="673011083" sldId="344"/>
@@ -674,13 +674,13 @@
         </pc:picChg>
       </pc:sldChg>
       <pc:sldChg chg="addSp delSp modSp add mod ord modTransition addAnim delAnim modAnim modNotesTx">
-        <pc:chgData name="Simon Fong" userId="0989948daaec8292" providerId="LiveId" clId="{F12E0490-60F3-4147-9D04-93D87D41D5A0}" dt="2026-10-21T19:00:07.226" v="11723"/>
+        <pc:chgData name="Simon Fong" userId="0989948daaec8292" providerId="LiveId" clId="{F12E0490-60F3-4147-9D04-93D87D41D5A0}" dt="2026-10-23T21:30:30.064" v="11919" actId="6549"/>
         <pc:sldMkLst>
           <pc:docMk/>
           <pc:sldMk cId="2281329578" sldId="345"/>
         </pc:sldMkLst>
         <pc:spChg chg="mod">
-          <ac:chgData name="Simon Fong" userId="0989948daaec8292" providerId="LiveId" clId="{F12E0490-60F3-4147-9D04-93D87D41D5A0}" dt="2026-10-21T12:57:04.513" v="10872" actId="20577"/>
+          <ac:chgData name="Simon Fong" userId="0989948daaec8292" providerId="LiveId" clId="{F12E0490-60F3-4147-9D04-93D87D41D5A0}" dt="2026-10-23T21:30:30.064" v="11919" actId="6549"/>
           <ac:spMkLst>
             <pc:docMk/>
             <pc:sldMk cId="2281329578" sldId="345"/>
@@ -721,13 +721,13 @@
         </pc:picChg>
       </pc:sldChg>
       <pc:sldChg chg="addSp modSp add mod modTransition addAnim delAnim modAnim">
-        <pc:chgData name="Simon Fong" userId="0989948daaec8292" providerId="LiveId" clId="{F12E0490-60F3-4147-9D04-93D87D41D5A0}" dt="2026-10-21T19:00:55.134" v="11732"/>
+        <pc:chgData name="Simon Fong" userId="0989948daaec8292" providerId="LiveId" clId="{F12E0490-60F3-4147-9D04-93D87D41D5A0}" dt="2026-10-23T21:30:41.608" v="11922" actId="14100"/>
         <pc:sldMkLst>
           <pc:docMk/>
           <pc:sldMk cId="15008574" sldId="346"/>
         </pc:sldMkLst>
         <pc:spChg chg="mod">
-          <ac:chgData name="Simon Fong" userId="0989948daaec8292" providerId="LiveId" clId="{F12E0490-60F3-4147-9D04-93D87D41D5A0}" dt="2026-10-21T12:57:28.138" v="10875" actId="20577"/>
+          <ac:chgData name="Simon Fong" userId="0989948daaec8292" providerId="LiveId" clId="{F12E0490-60F3-4147-9D04-93D87D41D5A0}" dt="2026-10-23T21:30:33.522" v="11920" actId="6549"/>
           <ac:spMkLst>
             <pc:docMk/>
             <pc:sldMk cId="15008574" sldId="346"/>
@@ -751,7 +751,7 @@
           </ac:picMkLst>
         </pc:picChg>
         <pc:picChg chg="add mod modCrop">
-          <ac:chgData name="Simon Fong" userId="0989948daaec8292" providerId="LiveId" clId="{F12E0490-60F3-4147-9D04-93D87D41D5A0}" dt="2026-10-21T12:57:40.759" v="10877" actId="1076"/>
+          <ac:chgData name="Simon Fong" userId="0989948daaec8292" providerId="LiveId" clId="{F12E0490-60F3-4147-9D04-93D87D41D5A0}" dt="2026-10-23T21:30:41.608" v="11922" actId="14100"/>
           <ac:picMkLst>
             <pc:docMk/>
             <pc:sldMk cId="15008574" sldId="346"/>
@@ -776,13 +776,13 @@
         </pc:picChg>
       </pc:sldChg>
       <pc:sldChg chg="addSp delSp modSp add mod modTransition addAnim delAnim modAnim">
-        <pc:chgData name="Simon Fong" userId="0989948daaec8292" providerId="LiveId" clId="{F12E0490-60F3-4147-9D04-93D87D41D5A0}" dt="2026-10-21T19:06:11.842" v="11745"/>
+        <pc:chgData name="Simon Fong" userId="0989948daaec8292" providerId="LiveId" clId="{F12E0490-60F3-4147-9D04-93D87D41D5A0}" dt="2026-10-23T21:30:46.062" v="11923" actId="6549"/>
         <pc:sldMkLst>
           <pc:docMk/>
           <pc:sldMk cId="1132955163" sldId="347"/>
         </pc:sldMkLst>
         <pc:spChg chg="mod">
-          <ac:chgData name="Simon Fong" userId="0989948daaec8292" providerId="LiveId" clId="{F12E0490-60F3-4147-9D04-93D87D41D5A0}" dt="2026-10-21T12:59:43.893" v="10902" actId="20577"/>
+          <ac:chgData name="Simon Fong" userId="0989948daaec8292" providerId="LiveId" clId="{F12E0490-60F3-4147-9D04-93D87D41D5A0}" dt="2026-10-23T21:30:46.062" v="11923" actId="6549"/>
           <ac:spMkLst>
             <pc:docMk/>
             <pc:sldMk cId="1132955163" sldId="347"/>
@@ -895,13 +895,13 @@
         </pc:cxnChg>
       </pc:sldChg>
       <pc:sldChg chg="addSp delSp modSp add mod modTransition addAnim delAnim modAnim">
-        <pc:chgData name="Simon Fong" userId="0989948daaec8292" providerId="LiveId" clId="{F12E0490-60F3-4147-9D04-93D87D41D5A0}" dt="2026-10-21T19:06:53.062" v="11755"/>
+        <pc:chgData name="Simon Fong" userId="0989948daaec8292" providerId="LiveId" clId="{F12E0490-60F3-4147-9D04-93D87D41D5A0}" dt="2026-10-23T21:30:57.355" v="11946" actId="1036"/>
         <pc:sldMkLst>
           <pc:docMk/>
           <pc:sldMk cId="944892801" sldId="348"/>
         </pc:sldMkLst>
         <pc:spChg chg="mod">
-          <ac:chgData name="Simon Fong" userId="0989948daaec8292" providerId="LiveId" clId="{F12E0490-60F3-4147-9D04-93D87D41D5A0}" dt="2026-10-21T13:01:41.185" v="10923" actId="20577"/>
+          <ac:chgData name="Simon Fong" userId="0989948daaec8292" providerId="LiveId" clId="{F12E0490-60F3-4147-9D04-93D87D41D5A0}" dt="2026-10-23T21:30:52.923" v="11924" actId="6549"/>
           <ac:spMkLst>
             <pc:docMk/>
             <pc:sldMk cId="944892801" sldId="348"/>
@@ -925,7 +925,7 @@
           </ac:picMkLst>
         </pc:picChg>
         <pc:picChg chg="add mod modCrop">
-          <ac:chgData name="Simon Fong" userId="0989948daaec8292" providerId="LiveId" clId="{F12E0490-60F3-4147-9D04-93D87D41D5A0}" dt="2026-10-21T13:01:43.731" v="10924" actId="1076"/>
+          <ac:chgData name="Simon Fong" userId="0989948daaec8292" providerId="LiveId" clId="{F12E0490-60F3-4147-9D04-93D87D41D5A0}" dt="2026-10-23T21:30:57.355" v="11946" actId="1036"/>
           <ac:picMkLst>
             <pc:docMk/>
             <pc:sldMk cId="944892801" sldId="348"/>
@@ -950,13 +950,13 @@
         </pc:picChg>
       </pc:sldChg>
       <pc:sldChg chg="addSp delSp modSp add mod modTransition addAnim delAnim modAnim modNotesTx">
-        <pc:chgData name="Simon Fong" userId="0989948daaec8292" providerId="LiveId" clId="{F12E0490-60F3-4147-9D04-93D87D41D5A0}" dt="2026-10-21T19:07:54.844" v="11765"/>
+        <pc:chgData name="Simon Fong" userId="0989948daaec8292" providerId="LiveId" clId="{F12E0490-60F3-4147-9D04-93D87D41D5A0}" dt="2026-10-23T21:31:20.021" v="11951" actId="1076"/>
         <pc:sldMkLst>
           <pc:docMk/>
           <pc:sldMk cId="3024977880" sldId="349"/>
         </pc:sldMkLst>
         <pc:spChg chg="mod">
-          <ac:chgData name="Simon Fong" userId="0989948daaec8292" providerId="LiveId" clId="{F12E0490-60F3-4147-9D04-93D87D41D5A0}" dt="2026-10-21T13:21:43.651" v="11111" actId="207"/>
+          <ac:chgData name="Simon Fong" userId="0989948daaec8292" providerId="LiveId" clId="{F12E0490-60F3-4147-9D04-93D87D41D5A0}" dt="2026-10-23T21:31:03.240" v="11947" actId="6549"/>
           <ac:spMkLst>
             <pc:docMk/>
             <pc:sldMk cId="3024977880" sldId="349"/>
@@ -996,7 +996,7 @@
           </ac:picMkLst>
         </pc:picChg>
         <pc:picChg chg="add mod modCrop">
-          <ac:chgData name="Simon Fong" userId="0989948daaec8292" providerId="LiveId" clId="{F12E0490-60F3-4147-9D04-93D87D41D5A0}" dt="2026-10-21T13:03:20.916" v="10945" actId="1076"/>
+          <ac:chgData name="Simon Fong" userId="0989948daaec8292" providerId="LiveId" clId="{F12E0490-60F3-4147-9D04-93D87D41D5A0}" dt="2026-10-23T21:31:20.021" v="11951" actId="1076"/>
           <ac:picMkLst>
             <pc:docMk/>
             <pc:sldMk cId="3024977880" sldId="349"/>
@@ -1005,13 +1005,13 @@
         </pc:picChg>
       </pc:sldChg>
       <pc:sldChg chg="addSp delSp modSp add mod modTransition addAnim delAnim modAnim">
-        <pc:chgData name="Simon Fong" userId="0989948daaec8292" providerId="LiveId" clId="{F12E0490-60F3-4147-9D04-93D87D41D5A0}" dt="2026-10-21T19:09:25.159" v="11774"/>
+        <pc:chgData name="Simon Fong" userId="0989948daaec8292" providerId="LiveId" clId="{F12E0490-60F3-4147-9D04-93D87D41D5A0}" dt="2026-10-23T21:31:38.094" v="11955" actId="1076"/>
         <pc:sldMkLst>
           <pc:docMk/>
           <pc:sldMk cId="949559913" sldId="350"/>
         </pc:sldMkLst>
         <pc:spChg chg="mod">
-          <ac:chgData name="Simon Fong" userId="0989948daaec8292" providerId="LiveId" clId="{F12E0490-60F3-4147-9D04-93D87D41D5A0}" dt="2026-10-21T13:04:36.386" v="10966" actId="2710"/>
+          <ac:chgData name="Simon Fong" userId="0989948daaec8292" providerId="LiveId" clId="{F12E0490-60F3-4147-9D04-93D87D41D5A0}" dt="2026-10-23T21:31:25.268" v="11952" actId="6549"/>
           <ac:spMkLst>
             <pc:docMk/>
             <pc:sldMk cId="949559913" sldId="350"/>
@@ -1035,7 +1035,7 @@
           </ac:picMkLst>
         </pc:picChg>
         <pc:picChg chg="add mod">
-          <ac:chgData name="Simon Fong" userId="0989948daaec8292" providerId="LiveId" clId="{F12E0490-60F3-4147-9D04-93D87D41D5A0}" dt="2026-10-21T13:04:47.882" v="10968" actId="1076"/>
+          <ac:chgData name="Simon Fong" userId="0989948daaec8292" providerId="LiveId" clId="{F12E0490-60F3-4147-9D04-93D87D41D5A0}" dt="2026-10-23T21:31:38.094" v="11955" actId="1076"/>
           <ac:picMkLst>
             <pc:docMk/>
             <pc:sldMk cId="949559913" sldId="350"/>
@@ -1060,13 +1060,13 @@
         </pc:picChg>
       </pc:sldChg>
       <pc:sldChg chg="addSp modSp add mod ord modTransition addAnim delAnim modAnim">
-        <pc:chgData name="Simon Fong" userId="0989948daaec8292" providerId="LiveId" clId="{F12E0490-60F3-4147-9D04-93D87D41D5A0}" dt="2026-10-21T19:10:25.893" v="11786"/>
+        <pc:chgData name="Simon Fong" userId="0989948daaec8292" providerId="LiveId" clId="{F12E0490-60F3-4147-9D04-93D87D41D5A0}" dt="2026-10-23T21:31:42.544" v="11956" actId="6549"/>
         <pc:sldMkLst>
           <pc:docMk/>
           <pc:sldMk cId="531339455" sldId="351"/>
         </pc:sldMkLst>
         <pc:spChg chg="mod">
-          <ac:chgData name="Simon Fong" userId="0989948daaec8292" providerId="LiveId" clId="{F12E0490-60F3-4147-9D04-93D87D41D5A0}" dt="2026-10-21T13:07:52.632" v="11021" actId="207"/>
+          <ac:chgData name="Simon Fong" userId="0989948daaec8292" providerId="LiveId" clId="{F12E0490-60F3-4147-9D04-93D87D41D5A0}" dt="2026-10-23T21:31:42.544" v="11956" actId="6549"/>
           <ac:spMkLst>
             <pc:docMk/>
             <pc:sldMk cId="531339455" sldId="351"/>
@@ -1269,13 +1269,13 @@
         </pc:picChg>
       </pc:sldChg>
       <pc:sldChg chg="delSp modSp add mod ord modTransition delAnim modAnim">
-        <pc:chgData name="Simon Fong" userId="0989948daaec8292" providerId="LiveId" clId="{F12E0490-60F3-4147-9D04-93D87D41D5A0}" dt="2026-10-21T21:52:59.412" v="11834"/>
+        <pc:chgData name="Simon Fong" userId="0989948daaec8292" providerId="LiveId" clId="{F12E0490-60F3-4147-9D04-93D87D41D5A0}" dt="2026-10-23T21:31:53.240" v="11957" actId="6549"/>
         <pc:sldMkLst>
           <pc:docMk/>
           <pc:sldMk cId="1607717512" sldId="362"/>
         </pc:sldMkLst>
         <pc:spChg chg="mod">
-          <ac:chgData name="Simon Fong" userId="0989948daaec8292" providerId="LiveId" clId="{F12E0490-60F3-4147-9D04-93D87D41D5A0}" dt="2026-10-21T21:46:57.035" v="11825" actId="5793"/>
+          <ac:chgData name="Simon Fong" userId="0989948daaec8292" providerId="LiveId" clId="{F12E0490-60F3-4147-9D04-93D87D41D5A0}" dt="2026-10-23T21:31:53.240" v="11957" actId="6549"/>
           <ac:spMkLst>
             <pc:docMk/>
             <pc:sldMk cId="1607717512" sldId="362"/>
@@ -9231,24 +9231,6 @@
               </a:lnSpc>
               <a:buNone/>
             </a:pPr>
-            <a:endParaRPr lang="en-US" sz="3600" b="1" dirty="0">
-              <a:solidFill>
-                <a:schemeClr val="tx1">
-                  <a:lumMod val="95000"/>
-                </a:schemeClr>
-              </a:solidFill>
-              <a:latin typeface="Calibri" panose="020F0502020204030204" pitchFamily="34" charset="0"/>
-              <a:ea typeface="Calibri" panose="020F0502020204030204" pitchFamily="34" charset="0"/>
-              <a:cs typeface="Calibri" panose="020F0502020204030204" pitchFamily="34" charset="0"/>
-            </a:endParaRPr>
-          </a:p>
-          <a:p>
-            <a:pPr marL="0" indent="0">
-              <a:lnSpc>
-                <a:spcPct val="100000"/>
-              </a:lnSpc>
-              <a:buNone/>
-            </a:pPr>
             <a:r>
               <a:rPr lang="en-US" sz="3600" b="1" dirty="0">
                 <a:solidFill>
@@ -9579,7 +9561,7 @@
                                         <p:tgtEl>
                                           <p:spTgt spid="5">
                                             <p:txEl>
-                                              <p:pRg st="1" end="1"/>
+                                              <p:pRg st="0" end="0"/>
                                             </p:txEl>
                                           </p:spTgt>
                                         </p:tgtEl>
@@ -9597,7 +9579,7 @@
                                         <p:tgtEl>
                                           <p:spTgt spid="5">
                                             <p:txEl>
-                                              <p:pRg st="1" end="1"/>
+                                              <p:pRg st="0" end="0"/>
                                             </p:txEl>
                                           </p:spTgt>
                                         </p:tgtEl>
@@ -9631,7 +9613,7 @@
                                         <p:tgtEl>
                                           <p:spTgt spid="5">
                                             <p:txEl>
-                                              <p:pRg st="2" end="2"/>
+                                              <p:pRg st="1" end="1"/>
                                             </p:txEl>
                                           </p:spTgt>
                                         </p:tgtEl>
@@ -9649,872 +9631,9 @@
                                         <p:tgtEl>
                                           <p:spTgt spid="5">
                                             <p:txEl>
-                                              <p:pRg st="2" end="2"/>
-                                            </p:txEl>
-                                          </p:spTgt>
-                                        </p:tgtEl>
-                                      </p:cBhvr>
-                                    </p:animEffect>
-                                  </p:childTnLst>
-                                </p:cTn>
-                              </p:par>
-                            </p:childTnLst>
-                          </p:cTn>
-                        </p:par>
-                        <p:par>
-                          <p:cTn id="12" fill="hold">
-                            <p:stCondLst>
-                              <p:cond delay="4500"/>
-                            </p:stCondLst>
-                            <p:childTnLst>
-                              <p:par>
-                                <p:cTn id="13" presetID="10" presetClass="entr" presetSubtype="0" fill="hold" nodeType="afterEffect">
-                                  <p:stCondLst>
-                                    <p:cond delay="1750"/>
-                                  </p:stCondLst>
-                                  <p:childTnLst>
-                                    <p:set>
-                                      <p:cBhvr>
-                                        <p:cTn id="14" dur="1" fill="hold">
-                                          <p:stCondLst>
-                                            <p:cond delay="0"/>
-                                          </p:stCondLst>
-                                        </p:cTn>
-                                        <p:tgtEl>
-                                          <p:spTgt spid="5">
-                                            <p:txEl>
-                                              <p:pRg st="3" end="3"/>
-                                            </p:txEl>
-                                          </p:spTgt>
-                                        </p:tgtEl>
-                                        <p:attrNameLst>
-                                          <p:attrName>style.visibility</p:attrName>
-                                        </p:attrNameLst>
-                                      </p:cBhvr>
-                                      <p:to>
-                                        <p:strVal val="visible"/>
-                                      </p:to>
-                                    </p:set>
-                                    <p:animEffect transition="in" filter="fade">
-                                      <p:cBhvr>
-                                        <p:cTn id="15" dur="500"/>
-                                        <p:tgtEl>
-                                          <p:spTgt spid="5">
-                                            <p:txEl>
-                                              <p:pRg st="3" end="3"/>
-                                            </p:txEl>
-                                          </p:spTgt>
-                                        </p:tgtEl>
-                                      </p:cBhvr>
-                                    </p:animEffect>
-                                  </p:childTnLst>
-                                </p:cTn>
-                              </p:par>
-                            </p:childTnLst>
-                          </p:cTn>
-                        </p:par>
-                        <p:par>
-                          <p:cTn id="16" fill="hold">
-                            <p:stCondLst>
-                              <p:cond delay="6750"/>
-                            </p:stCondLst>
-                            <p:childTnLst>
-                              <p:par>
-                                <p:cTn id="17" presetID="10" presetClass="entr" presetSubtype="0" fill="hold" nodeType="afterEffect">
-                                  <p:stCondLst>
-                                    <p:cond delay="1750"/>
-                                  </p:stCondLst>
-                                  <p:childTnLst>
-                                    <p:set>
-                                      <p:cBhvr>
-                                        <p:cTn id="18" dur="1" fill="hold">
-                                          <p:stCondLst>
-                                            <p:cond delay="0"/>
-                                          </p:stCondLst>
-                                        </p:cTn>
-                                        <p:tgtEl>
-                                          <p:spTgt spid="5">
-                                            <p:txEl>
-                                              <p:pRg st="4" end="4"/>
-                                            </p:txEl>
-                                          </p:spTgt>
-                                        </p:tgtEl>
-                                        <p:attrNameLst>
-                                          <p:attrName>style.visibility</p:attrName>
-                                        </p:attrNameLst>
-                                      </p:cBhvr>
-                                      <p:to>
-                                        <p:strVal val="visible"/>
-                                      </p:to>
-                                    </p:set>
-                                    <p:animEffect transition="in" filter="fade">
-                                      <p:cBhvr>
-                                        <p:cTn id="19" dur="500"/>
-                                        <p:tgtEl>
-                                          <p:spTgt spid="5">
-                                            <p:txEl>
-                                              <p:pRg st="4" end="4"/>
-                                            </p:txEl>
-                                          </p:spTgt>
-                                        </p:tgtEl>
-                                      </p:cBhvr>
-                                    </p:animEffect>
-                                  </p:childTnLst>
-                                </p:cTn>
-                              </p:par>
-                            </p:childTnLst>
-                          </p:cTn>
-                        </p:par>
-                        <p:par>
-                          <p:cTn id="20" fill="hold">
-                            <p:stCondLst>
-                              <p:cond delay="9000"/>
-                            </p:stCondLst>
-                            <p:childTnLst>
-                              <p:par>
-                                <p:cTn id="21" presetID="1" presetClass="entr" presetSubtype="0" fill="hold" nodeType="afterEffect">
-                                  <p:stCondLst>
-                                    <p:cond delay="1750"/>
-                                  </p:stCondLst>
-                                  <p:childTnLst>
-                                    <p:set>
-                                      <p:cBhvr>
-                                        <p:cTn id="22" dur="1" fill="hold">
-                                          <p:stCondLst>
-                                            <p:cond delay="499"/>
-                                          </p:stCondLst>
-                                        </p:cTn>
-                                        <p:tgtEl>
-                                          <p:spTgt spid="8"/>
-                                        </p:tgtEl>
-                                        <p:attrNameLst>
-                                          <p:attrName>style.visibility</p:attrName>
-                                        </p:attrNameLst>
-                                      </p:cBhvr>
-                                      <p:to>
-                                        <p:strVal val="visible"/>
-                                      </p:to>
-                                    </p:set>
-                                  </p:childTnLst>
-                                </p:cTn>
-                              </p:par>
-                            </p:childTnLst>
-                          </p:cTn>
-                        </p:par>
-                        <p:par>
-                          <p:cTn id="23" fill="hold">
-                            <p:stCondLst>
-                              <p:cond delay="11250"/>
-                            </p:stCondLst>
-                            <p:childTnLst>
-                              <p:par>
-                                <p:cTn id="24" presetID="10" presetClass="entr" presetSubtype="0" fill="hold" nodeType="afterEffect">
-                                  <p:stCondLst>
-                                    <p:cond delay="1750"/>
-                                  </p:stCondLst>
-                                  <p:childTnLst>
-                                    <p:set>
-                                      <p:cBhvr>
-                                        <p:cTn id="25" dur="1" fill="hold">
-                                          <p:stCondLst>
-                                            <p:cond delay="0"/>
-                                          </p:stCondLst>
-                                        </p:cTn>
-                                        <p:tgtEl>
-                                          <p:spTgt spid="5">
-                                            <p:txEl>
-                                              <p:pRg st="7" end="7"/>
-                                            </p:txEl>
-                                          </p:spTgt>
-                                        </p:tgtEl>
-                                        <p:attrNameLst>
-                                          <p:attrName>style.visibility</p:attrName>
-                                        </p:attrNameLst>
-                                      </p:cBhvr>
-                                      <p:to>
-                                        <p:strVal val="visible"/>
-                                      </p:to>
-                                    </p:set>
-                                    <p:animEffect transition="in" filter="fade">
-                                      <p:cBhvr>
-                                        <p:cTn id="26" dur="500"/>
-                                        <p:tgtEl>
-                                          <p:spTgt spid="5">
-                                            <p:txEl>
-                                              <p:pRg st="7" end="7"/>
-                                            </p:txEl>
-                                          </p:spTgt>
-                                        </p:tgtEl>
-                                      </p:cBhvr>
-                                    </p:animEffect>
-                                  </p:childTnLst>
-                                </p:cTn>
-                              </p:par>
-                            </p:childTnLst>
-                          </p:cTn>
-                        </p:par>
-                      </p:childTnLst>
-                    </p:cTn>
-                  </p:par>
-                </p:childTnLst>
-              </p:cTn>
-              <p:prevCondLst>
-                <p:cond evt="onPrev" delay="0">
-                  <p:tgtEl>
-                    <p:sldTgt/>
-                  </p:tgtEl>
-                </p:cond>
-              </p:prevCondLst>
-              <p:nextCondLst>
-                <p:cond evt="onNext" delay="0">
-                  <p:tgtEl>
-                    <p:sldTgt/>
-                  </p:tgtEl>
-                </p:cond>
-              </p:nextCondLst>
-            </p:seq>
-          </p:childTnLst>
-        </p:cTn>
-      </p:par>
-    </p:tnLst>
-  </p:timing>
-</p:sld>
-</file>
-
-<file path=ppt/slides/slide11.xml><?xml version="1.0" encoding="utf-8"?>
-<p:sld xmlns:a="http://schemas.openxmlformats.org/drawingml/2006/main" xmlns:r="http://schemas.openxmlformats.org/officeDocument/2006/relationships" xmlns:p="http://schemas.openxmlformats.org/presentationml/2006/main">
-  <p:cSld>
-    <p:spTree>
-      <p:nvGrpSpPr>
-        <p:cNvPr id="1" name="">
-          <a:extLst>
-            <a:ext uri="{FF2B5EF4-FFF2-40B4-BE49-F238E27FC236}">
-              <a16:creationId xmlns:a16="http://schemas.microsoft.com/office/drawing/2014/main" id="{511A3D60-A1EB-4065-DE70-6D97EFF8FDA7}"/>
-            </a:ext>
-          </a:extLst>
-        </p:cNvPr>
-        <p:cNvGrpSpPr/>
-        <p:nvPr/>
-      </p:nvGrpSpPr>
-      <p:grpSpPr>
-        <a:xfrm>
-          <a:off x="0" y="0"/>
-          <a:ext cx="0" cy="0"/>
-          <a:chOff x="0" y="0"/>
-          <a:chExt cx="0" cy="0"/>
-        </a:xfrm>
-      </p:grpSpPr>
-      <p:sp>
-        <p:nvSpPr>
-          <p:cNvPr id="21" name="Content Placeholder 20">
-            <a:extLst>
-              <a:ext uri="{FF2B5EF4-FFF2-40B4-BE49-F238E27FC236}">
-                <a16:creationId xmlns:a16="http://schemas.microsoft.com/office/drawing/2014/main" id="{467D8542-FFE6-5BEE-B2CF-529F9384DDFB}"/>
-              </a:ext>
-            </a:extLst>
-          </p:cNvPr>
-          <p:cNvSpPr>
-            <a:spLocks noGrp="1"/>
-          </p:cNvSpPr>
-          <p:nvPr>
-            <p:ph idx="1"/>
-          </p:nvPr>
-        </p:nvSpPr>
-        <p:spPr>
-          <a:xfrm>
-            <a:off x="0" y="-1"/>
-            <a:ext cx="12192000" cy="914400"/>
-          </a:xfrm>
-          <a:ln>
-            <a:noFill/>
-          </a:ln>
-        </p:spPr>
-        <p:txBody>
-          <a:bodyPr>
-            <a:normAutofit/>
-          </a:bodyPr>
-          <a:lstStyle/>
-          <a:p>
-            <a:pPr marL="0" indent="0">
-              <a:lnSpc>
-                <a:spcPct val="100000"/>
-              </a:lnSpc>
-              <a:buNone/>
-            </a:pPr>
-            <a:r>
-              <a:rPr lang="en-CA" sz="3200" b="1" dirty="0">
-                <a:solidFill>
-                  <a:schemeClr val="tx1">
-                    <a:lumMod val="95000"/>
-                  </a:schemeClr>
-                </a:solidFill>
-                <a:latin typeface="Calibri" panose="020F0502020204030204" pitchFamily="34" charset="0"/>
-                <a:ea typeface="Calibri" panose="020F0502020204030204" pitchFamily="34" charset="0"/>
-                <a:cs typeface="Calibri" panose="020F0502020204030204" pitchFamily="34" charset="0"/>
-              </a:rPr>
-              <a:t>       Attacker    </a:t>
-            </a:r>
-            <a:r>
-              <a:rPr lang="en-CA" sz="2000" b="1" dirty="0">
-                <a:solidFill>
-                  <a:schemeClr val="tx1">
-                    <a:lumMod val="95000"/>
-                  </a:schemeClr>
-                </a:solidFill>
-                <a:latin typeface="Calibri" panose="020F0502020204030204" pitchFamily="34" charset="0"/>
-                <a:ea typeface="Calibri" panose="020F0502020204030204" pitchFamily="34" charset="0"/>
-                <a:cs typeface="Calibri" panose="020F0502020204030204" pitchFamily="34" charset="0"/>
-              </a:rPr>
-              <a:t>code container cluster cloud</a:t>
-            </a:r>
-          </a:p>
-        </p:txBody>
-      </p:sp>
-      <p:pic>
-        <p:nvPicPr>
-          <p:cNvPr id="4" name="Picture 3">
-            <a:extLst>
-              <a:ext uri="{FF2B5EF4-FFF2-40B4-BE49-F238E27FC236}">
-                <a16:creationId xmlns:a16="http://schemas.microsoft.com/office/drawing/2014/main" id="{62093109-7B90-7B06-6C39-920DB00492C4}"/>
-              </a:ext>
-            </a:extLst>
-          </p:cNvPr>
-          <p:cNvPicPr>
-            <a:picLocks noChangeAspect="1"/>
-          </p:cNvPicPr>
-          <p:nvPr/>
-        </p:nvPicPr>
-        <p:blipFill>
-          <a:blip r:embed="rId3">
-            <a:extLst>
-              <a:ext uri="{28A0092B-C50C-407E-A947-70E740481C1C}">
-                <a14:useLocalDpi xmlns:a14="http://schemas.microsoft.com/office/drawing/2010/main" val="0"/>
-              </a:ext>
-            </a:extLst>
-          </a:blip>
-          <a:stretch>
-            <a:fillRect/>
-          </a:stretch>
-        </p:blipFill>
-        <p:spPr>
-          <a:xfrm>
-            <a:off x="0" y="53280"/>
-            <a:ext cx="731520" cy="731520"/>
-          </a:xfrm>
-          <a:prstGeom prst="rect">
-            <a:avLst/>
-          </a:prstGeom>
-        </p:spPr>
-      </p:pic>
-      <p:sp>
-        <p:nvSpPr>
-          <p:cNvPr id="5" name="Content Placeholder 20">
-            <a:extLst>
-              <a:ext uri="{FF2B5EF4-FFF2-40B4-BE49-F238E27FC236}">
-                <a16:creationId xmlns:a16="http://schemas.microsoft.com/office/drawing/2014/main" id="{D7527AF6-7EB9-6468-B8E6-DAC566666A9A}"/>
-              </a:ext>
-            </a:extLst>
-          </p:cNvPr>
-          <p:cNvSpPr txBox="1">
-            <a:spLocks/>
-          </p:cNvSpPr>
-          <p:nvPr/>
-        </p:nvSpPr>
-        <p:spPr>
-          <a:xfrm>
-            <a:off x="0" y="914399"/>
-            <a:ext cx="12192000" cy="5943601"/>
-          </a:xfrm>
-          <a:prstGeom prst="rect">
-            <a:avLst/>
-          </a:prstGeom>
-        </p:spPr>
-        <p:txBody>
-          <a:bodyPr vert="horz" lIns="91440" tIns="45720" rIns="91440" bIns="45720" rtlCol="0">
-            <a:normAutofit/>
-          </a:bodyPr>
-          <a:lstStyle>
-            <a:lvl1pPr marL="228600" indent="-228600" algn="l" defTabSz="914400" rtl="0" eaLnBrk="1" latinLnBrk="0" hangingPunct="1">
-              <a:lnSpc>
-                <a:spcPct val="90000"/>
-              </a:lnSpc>
-              <a:spcBef>
-                <a:spcPts val="1000"/>
-              </a:spcBef>
-              <a:buFont typeface="Arial" panose="020B0604020202020204" pitchFamily="34" charset="0"/>
-              <a:buChar char="•"/>
-              <a:defRPr sz="2800" kern="1200">
-                <a:solidFill>
-                  <a:schemeClr val="tx1"/>
-                </a:solidFill>
-                <a:latin typeface="+mn-lt"/>
-                <a:ea typeface="+mn-ea"/>
-                <a:cs typeface="+mn-cs"/>
-              </a:defRPr>
-            </a:lvl1pPr>
-            <a:lvl2pPr marL="685800" indent="-228600" algn="l" defTabSz="914400" rtl="0" eaLnBrk="1" latinLnBrk="0" hangingPunct="1">
-              <a:lnSpc>
-                <a:spcPct val="90000"/>
-              </a:lnSpc>
-              <a:spcBef>
-                <a:spcPts val="500"/>
-              </a:spcBef>
-              <a:buFont typeface="Arial" panose="020B0604020202020204" pitchFamily="34" charset="0"/>
-              <a:buChar char="•"/>
-              <a:defRPr sz="2400" kern="1200">
-                <a:solidFill>
-                  <a:schemeClr val="tx1"/>
-                </a:solidFill>
-                <a:latin typeface="+mn-lt"/>
-                <a:ea typeface="+mn-ea"/>
-                <a:cs typeface="+mn-cs"/>
-              </a:defRPr>
-            </a:lvl2pPr>
-            <a:lvl3pPr marL="1143000" indent="-228600" algn="l" defTabSz="914400" rtl="0" eaLnBrk="1" latinLnBrk="0" hangingPunct="1">
-              <a:lnSpc>
-                <a:spcPct val="90000"/>
-              </a:lnSpc>
-              <a:spcBef>
-                <a:spcPts val="500"/>
-              </a:spcBef>
-              <a:buFont typeface="Arial" panose="020B0604020202020204" pitchFamily="34" charset="0"/>
-              <a:buChar char="•"/>
-              <a:defRPr sz="2000" kern="1200">
-                <a:solidFill>
-                  <a:schemeClr val="tx1"/>
-                </a:solidFill>
-                <a:latin typeface="+mn-lt"/>
-                <a:ea typeface="+mn-ea"/>
-                <a:cs typeface="+mn-cs"/>
-              </a:defRPr>
-            </a:lvl3pPr>
-            <a:lvl4pPr marL="1600200" indent="-228600" algn="l" defTabSz="914400" rtl="0" eaLnBrk="1" latinLnBrk="0" hangingPunct="1">
-              <a:lnSpc>
-                <a:spcPct val="90000"/>
-              </a:lnSpc>
-              <a:spcBef>
-                <a:spcPts val="500"/>
-              </a:spcBef>
-              <a:buFont typeface="Arial" panose="020B0604020202020204" pitchFamily="34" charset="0"/>
-              <a:buChar char="•"/>
-              <a:defRPr sz="1800" kern="1200">
-                <a:solidFill>
-                  <a:schemeClr val="tx1"/>
-                </a:solidFill>
-                <a:latin typeface="+mn-lt"/>
-                <a:ea typeface="+mn-ea"/>
-                <a:cs typeface="+mn-cs"/>
-              </a:defRPr>
-            </a:lvl4pPr>
-            <a:lvl5pPr marL="2057400" indent="-228600" algn="l" defTabSz="914400" rtl="0" eaLnBrk="1" latinLnBrk="0" hangingPunct="1">
-              <a:lnSpc>
-                <a:spcPct val="90000"/>
-              </a:lnSpc>
-              <a:spcBef>
-                <a:spcPts val="500"/>
-              </a:spcBef>
-              <a:buFont typeface="Arial" panose="020B0604020202020204" pitchFamily="34" charset="0"/>
-              <a:buChar char="•"/>
-              <a:defRPr sz="1800" kern="1200">
-                <a:solidFill>
-                  <a:schemeClr val="tx1"/>
-                </a:solidFill>
-                <a:latin typeface="+mn-lt"/>
-                <a:ea typeface="+mn-ea"/>
-                <a:cs typeface="+mn-cs"/>
-              </a:defRPr>
-            </a:lvl5pPr>
-            <a:lvl6pPr marL="2514600" indent="-228600" algn="l" defTabSz="914400" rtl="0" eaLnBrk="1" latinLnBrk="0" hangingPunct="1">
-              <a:lnSpc>
-                <a:spcPct val="90000"/>
-              </a:lnSpc>
-              <a:spcBef>
-                <a:spcPts val="500"/>
-              </a:spcBef>
-              <a:buFont typeface="Arial" panose="020B0604020202020204" pitchFamily="34" charset="0"/>
-              <a:buChar char="•"/>
-              <a:defRPr sz="1800" kern="1200">
-                <a:solidFill>
-                  <a:schemeClr val="tx1"/>
-                </a:solidFill>
-                <a:latin typeface="+mn-lt"/>
-                <a:ea typeface="+mn-ea"/>
-                <a:cs typeface="+mn-cs"/>
-              </a:defRPr>
-            </a:lvl6pPr>
-            <a:lvl7pPr marL="2971800" indent="-228600" algn="l" defTabSz="914400" rtl="0" eaLnBrk="1" latinLnBrk="0" hangingPunct="1">
-              <a:lnSpc>
-                <a:spcPct val="90000"/>
-              </a:lnSpc>
-              <a:spcBef>
-                <a:spcPts val="500"/>
-              </a:spcBef>
-              <a:buFont typeface="Arial" panose="020B0604020202020204" pitchFamily="34" charset="0"/>
-              <a:buChar char="•"/>
-              <a:defRPr sz="1800" kern="1200">
-                <a:solidFill>
-                  <a:schemeClr val="tx1"/>
-                </a:solidFill>
-                <a:latin typeface="+mn-lt"/>
-                <a:ea typeface="+mn-ea"/>
-                <a:cs typeface="+mn-cs"/>
-              </a:defRPr>
-            </a:lvl7pPr>
-            <a:lvl8pPr marL="3429000" indent="-228600" algn="l" defTabSz="914400" rtl="0" eaLnBrk="1" latinLnBrk="0" hangingPunct="1">
-              <a:lnSpc>
-                <a:spcPct val="90000"/>
-              </a:lnSpc>
-              <a:spcBef>
-                <a:spcPts val="500"/>
-              </a:spcBef>
-              <a:buFont typeface="Arial" panose="020B0604020202020204" pitchFamily="34" charset="0"/>
-              <a:buChar char="•"/>
-              <a:defRPr sz="1800" kern="1200">
-                <a:solidFill>
-                  <a:schemeClr val="tx1"/>
-                </a:solidFill>
-                <a:latin typeface="+mn-lt"/>
-                <a:ea typeface="+mn-ea"/>
-                <a:cs typeface="+mn-cs"/>
-              </a:defRPr>
-            </a:lvl8pPr>
-            <a:lvl9pPr marL="3886200" indent="-228600" algn="l" defTabSz="914400" rtl="0" eaLnBrk="1" latinLnBrk="0" hangingPunct="1">
-              <a:lnSpc>
-                <a:spcPct val="90000"/>
-              </a:lnSpc>
-              <a:spcBef>
-                <a:spcPts val="500"/>
-              </a:spcBef>
-              <a:buFont typeface="Arial" panose="020B0604020202020204" pitchFamily="34" charset="0"/>
-              <a:buChar char="•"/>
-              <a:defRPr sz="1800" kern="1200">
-                <a:solidFill>
-                  <a:schemeClr val="tx1"/>
-                </a:solidFill>
-                <a:latin typeface="+mn-lt"/>
-                <a:ea typeface="+mn-ea"/>
-                <a:cs typeface="+mn-cs"/>
-              </a:defRPr>
-            </a:lvl9pPr>
-          </a:lstStyle>
-          <a:p>
-            <a:pPr>
-              <a:buFont typeface="Wingdings" panose="05000000000000000000" pitchFamily="2" charset="2"/>
-              <a:buChar char="Ø"/>
-            </a:pPr>
-            <a:endParaRPr lang="en-CA" b="1" dirty="0">
-              <a:latin typeface="Calibri" panose="020F0502020204030204" pitchFamily="34" charset="0"/>
-              <a:ea typeface="Calibri" panose="020F0502020204030204" pitchFamily="34" charset="0"/>
-              <a:cs typeface="Calibri" panose="020F0502020204030204" pitchFamily="34" charset="0"/>
-            </a:endParaRPr>
-          </a:p>
-          <a:p>
-            <a:pPr>
-              <a:buFont typeface="Wingdings" panose="05000000000000000000" pitchFamily="2" charset="2"/>
-              <a:buChar char="Ø"/>
-            </a:pPr>
-            <a:r>
-              <a:rPr lang="en-CA" b="1" dirty="0">
-                <a:latin typeface="Calibri" panose="020F0502020204030204" pitchFamily="34" charset="0"/>
-                <a:ea typeface="Calibri" panose="020F0502020204030204" pitchFamily="34" charset="0"/>
-                <a:cs typeface="Calibri" panose="020F0502020204030204" pitchFamily="34" charset="0"/>
-              </a:rPr>
-              <a:t> Internal API discovered</a:t>
-            </a:r>
-          </a:p>
-          <a:p>
-            <a:pPr marL="0" indent="0">
-              <a:buNone/>
-            </a:pPr>
-            <a:r>
-              <a:rPr lang="en-CA" b="1" dirty="0">
-                <a:latin typeface="Calibri" panose="020F0502020204030204" pitchFamily="34" charset="0"/>
-                <a:ea typeface="Calibri" panose="020F0502020204030204" pitchFamily="34" charset="0"/>
-                <a:cs typeface="Calibri" panose="020F0502020204030204" pitchFamily="34" charset="0"/>
-              </a:rPr>
-              <a:t>     - </a:t>
-            </a:r>
-            <a:r>
-              <a:rPr lang="en-CA" sz="2400" b="1" dirty="0">
-                <a:latin typeface="Calibri" panose="020F0502020204030204" pitchFamily="34" charset="0"/>
-                <a:ea typeface="Calibri" panose="020F0502020204030204" pitchFamily="34" charset="0"/>
-                <a:cs typeface="Calibri" panose="020F0502020204030204" pitchFamily="34" charset="0"/>
-              </a:rPr>
-              <a:t>Namespace: </a:t>
-            </a:r>
-            <a:r>
-              <a:rPr lang="en-CA" sz="2400" b="1" dirty="0">
-                <a:solidFill>
-                  <a:srgbClr val="FFC000"/>
-                </a:solidFill>
-                <a:latin typeface="Calibri" panose="020F0502020204030204" pitchFamily="34" charset="0"/>
-                <a:ea typeface="Calibri" panose="020F0502020204030204" pitchFamily="34" charset="0"/>
-                <a:cs typeface="Calibri" panose="020F0502020204030204" pitchFamily="34" charset="0"/>
-              </a:rPr>
-              <a:t>internal</a:t>
-            </a:r>
-          </a:p>
-          <a:p>
-            <a:pPr marL="0" indent="0">
-              <a:buNone/>
-            </a:pPr>
-            <a:r>
-              <a:rPr lang="en-CA" sz="2400" b="1" dirty="0">
-                <a:latin typeface="Calibri" panose="020F0502020204030204" pitchFamily="34" charset="0"/>
-                <a:ea typeface="Calibri" panose="020F0502020204030204" pitchFamily="34" charset="0"/>
-                <a:cs typeface="Calibri" panose="020F0502020204030204" pitchFamily="34" charset="0"/>
-              </a:rPr>
-              <a:t>      - Port: </a:t>
-            </a:r>
-            <a:r>
-              <a:rPr lang="en-CA" sz="2400" b="1" dirty="0">
-                <a:solidFill>
-                  <a:srgbClr val="FFC000"/>
-                </a:solidFill>
-                <a:latin typeface="Calibri" panose="020F0502020204030204" pitchFamily="34" charset="0"/>
-                <a:ea typeface="Calibri" panose="020F0502020204030204" pitchFamily="34" charset="0"/>
-                <a:cs typeface="Calibri" panose="020F0502020204030204" pitchFamily="34" charset="0"/>
-              </a:rPr>
-              <a:t>3000</a:t>
-            </a:r>
-          </a:p>
-        </p:txBody>
-      </p:sp>
-      <p:pic>
-        <p:nvPicPr>
-          <p:cNvPr id="3" name="Picture 2">
-            <a:extLst>
-              <a:ext uri="{FF2B5EF4-FFF2-40B4-BE49-F238E27FC236}">
-                <a16:creationId xmlns:a16="http://schemas.microsoft.com/office/drawing/2014/main" id="{C2268DB0-4C54-E83D-E793-5A3C680489F5}"/>
-              </a:ext>
-            </a:extLst>
-          </p:cNvPr>
-          <p:cNvPicPr>
-            <a:picLocks noChangeAspect="1"/>
-          </p:cNvPicPr>
-          <p:nvPr/>
-        </p:nvPicPr>
-        <p:blipFill>
-          <a:blip r:embed="rId4">
-            <a:extLst>
-              <a:ext uri="{28A0092B-C50C-407E-A947-70E740481C1C}">
-                <a14:useLocalDpi xmlns:a14="http://schemas.microsoft.com/office/drawing/2010/main" val="0"/>
-              </a:ext>
-            </a:extLst>
-          </a:blip>
-          <a:stretch>
-            <a:fillRect/>
-          </a:stretch>
-        </p:blipFill>
-        <p:spPr>
-          <a:xfrm>
-            <a:off x="2622629" y="510480"/>
-            <a:ext cx="274320" cy="274320"/>
-          </a:xfrm>
-          <a:prstGeom prst="rect">
-            <a:avLst/>
-          </a:prstGeom>
-        </p:spPr>
-      </p:pic>
-      <p:pic>
-        <p:nvPicPr>
-          <p:cNvPr id="8" name="Picture 7">
-            <a:extLst>
-              <a:ext uri="{FF2B5EF4-FFF2-40B4-BE49-F238E27FC236}">
-                <a16:creationId xmlns:a16="http://schemas.microsoft.com/office/drawing/2014/main" id="{00D3F2E8-FA83-3338-B00E-85F3936B99BA}"/>
-              </a:ext>
-            </a:extLst>
-          </p:cNvPr>
-          <p:cNvPicPr>
-            <a:picLocks noChangeAspect="1"/>
-          </p:cNvPicPr>
-          <p:nvPr/>
-        </p:nvPicPr>
-        <p:blipFill>
-          <a:blip r:embed="rId4">
-            <a:extLst>
-              <a:ext uri="{28A0092B-C50C-407E-A947-70E740481C1C}">
-                <a14:useLocalDpi xmlns:a14="http://schemas.microsoft.com/office/drawing/2010/main" val="0"/>
-              </a:ext>
-            </a:extLst>
-          </a:blip>
-          <a:stretch>
-            <a:fillRect/>
-          </a:stretch>
-        </p:blipFill>
-        <p:spPr>
-          <a:xfrm>
-            <a:off x="3422729" y="510480"/>
-            <a:ext cx="274320" cy="274320"/>
-          </a:xfrm>
-          <a:prstGeom prst="rect">
-            <a:avLst/>
-          </a:prstGeom>
-        </p:spPr>
-      </p:pic>
-      <p:pic>
-        <p:nvPicPr>
-          <p:cNvPr id="6" name="Picture 5">
-            <a:extLst>
-              <a:ext uri="{FF2B5EF4-FFF2-40B4-BE49-F238E27FC236}">
-                <a16:creationId xmlns:a16="http://schemas.microsoft.com/office/drawing/2014/main" id="{C376D9BC-2384-ACB4-0A94-7B2FA96A5576}"/>
-              </a:ext>
-            </a:extLst>
-          </p:cNvPr>
-          <p:cNvPicPr>
-            <a:picLocks noChangeAspect="1"/>
-          </p:cNvPicPr>
-          <p:nvPr/>
-        </p:nvPicPr>
-        <p:blipFill>
-          <a:blip r:embed="rId5">
-            <a:extLst>
-              <a:ext uri="{28A0092B-C50C-407E-A947-70E740481C1C}">
-                <a14:useLocalDpi xmlns:a14="http://schemas.microsoft.com/office/drawing/2010/main" val="0"/>
-              </a:ext>
-            </a:extLst>
-          </a:blip>
-          <a:srcRect t="1354" r="35518" b="39373"/>
-          <a:stretch>
-            <a:fillRect/>
-          </a:stretch>
-        </p:blipFill>
-        <p:spPr>
-          <a:xfrm>
-            <a:off x="153749" y="2975351"/>
-            <a:ext cx="9347424" cy="3730249"/>
-          </a:xfrm>
-          <a:prstGeom prst="rect">
-            <a:avLst/>
-          </a:prstGeom>
-        </p:spPr>
-      </p:pic>
-    </p:spTree>
-    <p:extLst>
-      <p:ext uri="{BB962C8B-B14F-4D97-AF65-F5344CB8AC3E}">
-        <p14:creationId xmlns:p14="http://schemas.microsoft.com/office/powerpoint/2010/main" val="1129737174"/>
-      </p:ext>
-    </p:extLst>
-  </p:cSld>
-  <p:clrMapOvr>
-    <a:masterClrMapping/>
-  </p:clrMapOvr>
-  <mc:AlternateContent xmlns:mc="http://schemas.openxmlformats.org/markup-compatibility/2006" xmlns:p159="http://schemas.microsoft.com/office/powerpoint/2015/09/main">
-    <mc:Choice Requires="p159">
-      <p:transition xmlns:p14="http://schemas.microsoft.com/office/powerpoint/2010/main" spd="slow" p14:dur="1750" advClick="0" advTm="13000">
-        <p159:morph option="byObject"/>
-      </p:transition>
-    </mc:Choice>
-    <mc:Fallback xmlns="">
-      <p:transition spd="slow" advClick="0" advTm="13000">
-        <p:fade/>
-      </p:transition>
-    </mc:Fallback>
-  </mc:AlternateContent>
-  <p:timing>
-    <p:tnLst>
-      <p:par>
-        <p:cTn id="1" dur="indefinite" restart="never" nodeType="tmRoot">
-          <p:childTnLst>
-            <p:seq concurrent="1" nextAc="seek">
-              <p:cTn id="2" dur="indefinite" nodeType="mainSeq">
-                <p:childTnLst>
-                  <p:par>
-                    <p:cTn id="3" fill="hold">
-                      <p:stCondLst>
-                        <p:cond delay="indefinite"/>
-                        <p:cond evt="onBegin" delay="0">
-                          <p:tn val="2"/>
-                        </p:cond>
-                      </p:stCondLst>
-                      <p:childTnLst>
-                        <p:par>
-                          <p:cTn id="4" fill="hold">
-                            <p:stCondLst>
-                              <p:cond delay="0"/>
-                            </p:stCondLst>
-                            <p:childTnLst>
-                              <p:par>
-                                <p:cTn id="5" presetID="10" presetClass="entr" presetSubtype="0" fill="hold" nodeType="afterEffect">
-                                  <p:stCondLst>
-                                    <p:cond delay="1750"/>
-                                  </p:stCondLst>
-                                  <p:childTnLst>
-                                    <p:set>
-                                      <p:cBhvr>
-                                        <p:cTn id="6" dur="1" fill="hold">
-                                          <p:stCondLst>
-                                            <p:cond delay="0"/>
-                                          </p:stCondLst>
-                                        </p:cTn>
-                                        <p:tgtEl>
-                                          <p:spTgt spid="5">
-                                            <p:txEl>
                                               <p:pRg st="1" end="1"/>
                                             </p:txEl>
                                           </p:spTgt>
-                                        </p:tgtEl>
-                                        <p:attrNameLst>
-                                          <p:attrName>style.visibility</p:attrName>
-                                        </p:attrNameLst>
-                                      </p:cBhvr>
-                                      <p:to>
-                                        <p:strVal val="visible"/>
-                                      </p:to>
-                                    </p:set>
-                                    <p:animEffect transition="in" filter="fade">
-                                      <p:cBhvr>
-                                        <p:cTn id="7" dur="500"/>
-                                        <p:tgtEl>
-                                          <p:spTgt spid="5">
-                                            <p:txEl>
-                                              <p:pRg st="1" end="1"/>
-                                            </p:txEl>
-                                          </p:spTgt>
-                                        </p:tgtEl>
-                                      </p:cBhvr>
-                                    </p:animEffect>
-                                  </p:childTnLst>
-                                </p:cTn>
-                              </p:par>
-                            </p:childTnLst>
-                          </p:cTn>
-                        </p:par>
-                        <p:par>
-                          <p:cTn id="8" fill="hold">
-                            <p:stCondLst>
-                              <p:cond delay="2250"/>
-                            </p:stCondLst>
-                            <p:childTnLst>
-                              <p:par>
-                                <p:cTn id="9" presetID="22" presetClass="entr" presetSubtype="1" fill="hold" nodeType="afterEffect">
-                                  <p:stCondLst>
-                                    <p:cond delay="1750"/>
-                                  </p:stCondLst>
-                                  <p:childTnLst>
-                                    <p:set>
-                                      <p:cBhvr>
-                                        <p:cTn id="10" dur="1" fill="hold">
-                                          <p:stCondLst>
-                                            <p:cond delay="0"/>
-                                          </p:stCondLst>
-                                        </p:cTn>
-                                        <p:tgtEl>
-                                          <p:spTgt spid="6"/>
-                                        </p:tgtEl>
-                                        <p:attrNameLst>
-                                          <p:attrName>style.visibility</p:attrName>
-                                        </p:attrNameLst>
-                                      </p:cBhvr>
-                                      <p:to>
-                                        <p:strVal val="visible"/>
-                                      </p:to>
-                                    </p:set>
-                                    <p:animEffect transition="in" filter="wipe(up)">
-                                      <p:cBhvr>
-                                        <p:cTn id="11" dur="500"/>
-                                        <p:tgtEl>
-                                          <p:spTgt spid="6"/>
                                         </p:tgtEl>
                                       </p:cBhvr>
                                     </p:animEffect>
@@ -10628,6 +9747,94 @@
                             </p:childTnLst>
                           </p:cTn>
                         </p:par>
+                        <p:par>
+                          <p:cTn id="20" fill="hold">
+                            <p:stCondLst>
+                              <p:cond delay="9000"/>
+                            </p:stCondLst>
+                            <p:childTnLst>
+                              <p:par>
+                                <p:cTn id="21" presetID="1" presetClass="entr" presetSubtype="0" fill="hold" nodeType="afterEffect">
+                                  <p:stCondLst>
+                                    <p:cond delay="1750"/>
+                                  </p:stCondLst>
+                                  <p:childTnLst>
+                                    <p:set>
+                                      <p:cBhvr>
+                                        <p:cTn id="22" dur="1" fill="hold">
+                                          <p:stCondLst>
+                                            <p:cond delay="499"/>
+                                          </p:stCondLst>
+                                        </p:cTn>
+                                        <p:tgtEl>
+                                          <p:spTgt spid="8"/>
+                                        </p:tgtEl>
+                                        <p:attrNameLst>
+                                          <p:attrName>style.visibility</p:attrName>
+                                        </p:attrNameLst>
+                                      </p:cBhvr>
+                                      <p:to>
+                                        <p:strVal val="visible"/>
+                                      </p:to>
+                                    </p:set>
+                                  </p:childTnLst>
+                                </p:cTn>
+                              </p:par>
+                            </p:childTnLst>
+                          </p:cTn>
+                        </p:par>
+                        <p:par>
+                          <p:cTn id="23" fill="hold">
+                            <p:stCondLst>
+                              <p:cond delay="11250"/>
+                            </p:stCondLst>
+                            <p:childTnLst>
+                              <p:par>
+                                <p:cTn id="24" presetID="10" presetClass="entr" presetSubtype="0" fill="hold" nodeType="afterEffect">
+                                  <p:stCondLst>
+                                    <p:cond delay="1750"/>
+                                  </p:stCondLst>
+                                  <p:childTnLst>
+                                    <p:set>
+                                      <p:cBhvr>
+                                        <p:cTn id="25" dur="1" fill="hold">
+                                          <p:stCondLst>
+                                            <p:cond delay="0"/>
+                                          </p:stCondLst>
+                                        </p:cTn>
+                                        <p:tgtEl>
+                                          <p:spTgt spid="5">
+                                            <p:txEl>
+                                              <p:pRg st="6" end="6"/>
+                                            </p:txEl>
+                                          </p:spTgt>
+                                        </p:tgtEl>
+                                        <p:attrNameLst>
+                                          <p:attrName>style.visibility</p:attrName>
+                                        </p:attrNameLst>
+                                      </p:cBhvr>
+                                      <p:to>
+                                        <p:strVal val="visible"/>
+                                      </p:to>
+                                    </p:set>
+                                    <p:animEffect transition="in" filter="fade">
+                                      <p:cBhvr>
+                                        <p:cTn id="26" dur="500"/>
+                                        <p:tgtEl>
+                                          <p:spTgt spid="5">
+                                            <p:txEl>
+                                              <p:pRg st="6" end="6"/>
+                                            </p:txEl>
+                                          </p:spTgt>
+                                        </p:tgtEl>
+                                      </p:cBhvr>
+                                    </p:animEffect>
+                                  </p:childTnLst>
+                                </p:cTn>
+                              </p:par>
+                            </p:childTnLst>
+                          </p:cTn>
+                        </p:par>
                       </p:childTnLst>
                     </p:cTn>
                   </p:par>
@@ -10656,7 +9863,7 @@
 </p:sld>
 </file>
 
-<file path=ppt/slides/slide12.xml><?xml version="1.0" encoding="utf-8"?>
+<file path=ppt/slides/slide11.xml><?xml version="1.0" encoding="utf-8"?>
 <p:sld xmlns:a="http://schemas.openxmlformats.org/drawingml/2006/main" xmlns:r="http://schemas.openxmlformats.org/officeDocument/2006/relationships" xmlns:p="http://schemas.openxmlformats.org/presentationml/2006/main">
   <p:cSld>
     <p:spTree>
@@ -10664,7 +9871,7 @@
         <p:cNvPr id="1" name="">
           <a:extLst>
             <a:ext uri="{FF2B5EF4-FFF2-40B4-BE49-F238E27FC236}">
-              <a16:creationId xmlns:a16="http://schemas.microsoft.com/office/drawing/2014/main" id="{EC185B91-F761-3437-681B-3FF065F93F9A}"/>
+              <a16:creationId xmlns:a16="http://schemas.microsoft.com/office/drawing/2014/main" id="{511A3D60-A1EB-4065-DE70-6D97EFF8FDA7}"/>
             </a:ext>
           </a:extLst>
         </p:cNvPr>
@@ -10684,7 +9891,7 @@
           <p:cNvPr id="21" name="Content Placeholder 20">
             <a:extLst>
               <a:ext uri="{FF2B5EF4-FFF2-40B4-BE49-F238E27FC236}">
-                <a16:creationId xmlns:a16="http://schemas.microsoft.com/office/drawing/2014/main" id="{771A0F6A-6020-9C29-BFAA-8BC2E7580412}"/>
+                <a16:creationId xmlns:a16="http://schemas.microsoft.com/office/drawing/2014/main" id="{467D8542-FFE6-5BEE-B2CF-529F9384DDFB}"/>
               </a:ext>
             </a:extLst>
           </p:cNvPr>
@@ -10750,7 +9957,7 @@
           <p:cNvPr id="4" name="Picture 3">
             <a:extLst>
               <a:ext uri="{FF2B5EF4-FFF2-40B4-BE49-F238E27FC236}">
-                <a16:creationId xmlns:a16="http://schemas.microsoft.com/office/drawing/2014/main" id="{2F18EBF0-36C9-94C2-56CA-C885A8830833}"/>
+                <a16:creationId xmlns:a16="http://schemas.microsoft.com/office/drawing/2014/main" id="{62093109-7B90-7B06-6C39-920DB00492C4}"/>
               </a:ext>
             </a:extLst>
           </p:cNvPr>
@@ -10786,7 +9993,7 @@
           <p:cNvPr id="5" name="Content Placeholder 20">
             <a:extLst>
               <a:ext uri="{FF2B5EF4-FFF2-40B4-BE49-F238E27FC236}">
-                <a16:creationId xmlns:a16="http://schemas.microsoft.com/office/drawing/2014/main" id="{3534F9FC-5B16-8099-A97F-F97DFE53C2E2}"/>
+                <a16:creationId xmlns:a16="http://schemas.microsoft.com/office/drawing/2014/main" id="{D7527AF6-7EB9-6468-B8E6-DAC566666A9A}"/>
               </a:ext>
             </a:extLst>
           </p:cNvPr>
@@ -10977,16 +10184,18 @@
               <a:buFont typeface="Wingdings" panose="05000000000000000000" pitchFamily="2" charset="2"/>
               <a:buChar char="Ø"/>
             </a:pPr>
-            <a:endParaRPr lang="en-CA" b="1" dirty="0">
-              <a:latin typeface="Calibri" panose="020F0502020204030204" pitchFamily="34" charset="0"/>
-              <a:ea typeface="Calibri" panose="020F0502020204030204" pitchFamily="34" charset="0"/>
-              <a:cs typeface="Calibri" panose="020F0502020204030204" pitchFamily="34" charset="0"/>
-            </a:endParaRPr>
-          </a:p>
-          <a:p>
-            <a:pPr>
-              <a:buFont typeface="Wingdings" panose="05000000000000000000" pitchFamily="2" charset="2"/>
-              <a:buChar char="Ø"/>
+            <a:r>
+              <a:rPr lang="en-CA" b="1" dirty="0">
+                <a:latin typeface="Calibri" panose="020F0502020204030204" pitchFamily="34" charset="0"/>
+                <a:ea typeface="Calibri" panose="020F0502020204030204" pitchFamily="34" charset="0"/>
+                <a:cs typeface="Calibri" panose="020F0502020204030204" pitchFamily="34" charset="0"/>
+              </a:rPr>
+              <a:t> Internal API discovered</a:t>
+            </a:r>
+          </a:p>
+          <a:p>
+            <a:pPr marL="0" indent="0">
+              <a:buNone/>
             </a:pPr>
             <a:r>
               <a:rPr lang="en-CA" b="1" dirty="0">
@@ -10994,7 +10203,26 @@
                 <a:ea typeface="Calibri" panose="020F0502020204030204" pitchFamily="34" charset="0"/>
                 <a:cs typeface="Calibri" panose="020F0502020204030204" pitchFamily="34" charset="0"/>
               </a:rPr>
-              <a:t> Read data from the internal API</a:t>
+              <a:t>     - </a:t>
+            </a:r>
+            <a:r>
+              <a:rPr lang="en-CA" sz="2400" b="1" dirty="0">
+                <a:latin typeface="Calibri" panose="020F0502020204030204" pitchFamily="34" charset="0"/>
+                <a:ea typeface="Calibri" panose="020F0502020204030204" pitchFamily="34" charset="0"/>
+                <a:cs typeface="Calibri" panose="020F0502020204030204" pitchFamily="34" charset="0"/>
+              </a:rPr>
+              <a:t>Namespace: </a:t>
+            </a:r>
+            <a:r>
+              <a:rPr lang="en-CA" sz="2400" b="1" dirty="0">
+                <a:solidFill>
+                  <a:srgbClr val="FFC000"/>
+                </a:solidFill>
+                <a:latin typeface="Calibri" panose="020F0502020204030204" pitchFamily="34" charset="0"/>
+                <a:ea typeface="Calibri" panose="020F0502020204030204" pitchFamily="34" charset="0"/>
+                <a:cs typeface="Calibri" panose="020F0502020204030204" pitchFamily="34" charset="0"/>
+              </a:rPr>
+              <a:t>internal</a:t>
             </a:r>
           </a:p>
           <a:p>
@@ -11002,12 +10230,23 @@
               <a:buNone/>
             </a:pPr>
             <a:r>
-              <a:rPr lang="en-CA" sz="2400" dirty="0">
+              <a:rPr lang="en-CA" sz="2400" b="1" dirty="0">
                 <a:latin typeface="Calibri" panose="020F0502020204030204" pitchFamily="34" charset="0"/>
                 <a:ea typeface="Calibri" panose="020F0502020204030204" pitchFamily="34" charset="0"/>
                 <a:cs typeface="Calibri" panose="020F0502020204030204" pitchFamily="34" charset="0"/>
               </a:rPr>
-              <a:t>     - Two user records exposed: Alice and Bob.</a:t>
+              <a:t>      - Port: </a:t>
+            </a:r>
+            <a:r>
+              <a:rPr lang="en-CA" sz="2400" b="1" dirty="0">
+                <a:solidFill>
+                  <a:srgbClr val="FFC000"/>
+                </a:solidFill>
+                <a:latin typeface="Calibri" panose="020F0502020204030204" pitchFamily="34" charset="0"/>
+                <a:ea typeface="Calibri" panose="020F0502020204030204" pitchFamily="34" charset="0"/>
+                <a:cs typeface="Calibri" panose="020F0502020204030204" pitchFamily="34" charset="0"/>
+              </a:rPr>
+              <a:t>3000</a:t>
             </a:r>
           </a:p>
         </p:txBody>
@@ -11017,7 +10256,7 @@
           <p:cNvPr id="3" name="Picture 2">
             <a:extLst>
               <a:ext uri="{FF2B5EF4-FFF2-40B4-BE49-F238E27FC236}">
-                <a16:creationId xmlns:a16="http://schemas.microsoft.com/office/drawing/2014/main" id="{0FC74DE5-1CD4-F030-26B6-7789B3128B03}"/>
+                <a16:creationId xmlns:a16="http://schemas.microsoft.com/office/drawing/2014/main" id="{C2268DB0-4C54-E83D-E793-5A3C680489F5}"/>
               </a:ext>
             </a:extLst>
           </p:cNvPr>
@@ -11053,7 +10292,7 @@
           <p:cNvPr id="8" name="Picture 7">
             <a:extLst>
               <a:ext uri="{FF2B5EF4-FFF2-40B4-BE49-F238E27FC236}">
-                <a16:creationId xmlns:a16="http://schemas.microsoft.com/office/drawing/2014/main" id="{280F33A7-3369-38B1-FBCD-ED6D23C4308E}"/>
+                <a16:creationId xmlns:a16="http://schemas.microsoft.com/office/drawing/2014/main" id="{00D3F2E8-FA83-3338-B00E-85F3936B99BA}"/>
               </a:ext>
             </a:extLst>
           </p:cNvPr>
@@ -11089,7 +10328,7 @@
           <p:cNvPr id="6" name="Picture 5">
             <a:extLst>
               <a:ext uri="{FF2B5EF4-FFF2-40B4-BE49-F238E27FC236}">
-                <a16:creationId xmlns:a16="http://schemas.microsoft.com/office/drawing/2014/main" id="{0E5071E7-AB93-FF72-AEF1-60A82A307180}"/>
+                <a16:creationId xmlns:a16="http://schemas.microsoft.com/office/drawing/2014/main" id="{C376D9BC-2384-ACB4-0A94-7B2FA96A5576}"/>
               </a:ext>
             </a:extLst>
           </p:cNvPr>
@@ -11106,15 +10345,15 @@
               </a:ext>
             </a:extLst>
           </a:blip>
-          <a:srcRect t="59706"/>
+          <a:srcRect t="1354" r="35518" b="39373"/>
           <a:stretch>
             <a:fillRect/>
           </a:stretch>
         </p:blipFill>
         <p:spPr>
           <a:xfrm>
-            <a:off x="142569" y="2844766"/>
-            <a:ext cx="11906862" cy="2082867"/>
+            <a:off x="153748" y="2701031"/>
+            <a:ext cx="9975771" cy="3981002"/>
           </a:xfrm>
           <a:prstGeom prst="rect">
             <a:avLst/>
@@ -11124,7 +10363,7 @@
     </p:spTree>
     <p:extLst>
       <p:ext uri="{BB962C8B-B14F-4D97-AF65-F5344CB8AC3E}">
-        <p14:creationId xmlns:p14="http://schemas.microsoft.com/office/powerpoint/2010/main" val="2851113903"/>
+        <p14:creationId xmlns:p14="http://schemas.microsoft.com/office/powerpoint/2010/main" val="1129737174"/>
       </p:ext>
     </p:extLst>
   </p:cSld>
@@ -11133,12 +10372,12 @@
   </p:clrMapOvr>
   <mc:AlternateContent xmlns:mc="http://schemas.openxmlformats.org/markup-compatibility/2006" xmlns:p159="http://schemas.microsoft.com/office/powerpoint/2015/09/main">
     <mc:Choice Requires="p159">
-      <p:transition xmlns:p14="http://schemas.microsoft.com/office/powerpoint/2010/main" spd="slow" p14:dur="1750" advClick="0" advTm="10000">
+      <p:transition xmlns:p14="http://schemas.microsoft.com/office/powerpoint/2010/main" spd="slow" p14:dur="1750" advClick="0" advTm="13000">
         <p159:morph option="byObject"/>
       </p:transition>
     </mc:Choice>
     <mc:Fallback xmlns="">
-      <p:transition spd="slow" advClick="0" advTm="10000">
+      <p:transition spd="slow" advClick="0" advTm="13000">
         <p:fade/>
       </p:transition>
     </mc:Fallback>
@@ -11182,7 +10421,7 @@
                                         <p:tgtEl>
                                           <p:spTgt spid="5">
                                             <p:txEl>
-                                              <p:pRg st="1" end="1"/>
+                                              <p:pRg st="0" end="0"/>
                                             </p:txEl>
                                           </p:spTgt>
                                         </p:tgtEl>
@@ -11200,7 +10439,7 @@
                                         <p:tgtEl>
                                           <p:spTgt spid="5">
                                             <p:txEl>
-                                              <p:pRg st="1" end="1"/>
+                                              <p:pRg st="0" end="0"/>
                                             </p:txEl>
                                           </p:spTgt>
                                         </p:tgtEl>
@@ -11278,7 +10517,7 @@
                                         <p:tgtEl>
                                           <p:spTgt spid="5">
                                             <p:txEl>
-                                              <p:pRg st="2" end="2"/>
+                                              <p:pRg st="1" end="1"/>
                                             </p:txEl>
                                           </p:spTgt>
                                         </p:tgtEl>
@@ -11296,7 +10535,728 @@
                                         <p:tgtEl>
                                           <p:spTgt spid="5">
                                             <p:txEl>
+                                              <p:pRg st="1" end="1"/>
+                                            </p:txEl>
+                                          </p:spTgt>
+                                        </p:tgtEl>
+                                      </p:cBhvr>
+                                    </p:animEffect>
+                                  </p:childTnLst>
+                                </p:cTn>
+                              </p:par>
+                            </p:childTnLst>
+                          </p:cTn>
+                        </p:par>
+                        <p:par>
+                          <p:cTn id="16" fill="hold">
+                            <p:stCondLst>
+                              <p:cond delay="6750"/>
+                            </p:stCondLst>
+                            <p:childTnLst>
+                              <p:par>
+                                <p:cTn id="17" presetID="10" presetClass="entr" presetSubtype="0" fill="hold" nodeType="afterEffect">
+                                  <p:stCondLst>
+                                    <p:cond delay="1750"/>
+                                  </p:stCondLst>
+                                  <p:childTnLst>
+                                    <p:set>
+                                      <p:cBhvr>
+                                        <p:cTn id="18" dur="1" fill="hold">
+                                          <p:stCondLst>
+                                            <p:cond delay="0"/>
+                                          </p:stCondLst>
+                                        </p:cTn>
+                                        <p:tgtEl>
+                                          <p:spTgt spid="5">
+                                            <p:txEl>
                                               <p:pRg st="2" end="2"/>
+                                            </p:txEl>
+                                          </p:spTgt>
+                                        </p:tgtEl>
+                                        <p:attrNameLst>
+                                          <p:attrName>style.visibility</p:attrName>
+                                        </p:attrNameLst>
+                                      </p:cBhvr>
+                                      <p:to>
+                                        <p:strVal val="visible"/>
+                                      </p:to>
+                                    </p:set>
+                                    <p:animEffect transition="in" filter="fade">
+                                      <p:cBhvr>
+                                        <p:cTn id="19" dur="500"/>
+                                        <p:tgtEl>
+                                          <p:spTgt spid="5">
+                                            <p:txEl>
+                                              <p:pRg st="2" end="2"/>
+                                            </p:txEl>
+                                          </p:spTgt>
+                                        </p:tgtEl>
+                                      </p:cBhvr>
+                                    </p:animEffect>
+                                  </p:childTnLst>
+                                </p:cTn>
+                              </p:par>
+                            </p:childTnLst>
+                          </p:cTn>
+                        </p:par>
+                      </p:childTnLst>
+                    </p:cTn>
+                  </p:par>
+                </p:childTnLst>
+              </p:cTn>
+              <p:prevCondLst>
+                <p:cond evt="onPrev" delay="0">
+                  <p:tgtEl>
+                    <p:sldTgt/>
+                  </p:tgtEl>
+                </p:cond>
+              </p:prevCondLst>
+              <p:nextCondLst>
+                <p:cond evt="onNext" delay="0">
+                  <p:tgtEl>
+                    <p:sldTgt/>
+                  </p:tgtEl>
+                </p:cond>
+              </p:nextCondLst>
+            </p:seq>
+          </p:childTnLst>
+        </p:cTn>
+      </p:par>
+    </p:tnLst>
+  </p:timing>
+</p:sld>
+</file>
+
+<file path=ppt/slides/slide12.xml><?xml version="1.0" encoding="utf-8"?>
+<p:sld xmlns:a="http://schemas.openxmlformats.org/drawingml/2006/main" xmlns:r="http://schemas.openxmlformats.org/officeDocument/2006/relationships" xmlns:p="http://schemas.openxmlformats.org/presentationml/2006/main">
+  <p:cSld>
+    <p:spTree>
+      <p:nvGrpSpPr>
+        <p:cNvPr id="1" name="">
+          <a:extLst>
+            <a:ext uri="{FF2B5EF4-FFF2-40B4-BE49-F238E27FC236}">
+              <a16:creationId xmlns:a16="http://schemas.microsoft.com/office/drawing/2014/main" id="{EC185B91-F761-3437-681B-3FF065F93F9A}"/>
+            </a:ext>
+          </a:extLst>
+        </p:cNvPr>
+        <p:cNvGrpSpPr/>
+        <p:nvPr/>
+      </p:nvGrpSpPr>
+      <p:grpSpPr>
+        <a:xfrm>
+          <a:off x="0" y="0"/>
+          <a:ext cx="0" cy="0"/>
+          <a:chOff x="0" y="0"/>
+          <a:chExt cx="0" cy="0"/>
+        </a:xfrm>
+      </p:grpSpPr>
+      <p:sp>
+        <p:nvSpPr>
+          <p:cNvPr id="21" name="Content Placeholder 20">
+            <a:extLst>
+              <a:ext uri="{FF2B5EF4-FFF2-40B4-BE49-F238E27FC236}">
+                <a16:creationId xmlns:a16="http://schemas.microsoft.com/office/drawing/2014/main" id="{771A0F6A-6020-9C29-BFAA-8BC2E7580412}"/>
+              </a:ext>
+            </a:extLst>
+          </p:cNvPr>
+          <p:cNvSpPr>
+            <a:spLocks noGrp="1"/>
+          </p:cNvSpPr>
+          <p:nvPr>
+            <p:ph idx="1"/>
+          </p:nvPr>
+        </p:nvSpPr>
+        <p:spPr>
+          <a:xfrm>
+            <a:off x="0" y="-1"/>
+            <a:ext cx="12192000" cy="914400"/>
+          </a:xfrm>
+          <a:ln>
+            <a:noFill/>
+          </a:ln>
+        </p:spPr>
+        <p:txBody>
+          <a:bodyPr>
+            <a:normAutofit/>
+          </a:bodyPr>
+          <a:lstStyle/>
+          <a:p>
+            <a:pPr marL="0" indent="0">
+              <a:lnSpc>
+                <a:spcPct val="100000"/>
+              </a:lnSpc>
+              <a:buNone/>
+            </a:pPr>
+            <a:r>
+              <a:rPr lang="en-CA" sz="3200" b="1" dirty="0">
+                <a:solidFill>
+                  <a:schemeClr val="tx1">
+                    <a:lumMod val="95000"/>
+                  </a:schemeClr>
+                </a:solidFill>
+                <a:latin typeface="Calibri" panose="020F0502020204030204" pitchFamily="34" charset="0"/>
+                <a:ea typeface="Calibri" panose="020F0502020204030204" pitchFamily="34" charset="0"/>
+                <a:cs typeface="Calibri" panose="020F0502020204030204" pitchFamily="34" charset="0"/>
+              </a:rPr>
+              <a:t>       Attacker    </a:t>
+            </a:r>
+            <a:r>
+              <a:rPr lang="en-CA" sz="2000" b="1" dirty="0">
+                <a:solidFill>
+                  <a:schemeClr val="tx1">
+                    <a:lumMod val="95000"/>
+                  </a:schemeClr>
+                </a:solidFill>
+                <a:latin typeface="Calibri" panose="020F0502020204030204" pitchFamily="34" charset="0"/>
+                <a:ea typeface="Calibri" panose="020F0502020204030204" pitchFamily="34" charset="0"/>
+                <a:cs typeface="Calibri" panose="020F0502020204030204" pitchFamily="34" charset="0"/>
+              </a:rPr>
+              <a:t>code container cluster cloud</a:t>
+            </a:r>
+          </a:p>
+        </p:txBody>
+      </p:sp>
+      <p:pic>
+        <p:nvPicPr>
+          <p:cNvPr id="4" name="Picture 3">
+            <a:extLst>
+              <a:ext uri="{FF2B5EF4-FFF2-40B4-BE49-F238E27FC236}">
+                <a16:creationId xmlns:a16="http://schemas.microsoft.com/office/drawing/2014/main" id="{2F18EBF0-36C9-94C2-56CA-C885A8830833}"/>
+              </a:ext>
+            </a:extLst>
+          </p:cNvPr>
+          <p:cNvPicPr>
+            <a:picLocks noChangeAspect="1"/>
+          </p:cNvPicPr>
+          <p:nvPr/>
+        </p:nvPicPr>
+        <p:blipFill>
+          <a:blip r:embed="rId3">
+            <a:extLst>
+              <a:ext uri="{28A0092B-C50C-407E-A947-70E740481C1C}">
+                <a14:useLocalDpi xmlns:a14="http://schemas.microsoft.com/office/drawing/2010/main" val="0"/>
+              </a:ext>
+            </a:extLst>
+          </a:blip>
+          <a:stretch>
+            <a:fillRect/>
+          </a:stretch>
+        </p:blipFill>
+        <p:spPr>
+          <a:xfrm>
+            <a:off x="0" y="53280"/>
+            <a:ext cx="731520" cy="731520"/>
+          </a:xfrm>
+          <a:prstGeom prst="rect">
+            <a:avLst/>
+          </a:prstGeom>
+        </p:spPr>
+      </p:pic>
+      <p:sp>
+        <p:nvSpPr>
+          <p:cNvPr id="5" name="Content Placeholder 20">
+            <a:extLst>
+              <a:ext uri="{FF2B5EF4-FFF2-40B4-BE49-F238E27FC236}">
+                <a16:creationId xmlns:a16="http://schemas.microsoft.com/office/drawing/2014/main" id="{3534F9FC-5B16-8099-A97F-F97DFE53C2E2}"/>
+              </a:ext>
+            </a:extLst>
+          </p:cNvPr>
+          <p:cNvSpPr txBox="1">
+            <a:spLocks/>
+          </p:cNvSpPr>
+          <p:nvPr/>
+        </p:nvSpPr>
+        <p:spPr>
+          <a:xfrm>
+            <a:off x="0" y="914399"/>
+            <a:ext cx="12192000" cy="5943601"/>
+          </a:xfrm>
+          <a:prstGeom prst="rect">
+            <a:avLst/>
+          </a:prstGeom>
+        </p:spPr>
+        <p:txBody>
+          <a:bodyPr vert="horz" lIns="91440" tIns="45720" rIns="91440" bIns="45720" rtlCol="0">
+            <a:normAutofit/>
+          </a:bodyPr>
+          <a:lstStyle>
+            <a:lvl1pPr marL="228600" indent="-228600" algn="l" defTabSz="914400" rtl="0" eaLnBrk="1" latinLnBrk="0" hangingPunct="1">
+              <a:lnSpc>
+                <a:spcPct val="90000"/>
+              </a:lnSpc>
+              <a:spcBef>
+                <a:spcPts val="1000"/>
+              </a:spcBef>
+              <a:buFont typeface="Arial" panose="020B0604020202020204" pitchFamily="34" charset="0"/>
+              <a:buChar char="•"/>
+              <a:defRPr sz="2800" kern="1200">
+                <a:solidFill>
+                  <a:schemeClr val="tx1"/>
+                </a:solidFill>
+                <a:latin typeface="+mn-lt"/>
+                <a:ea typeface="+mn-ea"/>
+                <a:cs typeface="+mn-cs"/>
+              </a:defRPr>
+            </a:lvl1pPr>
+            <a:lvl2pPr marL="685800" indent="-228600" algn="l" defTabSz="914400" rtl="0" eaLnBrk="1" latinLnBrk="0" hangingPunct="1">
+              <a:lnSpc>
+                <a:spcPct val="90000"/>
+              </a:lnSpc>
+              <a:spcBef>
+                <a:spcPts val="500"/>
+              </a:spcBef>
+              <a:buFont typeface="Arial" panose="020B0604020202020204" pitchFamily="34" charset="0"/>
+              <a:buChar char="•"/>
+              <a:defRPr sz="2400" kern="1200">
+                <a:solidFill>
+                  <a:schemeClr val="tx1"/>
+                </a:solidFill>
+                <a:latin typeface="+mn-lt"/>
+                <a:ea typeface="+mn-ea"/>
+                <a:cs typeface="+mn-cs"/>
+              </a:defRPr>
+            </a:lvl2pPr>
+            <a:lvl3pPr marL="1143000" indent="-228600" algn="l" defTabSz="914400" rtl="0" eaLnBrk="1" latinLnBrk="0" hangingPunct="1">
+              <a:lnSpc>
+                <a:spcPct val="90000"/>
+              </a:lnSpc>
+              <a:spcBef>
+                <a:spcPts val="500"/>
+              </a:spcBef>
+              <a:buFont typeface="Arial" panose="020B0604020202020204" pitchFamily="34" charset="0"/>
+              <a:buChar char="•"/>
+              <a:defRPr sz="2000" kern="1200">
+                <a:solidFill>
+                  <a:schemeClr val="tx1"/>
+                </a:solidFill>
+                <a:latin typeface="+mn-lt"/>
+                <a:ea typeface="+mn-ea"/>
+                <a:cs typeface="+mn-cs"/>
+              </a:defRPr>
+            </a:lvl3pPr>
+            <a:lvl4pPr marL="1600200" indent="-228600" algn="l" defTabSz="914400" rtl="0" eaLnBrk="1" latinLnBrk="0" hangingPunct="1">
+              <a:lnSpc>
+                <a:spcPct val="90000"/>
+              </a:lnSpc>
+              <a:spcBef>
+                <a:spcPts val="500"/>
+              </a:spcBef>
+              <a:buFont typeface="Arial" panose="020B0604020202020204" pitchFamily="34" charset="0"/>
+              <a:buChar char="•"/>
+              <a:defRPr sz="1800" kern="1200">
+                <a:solidFill>
+                  <a:schemeClr val="tx1"/>
+                </a:solidFill>
+                <a:latin typeface="+mn-lt"/>
+                <a:ea typeface="+mn-ea"/>
+                <a:cs typeface="+mn-cs"/>
+              </a:defRPr>
+            </a:lvl4pPr>
+            <a:lvl5pPr marL="2057400" indent="-228600" algn="l" defTabSz="914400" rtl="0" eaLnBrk="1" latinLnBrk="0" hangingPunct="1">
+              <a:lnSpc>
+                <a:spcPct val="90000"/>
+              </a:lnSpc>
+              <a:spcBef>
+                <a:spcPts val="500"/>
+              </a:spcBef>
+              <a:buFont typeface="Arial" panose="020B0604020202020204" pitchFamily="34" charset="0"/>
+              <a:buChar char="•"/>
+              <a:defRPr sz="1800" kern="1200">
+                <a:solidFill>
+                  <a:schemeClr val="tx1"/>
+                </a:solidFill>
+                <a:latin typeface="+mn-lt"/>
+                <a:ea typeface="+mn-ea"/>
+                <a:cs typeface="+mn-cs"/>
+              </a:defRPr>
+            </a:lvl5pPr>
+            <a:lvl6pPr marL="2514600" indent="-228600" algn="l" defTabSz="914400" rtl="0" eaLnBrk="1" latinLnBrk="0" hangingPunct="1">
+              <a:lnSpc>
+                <a:spcPct val="90000"/>
+              </a:lnSpc>
+              <a:spcBef>
+                <a:spcPts val="500"/>
+              </a:spcBef>
+              <a:buFont typeface="Arial" panose="020B0604020202020204" pitchFamily="34" charset="0"/>
+              <a:buChar char="•"/>
+              <a:defRPr sz="1800" kern="1200">
+                <a:solidFill>
+                  <a:schemeClr val="tx1"/>
+                </a:solidFill>
+                <a:latin typeface="+mn-lt"/>
+                <a:ea typeface="+mn-ea"/>
+                <a:cs typeface="+mn-cs"/>
+              </a:defRPr>
+            </a:lvl6pPr>
+            <a:lvl7pPr marL="2971800" indent="-228600" algn="l" defTabSz="914400" rtl="0" eaLnBrk="1" latinLnBrk="0" hangingPunct="1">
+              <a:lnSpc>
+                <a:spcPct val="90000"/>
+              </a:lnSpc>
+              <a:spcBef>
+                <a:spcPts val="500"/>
+              </a:spcBef>
+              <a:buFont typeface="Arial" panose="020B0604020202020204" pitchFamily="34" charset="0"/>
+              <a:buChar char="•"/>
+              <a:defRPr sz="1800" kern="1200">
+                <a:solidFill>
+                  <a:schemeClr val="tx1"/>
+                </a:solidFill>
+                <a:latin typeface="+mn-lt"/>
+                <a:ea typeface="+mn-ea"/>
+                <a:cs typeface="+mn-cs"/>
+              </a:defRPr>
+            </a:lvl7pPr>
+            <a:lvl8pPr marL="3429000" indent="-228600" algn="l" defTabSz="914400" rtl="0" eaLnBrk="1" latinLnBrk="0" hangingPunct="1">
+              <a:lnSpc>
+                <a:spcPct val="90000"/>
+              </a:lnSpc>
+              <a:spcBef>
+                <a:spcPts val="500"/>
+              </a:spcBef>
+              <a:buFont typeface="Arial" panose="020B0604020202020204" pitchFamily="34" charset="0"/>
+              <a:buChar char="•"/>
+              <a:defRPr sz="1800" kern="1200">
+                <a:solidFill>
+                  <a:schemeClr val="tx1"/>
+                </a:solidFill>
+                <a:latin typeface="+mn-lt"/>
+                <a:ea typeface="+mn-ea"/>
+                <a:cs typeface="+mn-cs"/>
+              </a:defRPr>
+            </a:lvl8pPr>
+            <a:lvl9pPr marL="3886200" indent="-228600" algn="l" defTabSz="914400" rtl="0" eaLnBrk="1" latinLnBrk="0" hangingPunct="1">
+              <a:lnSpc>
+                <a:spcPct val="90000"/>
+              </a:lnSpc>
+              <a:spcBef>
+                <a:spcPts val="500"/>
+              </a:spcBef>
+              <a:buFont typeface="Arial" panose="020B0604020202020204" pitchFamily="34" charset="0"/>
+              <a:buChar char="•"/>
+              <a:defRPr sz="1800" kern="1200">
+                <a:solidFill>
+                  <a:schemeClr val="tx1"/>
+                </a:solidFill>
+                <a:latin typeface="+mn-lt"/>
+                <a:ea typeface="+mn-ea"/>
+                <a:cs typeface="+mn-cs"/>
+              </a:defRPr>
+            </a:lvl9pPr>
+          </a:lstStyle>
+          <a:p>
+            <a:pPr>
+              <a:buFont typeface="Wingdings" panose="05000000000000000000" pitchFamily="2" charset="2"/>
+              <a:buChar char="Ø"/>
+            </a:pPr>
+            <a:r>
+              <a:rPr lang="en-CA" b="1" dirty="0">
+                <a:latin typeface="Calibri" panose="020F0502020204030204" pitchFamily="34" charset="0"/>
+                <a:ea typeface="Calibri" panose="020F0502020204030204" pitchFamily="34" charset="0"/>
+                <a:cs typeface="Calibri" panose="020F0502020204030204" pitchFamily="34" charset="0"/>
+              </a:rPr>
+              <a:t> Read data from the internal API</a:t>
+            </a:r>
+          </a:p>
+          <a:p>
+            <a:pPr marL="0" indent="0">
+              <a:buNone/>
+            </a:pPr>
+            <a:r>
+              <a:rPr lang="en-CA" sz="2400" dirty="0">
+                <a:latin typeface="Calibri" panose="020F0502020204030204" pitchFamily="34" charset="0"/>
+                <a:ea typeface="Calibri" panose="020F0502020204030204" pitchFamily="34" charset="0"/>
+                <a:cs typeface="Calibri" panose="020F0502020204030204" pitchFamily="34" charset="0"/>
+              </a:rPr>
+              <a:t>     - Two user records exposed: Alice and Bob.</a:t>
+            </a:r>
+          </a:p>
+        </p:txBody>
+      </p:sp>
+      <p:pic>
+        <p:nvPicPr>
+          <p:cNvPr id="3" name="Picture 2">
+            <a:extLst>
+              <a:ext uri="{FF2B5EF4-FFF2-40B4-BE49-F238E27FC236}">
+                <a16:creationId xmlns:a16="http://schemas.microsoft.com/office/drawing/2014/main" id="{0FC74DE5-1CD4-F030-26B6-7789B3128B03}"/>
+              </a:ext>
+            </a:extLst>
+          </p:cNvPr>
+          <p:cNvPicPr>
+            <a:picLocks noChangeAspect="1"/>
+          </p:cNvPicPr>
+          <p:nvPr/>
+        </p:nvPicPr>
+        <p:blipFill>
+          <a:blip r:embed="rId4">
+            <a:extLst>
+              <a:ext uri="{28A0092B-C50C-407E-A947-70E740481C1C}">
+                <a14:useLocalDpi xmlns:a14="http://schemas.microsoft.com/office/drawing/2010/main" val="0"/>
+              </a:ext>
+            </a:extLst>
+          </a:blip>
+          <a:stretch>
+            <a:fillRect/>
+          </a:stretch>
+        </p:blipFill>
+        <p:spPr>
+          <a:xfrm>
+            <a:off x="2622629" y="510480"/>
+            <a:ext cx="274320" cy="274320"/>
+          </a:xfrm>
+          <a:prstGeom prst="rect">
+            <a:avLst/>
+          </a:prstGeom>
+        </p:spPr>
+      </p:pic>
+      <p:pic>
+        <p:nvPicPr>
+          <p:cNvPr id="8" name="Picture 7">
+            <a:extLst>
+              <a:ext uri="{FF2B5EF4-FFF2-40B4-BE49-F238E27FC236}">
+                <a16:creationId xmlns:a16="http://schemas.microsoft.com/office/drawing/2014/main" id="{280F33A7-3369-38B1-FBCD-ED6D23C4308E}"/>
+              </a:ext>
+            </a:extLst>
+          </p:cNvPr>
+          <p:cNvPicPr>
+            <a:picLocks noChangeAspect="1"/>
+          </p:cNvPicPr>
+          <p:nvPr/>
+        </p:nvPicPr>
+        <p:blipFill>
+          <a:blip r:embed="rId4">
+            <a:extLst>
+              <a:ext uri="{28A0092B-C50C-407E-A947-70E740481C1C}">
+                <a14:useLocalDpi xmlns:a14="http://schemas.microsoft.com/office/drawing/2010/main" val="0"/>
+              </a:ext>
+            </a:extLst>
+          </a:blip>
+          <a:stretch>
+            <a:fillRect/>
+          </a:stretch>
+        </p:blipFill>
+        <p:spPr>
+          <a:xfrm>
+            <a:off x="3422729" y="510480"/>
+            <a:ext cx="274320" cy="274320"/>
+          </a:xfrm>
+          <a:prstGeom prst="rect">
+            <a:avLst/>
+          </a:prstGeom>
+        </p:spPr>
+      </p:pic>
+      <p:pic>
+        <p:nvPicPr>
+          <p:cNvPr id="6" name="Picture 5">
+            <a:extLst>
+              <a:ext uri="{FF2B5EF4-FFF2-40B4-BE49-F238E27FC236}">
+                <a16:creationId xmlns:a16="http://schemas.microsoft.com/office/drawing/2014/main" id="{0E5071E7-AB93-FF72-AEF1-60A82A307180}"/>
+              </a:ext>
+            </a:extLst>
+          </p:cNvPr>
+          <p:cNvPicPr>
+            <a:picLocks noChangeAspect="1"/>
+          </p:cNvPicPr>
+          <p:nvPr/>
+        </p:nvPicPr>
+        <p:blipFill>
+          <a:blip r:embed="rId5">
+            <a:extLst>
+              <a:ext uri="{28A0092B-C50C-407E-A947-70E740481C1C}">
+                <a14:useLocalDpi xmlns:a14="http://schemas.microsoft.com/office/drawing/2010/main" val="0"/>
+              </a:ext>
+            </a:extLst>
+          </a:blip>
+          <a:srcRect t="59706"/>
+          <a:stretch>
+            <a:fillRect/>
+          </a:stretch>
+        </p:blipFill>
+        <p:spPr>
+          <a:xfrm>
+            <a:off x="142569" y="2489166"/>
+            <a:ext cx="11906862" cy="2082867"/>
+          </a:xfrm>
+          <a:prstGeom prst="rect">
+            <a:avLst/>
+          </a:prstGeom>
+        </p:spPr>
+      </p:pic>
+    </p:spTree>
+    <p:extLst>
+      <p:ext uri="{BB962C8B-B14F-4D97-AF65-F5344CB8AC3E}">
+        <p14:creationId xmlns:p14="http://schemas.microsoft.com/office/powerpoint/2010/main" val="2851113903"/>
+      </p:ext>
+    </p:extLst>
+  </p:cSld>
+  <p:clrMapOvr>
+    <a:masterClrMapping/>
+  </p:clrMapOvr>
+  <mc:AlternateContent xmlns:mc="http://schemas.openxmlformats.org/markup-compatibility/2006" xmlns:p159="http://schemas.microsoft.com/office/powerpoint/2015/09/main">
+    <mc:Choice Requires="p159">
+      <p:transition xmlns:p14="http://schemas.microsoft.com/office/powerpoint/2010/main" spd="slow" p14:dur="1750" advClick="0" advTm="10000">
+        <p159:morph option="byObject"/>
+      </p:transition>
+    </mc:Choice>
+    <mc:Fallback xmlns="">
+      <p:transition spd="slow" advClick="0" advTm="10000">
+        <p:fade/>
+      </p:transition>
+    </mc:Fallback>
+  </mc:AlternateContent>
+  <p:timing>
+    <p:tnLst>
+      <p:par>
+        <p:cTn id="1" dur="indefinite" restart="never" nodeType="tmRoot">
+          <p:childTnLst>
+            <p:seq concurrent="1" nextAc="seek">
+              <p:cTn id="2" dur="indefinite" nodeType="mainSeq">
+                <p:childTnLst>
+                  <p:par>
+                    <p:cTn id="3" fill="hold">
+                      <p:stCondLst>
+                        <p:cond delay="indefinite"/>
+                        <p:cond evt="onBegin" delay="0">
+                          <p:tn val="2"/>
+                        </p:cond>
+                      </p:stCondLst>
+                      <p:childTnLst>
+                        <p:par>
+                          <p:cTn id="4" fill="hold">
+                            <p:stCondLst>
+                              <p:cond delay="0"/>
+                            </p:stCondLst>
+                            <p:childTnLst>
+                              <p:par>
+                                <p:cTn id="5" presetID="10" presetClass="entr" presetSubtype="0" fill="hold" nodeType="afterEffect">
+                                  <p:stCondLst>
+                                    <p:cond delay="1750"/>
+                                  </p:stCondLst>
+                                  <p:childTnLst>
+                                    <p:set>
+                                      <p:cBhvr>
+                                        <p:cTn id="6" dur="1" fill="hold">
+                                          <p:stCondLst>
+                                            <p:cond delay="0"/>
+                                          </p:stCondLst>
+                                        </p:cTn>
+                                        <p:tgtEl>
+                                          <p:spTgt spid="5">
+                                            <p:txEl>
+                                              <p:pRg st="0" end="0"/>
+                                            </p:txEl>
+                                          </p:spTgt>
+                                        </p:tgtEl>
+                                        <p:attrNameLst>
+                                          <p:attrName>style.visibility</p:attrName>
+                                        </p:attrNameLst>
+                                      </p:cBhvr>
+                                      <p:to>
+                                        <p:strVal val="visible"/>
+                                      </p:to>
+                                    </p:set>
+                                    <p:animEffect transition="in" filter="fade">
+                                      <p:cBhvr>
+                                        <p:cTn id="7" dur="500"/>
+                                        <p:tgtEl>
+                                          <p:spTgt spid="5">
+                                            <p:txEl>
+                                              <p:pRg st="0" end="0"/>
+                                            </p:txEl>
+                                          </p:spTgt>
+                                        </p:tgtEl>
+                                      </p:cBhvr>
+                                    </p:animEffect>
+                                  </p:childTnLst>
+                                </p:cTn>
+                              </p:par>
+                            </p:childTnLst>
+                          </p:cTn>
+                        </p:par>
+                        <p:par>
+                          <p:cTn id="8" fill="hold">
+                            <p:stCondLst>
+                              <p:cond delay="2250"/>
+                            </p:stCondLst>
+                            <p:childTnLst>
+                              <p:par>
+                                <p:cTn id="9" presetID="22" presetClass="entr" presetSubtype="1" fill="hold" nodeType="afterEffect">
+                                  <p:stCondLst>
+                                    <p:cond delay="1750"/>
+                                  </p:stCondLst>
+                                  <p:childTnLst>
+                                    <p:set>
+                                      <p:cBhvr>
+                                        <p:cTn id="10" dur="1" fill="hold">
+                                          <p:stCondLst>
+                                            <p:cond delay="0"/>
+                                          </p:stCondLst>
+                                        </p:cTn>
+                                        <p:tgtEl>
+                                          <p:spTgt spid="6"/>
+                                        </p:tgtEl>
+                                        <p:attrNameLst>
+                                          <p:attrName>style.visibility</p:attrName>
+                                        </p:attrNameLst>
+                                      </p:cBhvr>
+                                      <p:to>
+                                        <p:strVal val="visible"/>
+                                      </p:to>
+                                    </p:set>
+                                    <p:animEffect transition="in" filter="wipe(up)">
+                                      <p:cBhvr>
+                                        <p:cTn id="11" dur="500"/>
+                                        <p:tgtEl>
+                                          <p:spTgt spid="6"/>
+                                        </p:tgtEl>
+                                      </p:cBhvr>
+                                    </p:animEffect>
+                                  </p:childTnLst>
+                                </p:cTn>
+                              </p:par>
+                            </p:childTnLst>
+                          </p:cTn>
+                        </p:par>
+                        <p:par>
+                          <p:cTn id="12" fill="hold">
+                            <p:stCondLst>
+                              <p:cond delay="4500"/>
+                            </p:stCondLst>
+                            <p:childTnLst>
+                              <p:par>
+                                <p:cTn id="13" presetID="10" presetClass="entr" presetSubtype="0" fill="hold" nodeType="afterEffect">
+                                  <p:stCondLst>
+                                    <p:cond delay="1750"/>
+                                  </p:stCondLst>
+                                  <p:childTnLst>
+                                    <p:set>
+                                      <p:cBhvr>
+                                        <p:cTn id="14" dur="1" fill="hold">
+                                          <p:stCondLst>
+                                            <p:cond delay="0"/>
+                                          </p:stCondLst>
+                                        </p:cTn>
+                                        <p:tgtEl>
+                                          <p:spTgt spid="5">
+                                            <p:txEl>
+                                              <p:pRg st="1" end="1"/>
+                                            </p:txEl>
+                                          </p:spTgt>
+                                        </p:tgtEl>
+                                        <p:attrNameLst>
+                                          <p:attrName>style.visibility</p:attrName>
+                                        </p:attrNameLst>
+                                      </p:cBhvr>
+                                      <p:to>
+                                        <p:strVal val="visible"/>
+                                      </p:to>
+                                    </p:set>
+                                    <p:animEffect transition="in" filter="fade">
+                                      <p:cBhvr>
+                                        <p:cTn id="15" dur="500"/>
+                                        <p:tgtEl>
+                                          <p:spTgt spid="5">
+                                            <p:txEl>
+                                              <p:pRg st="1" end="1"/>
                                             </p:txEl>
                                           </p:spTgt>
                                         </p:tgtEl>
@@ -11660,20 +11620,6 @@
               <a:buFont typeface="Wingdings" panose="05000000000000000000" pitchFamily="2" charset="2"/>
               <a:buChar char="Ø"/>
             </a:pPr>
-            <a:endParaRPr lang="en-CA" dirty="0">
-              <a:latin typeface="Calibri" panose="020F0502020204030204" pitchFamily="34" charset="0"/>
-              <a:ea typeface="Calibri" panose="020F0502020204030204" pitchFamily="34" charset="0"/>
-              <a:cs typeface="Calibri" panose="020F0502020204030204" pitchFamily="34" charset="0"/>
-            </a:endParaRPr>
-          </a:p>
-          <a:p>
-            <a:pPr>
-              <a:lnSpc>
-                <a:spcPct val="100000"/>
-              </a:lnSpc>
-              <a:buFont typeface="Wingdings" panose="05000000000000000000" pitchFamily="2" charset="2"/>
-              <a:buChar char="Ø"/>
-            </a:pPr>
             <a:r>
               <a:rPr lang="en-CA" dirty="0">
                 <a:latin typeface="Calibri" panose="020F0502020204030204" pitchFamily="34" charset="0"/>
@@ -11864,8 +11810,8 @@
         </p:blipFill>
         <p:spPr>
           <a:xfrm>
-            <a:off x="175259" y="3258756"/>
-            <a:ext cx="9603741" cy="3383344"/>
+            <a:off x="205739" y="2560256"/>
+            <a:ext cx="10750279" cy="3787263"/>
           </a:xfrm>
           <a:prstGeom prst="rect">
             <a:avLst/>
@@ -11933,7 +11879,7 @@
                                         <p:tgtEl>
                                           <p:spTgt spid="5">
                                             <p:txEl>
-                                              <p:pRg st="1" end="1"/>
+                                              <p:pRg st="0" end="0"/>
                                             </p:txEl>
                                           </p:spTgt>
                                         </p:tgtEl>
@@ -11951,7 +11897,7 @@
                                         <p:tgtEl>
                                           <p:spTgt spid="5">
                                             <p:txEl>
-                                              <p:pRg st="1" end="1"/>
+                                              <p:pRg st="0" end="0"/>
                                             </p:txEl>
                                           </p:spTgt>
                                         </p:tgtEl>
@@ -12029,7 +11975,7 @@
                                         <p:tgtEl>
                                           <p:spTgt spid="5">
                                             <p:txEl>
-                                              <p:pRg st="2" end="2"/>
+                                              <p:pRg st="1" end="1"/>
                                             </p:txEl>
                                           </p:spTgt>
                                         </p:tgtEl>
@@ -12047,7 +11993,7 @@
                                         <p:tgtEl>
                                           <p:spTgt spid="5">
                                             <p:txEl>
-                                              <p:pRg st="2" end="2"/>
+                                              <p:pRg st="1" end="1"/>
                                             </p:txEl>
                                           </p:spTgt>
                                         </p:tgtEl>
@@ -12081,7 +12027,7 @@
                                         <p:tgtEl>
                                           <p:spTgt spid="5">
                                             <p:txEl>
-                                              <p:pRg st="3" end="3"/>
+                                              <p:pRg st="2" end="2"/>
                                             </p:txEl>
                                           </p:spTgt>
                                         </p:tgtEl>
@@ -12099,7 +12045,7 @@
                                         <p:tgtEl>
                                           <p:spTgt spid="5">
                                             <p:txEl>
-                                              <p:pRg st="3" end="3"/>
+                                              <p:pRg st="2" end="2"/>
                                             </p:txEl>
                                           </p:spTgt>
                                         </p:tgtEl>
@@ -12463,20 +12409,6 @@
               <a:buFont typeface="Wingdings" panose="05000000000000000000" pitchFamily="2" charset="2"/>
               <a:buChar char="Ø"/>
             </a:pPr>
-            <a:endParaRPr lang="en-US" b="1" dirty="0">
-              <a:latin typeface="Calibri" panose="020F0502020204030204" pitchFamily="34" charset="0"/>
-              <a:ea typeface="Calibri" panose="020F0502020204030204" pitchFamily="34" charset="0"/>
-              <a:cs typeface="Calibri" panose="020F0502020204030204" pitchFamily="34" charset="0"/>
-            </a:endParaRPr>
-          </a:p>
-          <a:p>
-            <a:pPr>
-              <a:lnSpc>
-                <a:spcPct val="100000"/>
-              </a:lnSpc>
-              <a:buFont typeface="Wingdings" panose="05000000000000000000" pitchFamily="2" charset="2"/>
-              <a:buChar char="Ø"/>
-            </a:pPr>
             <a:r>
               <a:rPr lang="en-US" b="1" dirty="0">
                 <a:latin typeface="Calibri" panose="020F0502020204030204" pitchFamily="34" charset="0"/>
@@ -12649,7 +12581,7 @@
         </p:blipFill>
         <p:spPr>
           <a:xfrm>
-            <a:off x="222778" y="3454400"/>
+            <a:off x="222778" y="3200400"/>
             <a:ext cx="11746443" cy="972353"/>
           </a:xfrm>
           <a:prstGeom prst="rect">
@@ -12718,7 +12650,7 @@
                                         <p:tgtEl>
                                           <p:spTgt spid="5">
                                             <p:txEl>
-                                              <p:pRg st="1" end="1"/>
+                                              <p:pRg st="0" end="0"/>
                                             </p:txEl>
                                           </p:spTgt>
                                         </p:tgtEl>
@@ -12736,7 +12668,7 @@
                                         <p:tgtEl>
                                           <p:spTgt spid="5">
                                             <p:txEl>
-                                              <p:pRg st="1" end="1"/>
+                                              <p:pRg st="0" end="0"/>
                                             </p:txEl>
                                           </p:spTgt>
                                         </p:tgtEl>
@@ -12770,7 +12702,7 @@
                                         <p:tgtEl>
                                           <p:spTgt spid="5">
                                             <p:txEl>
-                                              <p:pRg st="2" end="2"/>
+                                              <p:pRg st="1" end="1"/>
                                             </p:txEl>
                                           </p:spTgt>
                                         </p:tgtEl>
@@ -12788,7 +12720,7 @@
                                         <p:tgtEl>
                                           <p:spTgt spid="5">
                                             <p:txEl>
-                                              <p:pRg st="2" end="2"/>
+                                              <p:pRg st="1" end="1"/>
                                             </p:txEl>
                                           </p:spTgt>
                                         </p:tgtEl>
@@ -12822,7 +12754,7 @@
                                         <p:tgtEl>
                                           <p:spTgt spid="5">
                                             <p:txEl>
-                                              <p:pRg st="3" end="3"/>
+                                              <p:pRg st="2" end="2"/>
                                             </p:txEl>
                                           </p:spTgt>
                                         </p:tgtEl>
@@ -12840,7 +12772,7 @@
                                         <p:tgtEl>
                                           <p:spTgt spid="5">
                                             <p:txEl>
-                                              <p:pRg st="3" end="3"/>
+                                              <p:pRg st="2" end="2"/>
                                             </p:txEl>
                                           </p:spTgt>
                                         </p:tgtEl>
@@ -13247,24 +13179,6 @@
               </a:lnSpc>
               <a:buNone/>
             </a:pPr>
-            <a:endParaRPr lang="en-US" sz="3600" b="1" dirty="0">
-              <a:solidFill>
-                <a:schemeClr val="tx1">
-                  <a:lumMod val="95000"/>
-                </a:schemeClr>
-              </a:solidFill>
-              <a:latin typeface="Calibri" panose="020F0502020204030204" pitchFamily="34" charset="0"/>
-              <a:ea typeface="Calibri" panose="020F0502020204030204" pitchFamily="34" charset="0"/>
-              <a:cs typeface="Calibri" panose="020F0502020204030204" pitchFamily="34" charset="0"/>
-            </a:endParaRPr>
-          </a:p>
-          <a:p>
-            <a:pPr marL="0" indent="0">
-              <a:lnSpc>
-                <a:spcPct val="100000"/>
-              </a:lnSpc>
-              <a:buNone/>
-            </a:pPr>
             <a:r>
               <a:rPr lang="en-US" sz="3600" b="1" dirty="0">
                 <a:solidFill>
@@ -13588,7 +13502,7 @@
                                         <p:tgtEl>
                                           <p:spTgt spid="5">
                                             <p:txEl>
-                                              <p:pRg st="1" end="1"/>
+                                              <p:pRg st="0" end="0"/>
                                             </p:txEl>
                                           </p:spTgt>
                                         </p:tgtEl>
@@ -13606,7 +13520,7 @@
                                         <p:tgtEl>
                                           <p:spTgt spid="5">
                                             <p:txEl>
-                                              <p:pRg st="1" end="1"/>
+                                              <p:pRg st="0" end="0"/>
                                             </p:txEl>
                                           </p:spTgt>
                                         </p:tgtEl>
@@ -13640,7 +13554,7 @@
                                         <p:tgtEl>
                                           <p:spTgt spid="5">
                                             <p:txEl>
-                                              <p:pRg st="2" end="2"/>
+                                              <p:pRg st="1" end="1"/>
                                             </p:txEl>
                                           </p:spTgt>
                                         </p:tgtEl>
@@ -13658,7 +13572,7 @@
                                         <p:tgtEl>
                                           <p:spTgt spid="5">
                                             <p:txEl>
-                                              <p:pRg st="2" end="2"/>
+                                              <p:pRg st="1" end="1"/>
                                             </p:txEl>
                                           </p:spTgt>
                                         </p:tgtEl>
@@ -13692,7 +13606,7 @@
                                         <p:tgtEl>
                                           <p:spTgt spid="5">
                                             <p:txEl>
-                                              <p:pRg st="3" end="3"/>
+                                              <p:pRg st="2" end="2"/>
                                             </p:txEl>
                                           </p:spTgt>
                                         </p:tgtEl>
@@ -13710,7 +13624,7 @@
                                         <p:tgtEl>
                                           <p:spTgt spid="5">
                                             <p:txEl>
-                                              <p:pRg st="3" end="3"/>
+                                              <p:pRg st="2" end="2"/>
                                             </p:txEl>
                                           </p:spTgt>
                                         </p:tgtEl>
@@ -13780,7 +13694,7 @@
                                         <p:tgtEl>
                                           <p:spTgt spid="5">
                                             <p:txEl>
-                                              <p:pRg st="6" end="6"/>
+                                              <p:pRg st="5" end="5"/>
                                             </p:txEl>
                                           </p:spTgt>
                                         </p:tgtEl>
@@ -13798,7 +13712,7 @@
                                         <p:tgtEl>
                                           <p:spTgt spid="5">
                                             <p:txEl>
-                                              <p:pRg st="6" end="6"/>
+                                              <p:pRg st="5" end="5"/>
                                             </p:txEl>
                                           </p:spTgt>
                                         </p:tgtEl>
@@ -14159,17 +14073,6 @@
               <a:buFont typeface="Wingdings" panose="05000000000000000000" pitchFamily="2" charset="2"/>
               <a:buChar char="Ø"/>
             </a:pPr>
-            <a:endParaRPr lang="en-CA" b="1" dirty="0">
-              <a:latin typeface="Calibri" panose="020F0502020204030204" pitchFamily="34" charset="0"/>
-              <a:ea typeface="Calibri" panose="020F0502020204030204" pitchFamily="34" charset="0"/>
-              <a:cs typeface="Calibri" panose="020F0502020204030204" pitchFamily="34" charset="0"/>
-            </a:endParaRPr>
-          </a:p>
-          <a:p>
-            <a:pPr>
-              <a:buFont typeface="Wingdings" panose="05000000000000000000" pitchFamily="2" charset="2"/>
-              <a:buChar char="Ø"/>
-            </a:pPr>
             <a:r>
               <a:rPr lang="en-CA" b="1" dirty="0">
                 <a:latin typeface="Calibri" panose="020F0502020204030204" pitchFamily="34" charset="0"/>
@@ -14420,8 +14323,8 @@
         </p:blipFill>
         <p:spPr>
           <a:xfrm>
-            <a:off x="365760" y="3182255"/>
-            <a:ext cx="11404600" cy="3501119"/>
+            <a:off x="243840" y="2694575"/>
+            <a:ext cx="11592560" cy="3558821"/>
           </a:xfrm>
           <a:prstGeom prst="rect">
             <a:avLst/>
@@ -14489,7 +14392,7 @@
                                         <p:tgtEl>
                                           <p:spTgt spid="5">
                                             <p:txEl>
-                                              <p:pRg st="1" end="1"/>
+                                              <p:pRg st="0" end="0"/>
                                             </p:txEl>
                                           </p:spTgt>
                                         </p:tgtEl>
@@ -14507,7 +14410,7 @@
                                         <p:tgtEl>
                                           <p:spTgt spid="5">
                                             <p:txEl>
-                                              <p:pRg st="1" end="1"/>
+                                              <p:pRg st="0" end="0"/>
                                             </p:txEl>
                                           </p:spTgt>
                                         </p:tgtEl>
@@ -14585,7 +14488,7 @@
                                         <p:tgtEl>
                                           <p:spTgt spid="5">
                                             <p:txEl>
-                                              <p:pRg st="2" end="2"/>
+                                              <p:pRg st="1" end="1"/>
                                             </p:txEl>
                                           </p:spTgt>
                                         </p:tgtEl>
@@ -14603,7 +14506,7 @@
                                         <p:tgtEl>
                                           <p:spTgt spid="5">
                                             <p:txEl>
-                                              <p:pRg st="2" end="2"/>
+                                              <p:pRg st="1" end="1"/>
                                             </p:txEl>
                                           </p:spTgt>
                                         </p:tgtEl>
@@ -14637,7 +14540,7 @@
                                         <p:tgtEl>
                                           <p:spTgt spid="5">
                                             <p:txEl>
-                                              <p:pRg st="3" end="3"/>
+                                              <p:pRg st="2" end="2"/>
                                             </p:txEl>
                                           </p:spTgt>
                                         </p:tgtEl>
@@ -14655,7 +14558,7 @@
                                         <p:tgtEl>
                                           <p:spTgt spid="5">
                                             <p:txEl>
-                                              <p:pRg st="3" end="3"/>
+                                              <p:pRg st="2" end="2"/>
                                             </p:txEl>
                                           </p:spTgt>
                                         </p:tgtEl>
@@ -15011,17 +14914,6 @@
               </a:defRPr>
             </a:lvl9pPr>
           </a:lstStyle>
-          <a:p>
-            <a:pPr>
-              <a:buFont typeface="Wingdings" panose="05000000000000000000" pitchFamily="2" charset="2"/>
-              <a:buChar char="Ø"/>
-            </a:pPr>
-            <a:endParaRPr lang="en-CA" b="1" dirty="0">
-              <a:latin typeface="Calibri" panose="020F0502020204030204" pitchFamily="34" charset="0"/>
-              <a:ea typeface="Calibri" panose="020F0502020204030204" pitchFamily="34" charset="0"/>
-              <a:cs typeface="Calibri" panose="020F0502020204030204" pitchFamily="34" charset="0"/>
-            </a:endParaRPr>
-          </a:p>
           <a:p>
             <a:pPr>
               <a:buFont typeface="Wingdings" panose="05000000000000000000" pitchFamily="2" charset="2"/>
@@ -15552,7 +15444,7 @@
                                         <p:tgtEl>
                                           <p:spTgt spid="5">
                                             <p:txEl>
-                                              <p:pRg st="1" end="1"/>
+                                              <p:pRg st="0" end="0"/>
                                             </p:txEl>
                                           </p:spTgt>
                                         </p:tgtEl>
@@ -15570,7 +15462,7 @@
                                         <p:tgtEl>
                                           <p:spTgt spid="5">
                                             <p:txEl>
-                                              <p:pRg st="1" end="1"/>
+                                              <p:pRg st="0" end="0"/>
                                             </p:txEl>
                                           </p:spTgt>
                                         </p:tgtEl>
@@ -15604,7 +15496,7 @@
                                         <p:tgtEl>
                                           <p:spTgt spid="5">
                                             <p:txEl>
-                                              <p:pRg st="2" end="2"/>
+                                              <p:pRg st="1" end="1"/>
                                             </p:txEl>
                                           </p:spTgt>
                                         </p:tgtEl>
@@ -15622,7 +15514,7 @@
                                         <p:tgtEl>
                                           <p:spTgt spid="5">
                                             <p:txEl>
-                                              <p:pRg st="2" end="2"/>
+                                              <p:pRg st="1" end="1"/>
                                             </p:txEl>
                                           </p:spTgt>
                                         </p:tgtEl>
@@ -16027,22 +15919,6 @@
               <a:buFont typeface="Wingdings" panose="05000000000000000000" pitchFamily="2" charset="2"/>
               <a:buChar char="Ø"/>
             </a:pPr>
-            <a:endParaRPr lang="en-US" b="1" dirty="0">
-              <a:solidFill>
-                <a:schemeClr val="tx1">
-                  <a:lumMod val="95000"/>
-                </a:schemeClr>
-              </a:solidFill>
-              <a:latin typeface="Calibri" panose="020F0502020204030204" pitchFamily="34" charset="0"/>
-              <a:ea typeface="Calibri" panose="020F0502020204030204" pitchFamily="34" charset="0"/>
-              <a:cs typeface="Calibri" panose="020F0502020204030204" pitchFamily="34" charset="0"/>
-            </a:endParaRPr>
-          </a:p>
-          <a:p>
-            <a:pPr>
-              <a:buFont typeface="Wingdings" panose="05000000000000000000" pitchFamily="2" charset="2"/>
-              <a:buChar char="Ø"/>
-            </a:pPr>
             <a:r>
               <a:rPr lang="en-US" b="1" dirty="0">
                 <a:solidFill>
@@ -16223,7 +16099,7 @@
         </p:blipFill>
         <p:spPr>
           <a:xfrm>
-            <a:off x="81839" y="2872192"/>
+            <a:off x="81839" y="2089872"/>
             <a:ext cx="12028322" cy="2687868"/>
           </a:xfrm>
           <a:prstGeom prst="rect">
@@ -16292,7 +16168,7 @@
                                         <p:tgtEl>
                                           <p:spTgt spid="5">
                                             <p:txEl>
-                                              <p:pRg st="1" end="1"/>
+                                              <p:pRg st="0" end="0"/>
                                             </p:txEl>
                                           </p:spTgt>
                                         </p:tgtEl>
@@ -16310,7 +16186,7 @@
                                         <p:tgtEl>
                                           <p:spTgt spid="5">
                                             <p:txEl>
-                                              <p:pRg st="1" end="1"/>
+                                              <p:pRg st="0" end="0"/>
                                             </p:txEl>
                                           </p:spTgt>
                                         </p:tgtEl>
@@ -16715,22 +16591,6 @@
               <a:buFont typeface="Wingdings" panose="05000000000000000000" pitchFamily="2" charset="2"/>
               <a:buChar char="Ø"/>
             </a:pPr>
-            <a:endParaRPr lang="en-US" b="1" dirty="0">
-              <a:solidFill>
-                <a:schemeClr val="tx1">
-                  <a:lumMod val="95000"/>
-                </a:schemeClr>
-              </a:solidFill>
-              <a:latin typeface="Calibri" panose="020F0502020204030204" pitchFamily="34" charset="0"/>
-              <a:ea typeface="Calibri" panose="020F0502020204030204" pitchFamily="34" charset="0"/>
-              <a:cs typeface="Calibri" panose="020F0502020204030204" pitchFamily="34" charset="0"/>
-            </a:endParaRPr>
-          </a:p>
-          <a:p>
-            <a:pPr>
-              <a:buFont typeface="Wingdings" panose="05000000000000000000" pitchFamily="2" charset="2"/>
-              <a:buChar char="Ø"/>
-            </a:pPr>
             <a:r>
               <a:rPr lang="en-US" b="1" dirty="0">
                 <a:solidFill>
@@ -16937,8 +16797,8 @@
         </p:blipFill>
         <p:spPr>
           <a:xfrm>
-            <a:off x="365760" y="2356308"/>
-            <a:ext cx="10264541" cy="4410312"/>
+            <a:off x="320040" y="1828799"/>
+            <a:ext cx="11551920" cy="4963453"/>
           </a:xfrm>
           <a:prstGeom prst="rect">
             <a:avLst/>
@@ -17006,7 +16866,7 @@
                                         <p:tgtEl>
                                           <p:spTgt spid="5">
                                             <p:txEl>
-                                              <p:pRg st="1" end="1"/>
+                                              <p:pRg st="0" end="0"/>
                                             </p:txEl>
                                           </p:spTgt>
                                         </p:tgtEl>
@@ -17024,7 +16884,7 @@
                                         <p:tgtEl>
                                           <p:spTgt spid="5">
                                             <p:txEl>
-                                              <p:pRg st="1" end="1"/>
+                                              <p:pRg st="0" end="0"/>
                                             </p:txEl>
                                           </p:spTgt>
                                         </p:tgtEl>
@@ -17102,7 +16962,7 @@
                                         <p:tgtEl>
                                           <p:spTgt spid="5">
                                             <p:txEl>
-                                              <p:pRg st="2" end="2"/>
+                                              <p:pRg st="1" end="1"/>
                                             </p:txEl>
                                           </p:spTgt>
                                         </p:tgtEl>
@@ -17120,7 +16980,7 @@
                                         <p:tgtEl>
                                           <p:spTgt spid="5">
                                             <p:txEl>
-                                              <p:pRg st="2" end="2"/>
+                                              <p:pRg st="1" end="1"/>
                                             </p:txEl>
                                           </p:spTgt>
                                         </p:tgtEl>
@@ -18171,22 +18031,6 @@
               <a:buFont typeface="Wingdings" panose="05000000000000000000" pitchFamily="2" charset="2"/>
               <a:buChar char="Ø"/>
             </a:pPr>
-            <a:endParaRPr lang="en-US" b="1" dirty="0">
-              <a:solidFill>
-                <a:schemeClr val="tx1">
-                  <a:lumMod val="95000"/>
-                </a:schemeClr>
-              </a:solidFill>
-              <a:latin typeface="Calibri" panose="020F0502020204030204" pitchFamily="34" charset="0"/>
-              <a:ea typeface="Calibri" panose="020F0502020204030204" pitchFamily="34" charset="0"/>
-              <a:cs typeface="Calibri" panose="020F0502020204030204" pitchFamily="34" charset="0"/>
-            </a:endParaRPr>
-          </a:p>
-          <a:p>
-            <a:pPr>
-              <a:buFont typeface="Wingdings" panose="05000000000000000000" pitchFamily="2" charset="2"/>
-              <a:buChar char="Ø"/>
-            </a:pPr>
             <a:r>
               <a:rPr lang="en-US" b="1" dirty="0">
                 <a:solidFill>
@@ -18406,8 +18250,8 @@
         </p:blipFill>
         <p:spPr>
           <a:xfrm>
-            <a:off x="365760" y="3262373"/>
-            <a:ext cx="10893732" cy="3542347"/>
+            <a:off x="82912" y="2764533"/>
+            <a:ext cx="12026176" cy="3910587"/>
           </a:xfrm>
           <a:prstGeom prst="rect">
             <a:avLst/>
@@ -18475,7 +18319,7 @@
                                         <p:tgtEl>
                                           <p:spTgt spid="5">
                                             <p:txEl>
-                                              <p:pRg st="1" end="1"/>
+                                              <p:pRg st="0" end="0"/>
                                             </p:txEl>
                                           </p:spTgt>
                                         </p:tgtEl>
@@ -18493,7 +18337,7 @@
                                         <p:tgtEl>
                                           <p:spTgt spid="5">
                                             <p:txEl>
-                                              <p:pRg st="1" end="1"/>
+                                              <p:pRg st="0" end="0"/>
                                             </p:txEl>
                                           </p:spTgt>
                                         </p:tgtEl>
@@ -18571,7 +18415,7 @@
                                         <p:tgtEl>
                                           <p:spTgt spid="5">
                                             <p:txEl>
-                                              <p:pRg st="2" end="2"/>
+                                              <p:pRg st="1" end="1"/>
                                             </p:txEl>
                                           </p:spTgt>
                                         </p:tgtEl>
@@ -18589,7 +18433,7 @@
                                         <p:tgtEl>
                                           <p:spTgt spid="5">
                                             <p:txEl>
-                                              <p:pRg st="2" end="2"/>
+                                              <p:pRg st="1" end="1"/>
                                             </p:txEl>
                                           </p:spTgt>
                                         </p:tgtEl>
@@ -18623,7 +18467,7 @@
                                         <p:tgtEl>
                                           <p:spTgt spid="5">
                                             <p:txEl>
-                                              <p:pRg st="3" end="3"/>
+                                              <p:pRg st="2" end="2"/>
                                             </p:txEl>
                                           </p:spTgt>
                                         </p:tgtEl>
@@ -18641,7 +18485,7 @@
                                         <p:tgtEl>
                                           <p:spTgt spid="5">
                                             <p:txEl>
-                                              <p:pRg st="3" end="3"/>
+                                              <p:pRg st="2" end="2"/>
                                             </p:txEl>
                                           </p:spTgt>
                                         </p:tgtEl>
@@ -18675,7 +18519,7 @@
                                         <p:tgtEl>
                                           <p:spTgt spid="5">
                                             <p:txEl>
-                                              <p:pRg st="4" end="4"/>
+                                              <p:pRg st="3" end="3"/>
                                             </p:txEl>
                                           </p:spTgt>
                                         </p:tgtEl>
@@ -18693,7 +18537,7 @@
                                         <p:tgtEl>
                                           <p:spTgt spid="5">
                                             <p:txEl>
-                                              <p:pRg st="4" end="4"/>
+                                              <p:pRg st="3" end="3"/>
                                             </p:txEl>
                                           </p:spTgt>
                                         </p:tgtEl>
@@ -19049,24 +18893,6 @@
               </a:defRPr>
             </a:lvl9pPr>
           </a:lstStyle>
-          <a:p>
-            <a:pPr marL="0" indent="0">
-              <a:lnSpc>
-                <a:spcPct val="100000"/>
-              </a:lnSpc>
-              <a:buNone/>
-            </a:pPr>
-            <a:endParaRPr lang="en-US" sz="3600" b="1" dirty="0">
-              <a:solidFill>
-                <a:schemeClr val="tx1">
-                  <a:lumMod val="95000"/>
-                </a:schemeClr>
-              </a:solidFill>
-              <a:latin typeface="Calibri" panose="020F0502020204030204" pitchFamily="34" charset="0"/>
-              <a:ea typeface="Calibri" panose="020F0502020204030204" pitchFamily="34" charset="0"/>
-              <a:cs typeface="Calibri" panose="020F0502020204030204" pitchFamily="34" charset="0"/>
-            </a:endParaRPr>
-          </a:p>
           <a:p>
             <a:pPr marL="0" indent="0">
               <a:lnSpc>
@@ -19421,7 +19247,7 @@
                                         <p:tgtEl>
                                           <p:spTgt spid="5">
                                             <p:txEl>
-                                              <p:pRg st="1" end="1"/>
+                                              <p:pRg st="0" end="0"/>
                                             </p:txEl>
                                           </p:spTgt>
                                         </p:tgtEl>
@@ -19439,7 +19265,7 @@
                                         <p:tgtEl>
                                           <p:spTgt spid="5">
                                             <p:txEl>
-                                              <p:pRg st="1" end="1"/>
+                                              <p:pRg st="0" end="0"/>
                                             </p:txEl>
                                           </p:spTgt>
                                         </p:tgtEl>
@@ -19473,7 +19299,7 @@
                                         <p:tgtEl>
                                           <p:spTgt spid="5">
                                             <p:txEl>
-                                              <p:pRg st="2" end="2"/>
+                                              <p:pRg st="1" end="1"/>
                                             </p:txEl>
                                           </p:spTgt>
                                         </p:tgtEl>
@@ -19491,7 +19317,7 @@
                                         <p:tgtEl>
                                           <p:spTgt spid="5">
                                             <p:txEl>
-                                              <p:pRg st="2" end="2"/>
+                                              <p:pRg st="1" end="1"/>
                                             </p:txEl>
                                           </p:spTgt>
                                         </p:tgtEl>
@@ -19525,7 +19351,7 @@
                                         <p:tgtEl>
                                           <p:spTgt spid="5">
                                             <p:txEl>
-                                              <p:pRg st="3" end="3"/>
+                                              <p:pRg st="2" end="2"/>
                                             </p:txEl>
                                           </p:spTgt>
                                         </p:tgtEl>
@@ -19543,7 +19369,7 @@
                                         <p:tgtEl>
                                           <p:spTgt spid="5">
                                             <p:txEl>
-                                              <p:pRg st="3" end="3"/>
+                                              <p:pRg st="2" end="2"/>
                                             </p:txEl>
                                           </p:spTgt>
                                         </p:tgtEl>
@@ -19613,7 +19439,7 @@
                                         <p:tgtEl>
                                           <p:spTgt spid="5">
                                             <p:txEl>
-                                              <p:pRg st="5" end="5"/>
+                                              <p:pRg st="4" end="4"/>
                                             </p:txEl>
                                           </p:spTgt>
                                         </p:tgtEl>
@@ -19631,7 +19457,7 @@
                                         <p:tgtEl>
                                           <p:spTgt spid="5">
                                             <p:txEl>
-                                              <p:pRg st="5" end="5"/>
+                                              <p:pRg st="4" end="4"/>
                                             </p:txEl>
                                           </p:spTgt>
                                         </p:tgtEl>
@@ -22073,26 +21899,8 @@
               </a:lnSpc>
               <a:buNone/>
             </a:pPr>
-            <a:endParaRPr lang="en-US" sz="3200" b="1" dirty="0">
-              <a:solidFill>
-                <a:schemeClr val="tx1">
-                  <a:lumMod val="95000"/>
-                </a:schemeClr>
-              </a:solidFill>
-              <a:latin typeface="Calibri" panose="020F0502020204030204" pitchFamily="34" charset="0"/>
-              <a:ea typeface="Calibri" panose="020F0502020204030204" pitchFamily="34" charset="0"/>
-              <a:cs typeface="Calibri" panose="020F0502020204030204" pitchFamily="34" charset="0"/>
-            </a:endParaRPr>
-          </a:p>
-          <a:p>
-            <a:pPr marL="0" indent="0">
-              <a:lnSpc>
-                <a:spcPct val="100000"/>
-              </a:lnSpc>
-              <a:buNone/>
-            </a:pPr>
             <a:r>
-              <a:rPr lang="en-US" sz="3200" b="1" dirty="0">
+              <a:rPr lang="en-US" sz="3200" b="1">
                 <a:solidFill>
                   <a:schemeClr val="tx1">
                     <a:lumMod val="95000"/>
@@ -22102,7 +21910,20 @@
                 <a:ea typeface="Calibri" panose="020F0502020204030204" pitchFamily="34" charset="0"/>
                 <a:cs typeface="Calibri" panose="020F0502020204030204" pitchFamily="34" charset="0"/>
               </a:rPr>
-              <a:t>-  How does a platform administrator detect the breach and respond?</a:t>
+              <a:t>-  </a:t>
+            </a:r>
+            <a:r>
+              <a:rPr lang="en-US" sz="3200" b="1" dirty="0">
+                <a:solidFill>
+                  <a:schemeClr val="tx1">
+                    <a:lumMod val="95000"/>
+                  </a:schemeClr>
+                </a:solidFill>
+                <a:latin typeface="Calibri" panose="020F0502020204030204" pitchFamily="34" charset="0"/>
+                <a:ea typeface="Calibri" panose="020F0502020204030204" pitchFamily="34" charset="0"/>
+                <a:cs typeface="Calibri" panose="020F0502020204030204" pitchFamily="34" charset="0"/>
+              </a:rPr>
+              <a:t>How does a platform administrator detect the breach and respond?</a:t>
             </a:r>
           </a:p>
           <a:p>
@@ -22514,25 +22335,6 @@
               <a:buFont typeface="Wingdings" panose="05000000000000000000" pitchFamily="2" charset="2"/>
               <a:buChar char="Ø"/>
             </a:pPr>
-            <a:endParaRPr lang="en-US" b="1" dirty="0">
-              <a:solidFill>
-                <a:schemeClr val="tx1">
-                  <a:lumMod val="95000"/>
-                </a:schemeClr>
-              </a:solidFill>
-              <a:latin typeface="Calibri" panose="020F0502020204030204" pitchFamily="34" charset="0"/>
-              <a:ea typeface="Calibri" panose="020F0502020204030204" pitchFamily="34" charset="0"/>
-              <a:cs typeface="Calibri" panose="020F0502020204030204" pitchFamily="34" charset="0"/>
-            </a:endParaRPr>
-          </a:p>
-          <a:p>
-            <a:pPr marL="400050" indent="-400050">
-              <a:lnSpc>
-                <a:spcPct val="100000"/>
-              </a:lnSpc>
-              <a:buFont typeface="Wingdings" panose="05000000000000000000" pitchFamily="2" charset="2"/>
-              <a:buChar char="Ø"/>
-            </a:pPr>
             <a:r>
               <a:rPr lang="en-US" b="1" dirty="0">
                 <a:solidFill>
@@ -22588,8 +22390,8 @@
         </p:blipFill>
         <p:spPr>
           <a:xfrm>
-            <a:off x="157743" y="3202876"/>
-            <a:ext cx="11693372" cy="3601844"/>
+            <a:off x="157743" y="2146236"/>
+            <a:ext cx="11767392" cy="3624644"/>
           </a:xfrm>
           <a:prstGeom prst="rect">
             <a:avLst/>
@@ -22657,7 +22459,7 @@
                                         <p:tgtEl>
                                           <p:spTgt spid="5">
                                             <p:txEl>
-                                              <p:pRg st="1" end="1"/>
+                                              <p:pRg st="0" end="0"/>
                                             </p:txEl>
                                           </p:spTgt>
                                         </p:tgtEl>
@@ -22675,7 +22477,7 @@
                                         <p:tgtEl>
                                           <p:spTgt spid="5">
                                             <p:txEl>
-                                              <p:pRg st="1" end="1"/>
+                                              <p:pRg st="0" end="0"/>
                                             </p:txEl>
                                           </p:spTgt>
                                         </p:tgtEl>
@@ -23080,17 +22882,6 @@
               <a:buFont typeface="Wingdings" panose="05000000000000000000" pitchFamily="2" charset="2"/>
               <a:buChar char="Ø"/>
             </a:pPr>
-            <a:endParaRPr lang="en-CA" b="1" dirty="0">
-              <a:latin typeface="Calibri" panose="020F0502020204030204" pitchFamily="34" charset="0"/>
-              <a:ea typeface="Calibri" panose="020F0502020204030204" pitchFamily="34" charset="0"/>
-              <a:cs typeface="Calibri" panose="020F0502020204030204" pitchFamily="34" charset="0"/>
-            </a:endParaRPr>
-          </a:p>
-          <a:p>
-            <a:pPr marL="400050" indent="-400050">
-              <a:buFont typeface="Wingdings" panose="05000000000000000000" pitchFamily="2" charset="2"/>
-              <a:buChar char="Ø"/>
-            </a:pPr>
             <a:r>
               <a:rPr lang="en-CA" b="1" dirty="0">
                 <a:latin typeface="Calibri" panose="020F0502020204030204" pitchFamily="34" charset="0"/>
@@ -23148,8 +22939,8 @@
         </p:blipFill>
         <p:spPr>
           <a:xfrm>
-            <a:off x="133349" y="2259378"/>
-            <a:ext cx="11055351" cy="4446222"/>
+            <a:off x="239394" y="1944417"/>
+            <a:ext cx="11713211" cy="4710799"/>
           </a:xfrm>
           <a:prstGeom prst="rect">
             <a:avLst/>
@@ -23217,7 +23008,7 @@
                                         <p:tgtEl>
                                           <p:spTgt spid="5">
                                             <p:txEl>
-                                              <p:pRg st="1" end="1"/>
+                                              <p:pRg st="0" end="0"/>
                                             </p:txEl>
                                           </p:spTgt>
                                         </p:tgtEl>
@@ -23235,7 +23026,7 @@
                                         <p:tgtEl>
                                           <p:spTgt spid="5">
                                             <p:txEl>
-                                              <p:pRg st="1" end="1"/>
+                                              <p:pRg st="0" end="0"/>
                                             </p:txEl>
                                           </p:spTgt>
                                         </p:tgtEl>
@@ -23642,24 +23433,6 @@
               </a:lnSpc>
               <a:buNone/>
             </a:pPr>
-            <a:endParaRPr lang="en-US" sz="3600" b="1" dirty="0">
-              <a:solidFill>
-                <a:schemeClr val="tx1">
-                  <a:lumMod val="95000"/>
-                </a:schemeClr>
-              </a:solidFill>
-              <a:latin typeface="Calibri" panose="020F0502020204030204" pitchFamily="34" charset="0"/>
-              <a:ea typeface="Calibri" panose="020F0502020204030204" pitchFamily="34" charset="0"/>
-              <a:cs typeface="Calibri" panose="020F0502020204030204" pitchFamily="34" charset="0"/>
-            </a:endParaRPr>
-          </a:p>
-          <a:p>
-            <a:pPr marL="0" indent="0">
-              <a:lnSpc>
-                <a:spcPct val="100000"/>
-              </a:lnSpc>
-              <a:buNone/>
-            </a:pPr>
             <a:r>
               <a:rPr lang="en-US" sz="3600" b="1" dirty="0">
                 <a:solidFill>
@@ -23924,7 +23697,7 @@
                                         <p:tgtEl>
                                           <p:spTgt spid="5">
                                             <p:txEl>
-                                              <p:pRg st="1" end="1"/>
+                                              <p:pRg st="0" end="0"/>
                                             </p:txEl>
                                           </p:spTgt>
                                         </p:tgtEl>
@@ -23942,7 +23715,7 @@
                                         <p:tgtEl>
                                           <p:spTgt spid="5">
                                             <p:txEl>
-                                              <p:pRg st="1" end="1"/>
+                                              <p:pRg st="0" end="0"/>
                                             </p:txEl>
                                           </p:spTgt>
                                         </p:tgtEl>
@@ -23976,7 +23749,7 @@
                                         <p:tgtEl>
                                           <p:spTgt spid="5">
                                             <p:txEl>
-                                              <p:pRg st="2" end="2"/>
+                                              <p:pRg st="1" end="1"/>
                                             </p:txEl>
                                           </p:spTgt>
                                         </p:tgtEl>
@@ -23994,7 +23767,7 @@
                                         <p:tgtEl>
                                           <p:spTgt spid="5">
                                             <p:txEl>
-                                              <p:pRg st="2" end="2"/>
+                                              <p:pRg st="1" end="1"/>
                                             </p:txEl>
                                           </p:spTgt>
                                         </p:tgtEl>
@@ -24028,7 +23801,7 @@
                                         <p:tgtEl>
                                           <p:spTgt spid="5">
                                             <p:txEl>
-                                              <p:pRg st="3" end="3"/>
+                                              <p:pRg st="2" end="2"/>
                                             </p:txEl>
                                           </p:spTgt>
                                         </p:tgtEl>
@@ -24046,7 +23819,7 @@
                                         <p:tgtEl>
                                           <p:spTgt spid="5">
                                             <p:txEl>
-                                              <p:pRg st="3" end="3"/>
+                                              <p:pRg st="2" end="2"/>
                                             </p:txEl>
                                           </p:spTgt>
                                         </p:tgtEl>
@@ -24116,7 +23889,7 @@
                                         <p:tgtEl>
                                           <p:spTgt spid="5">
                                             <p:txEl>
-                                              <p:pRg st="6" end="6"/>
+                                              <p:pRg st="5" end="5"/>
                                             </p:txEl>
                                           </p:spTgt>
                                         </p:tgtEl>
@@ -24478,16 +24251,6 @@
               </a:defRPr>
             </a:lvl9pPr>
           </a:lstStyle>
-          <a:p>
-            <a:pPr marL="0" indent="0">
-              <a:buNone/>
-            </a:pPr>
-            <a:endParaRPr lang="en-CA" dirty="0">
-              <a:latin typeface="Calibri" panose="020F0502020204030204" pitchFamily="34" charset="0"/>
-              <a:ea typeface="Calibri" panose="020F0502020204030204" pitchFamily="34" charset="0"/>
-              <a:cs typeface="Calibri" panose="020F0502020204030204" pitchFamily="34" charset="0"/>
-            </a:endParaRPr>
-          </a:p>
           <a:p>
             <a:pPr>
               <a:buFont typeface="Wingdings" panose="05000000000000000000" pitchFamily="2" charset="2"/>
@@ -24678,7 +24441,7 @@
                                         <p:tgtEl>
                                           <p:spTgt spid="5">
                                             <p:txEl>
-                                              <p:pRg st="1" end="1"/>
+                                              <p:pRg st="0" end="0"/>
                                             </p:txEl>
                                           </p:spTgt>
                                         </p:tgtEl>
@@ -24696,7 +24459,7 @@
                                         <p:tgtEl>
                                           <p:spTgt spid="5">
                                             <p:txEl>
-                                              <p:pRg st="1" end="1"/>
+                                              <p:pRg st="0" end="0"/>
                                             </p:txEl>
                                           </p:spTgt>
                                         </p:tgtEl>
@@ -24774,7 +24537,7 @@
                                         <p:tgtEl>
                                           <p:spTgt spid="5">
                                             <p:txEl>
-                                              <p:pRg st="2" end="2"/>
+                                              <p:pRg st="1" end="1"/>
                                             </p:txEl>
                                           </p:spTgt>
                                         </p:tgtEl>
@@ -24792,7 +24555,7 @@
                                         <p:tgtEl>
                                           <p:spTgt spid="5">
                                             <p:txEl>
-                                              <p:pRg st="2" end="2"/>
+                                              <p:pRg st="1" end="1"/>
                                             </p:txEl>
                                           </p:spTgt>
                                         </p:tgtEl>
@@ -24826,7 +24589,7 @@
                                         <p:tgtEl>
                                           <p:spTgt spid="5">
                                             <p:txEl>
-                                              <p:pRg st="3" end="3"/>
+                                              <p:pRg st="2" end="2"/>
                                             </p:txEl>
                                           </p:spTgt>
                                         </p:tgtEl>
@@ -24844,7 +24607,7 @@
                                         <p:tgtEl>
                                           <p:spTgt spid="5">
                                             <p:txEl>
-                                              <p:pRg st="3" end="3"/>
+                                              <p:pRg st="2" end="2"/>
                                             </p:txEl>
                                           </p:spTgt>
                                         </p:tgtEl>
@@ -25205,17 +24968,6 @@
               <a:buFont typeface="Wingdings" panose="05000000000000000000" pitchFamily="2" charset="2"/>
               <a:buChar char="Ø"/>
             </a:pPr>
-            <a:endParaRPr lang="en-CA" b="1" dirty="0">
-              <a:latin typeface="Calibri" panose="020F0502020204030204" pitchFamily="34" charset="0"/>
-              <a:ea typeface="Calibri" panose="020F0502020204030204" pitchFamily="34" charset="0"/>
-              <a:cs typeface="Calibri" panose="020F0502020204030204" pitchFamily="34" charset="0"/>
-            </a:endParaRPr>
-          </a:p>
-          <a:p>
-            <a:pPr>
-              <a:buFont typeface="Wingdings" panose="05000000000000000000" pitchFamily="2" charset="2"/>
-              <a:buChar char="Ø"/>
-            </a:pPr>
             <a:r>
               <a:rPr lang="en-CA" b="1" dirty="0">
                 <a:latin typeface="Calibri" panose="020F0502020204030204" pitchFamily="34" charset="0"/>
@@ -25310,7 +25062,7 @@
         </p:blipFill>
         <p:spPr>
           <a:xfrm>
-            <a:off x="155755" y="2684435"/>
+            <a:off x="155755" y="1828799"/>
             <a:ext cx="11880490" cy="2403527"/>
           </a:xfrm>
           <a:prstGeom prst="rect">
@@ -25379,7 +25131,7 @@
                                         <p:tgtEl>
                                           <p:spTgt spid="5">
                                             <p:txEl>
-                                              <p:pRg st="1" end="1"/>
+                                              <p:pRg st="0" end="0"/>
                                             </p:txEl>
                                           </p:spTgt>
                                         </p:tgtEl>
@@ -25397,7 +25149,7 @@
                                         <p:tgtEl>
                                           <p:spTgt spid="5">
                                             <p:txEl>
-                                              <p:pRg st="1" end="1"/>
+                                              <p:pRg st="0" end="0"/>
                                             </p:txEl>
                                           </p:spTgt>
                                         </p:tgtEl>
@@ -25802,17 +25554,6 @@
               <a:buFont typeface="Wingdings" panose="05000000000000000000" pitchFamily="2" charset="2"/>
               <a:buChar char="Ø"/>
             </a:pPr>
-            <a:endParaRPr lang="en-CA" b="1" dirty="0">
-              <a:latin typeface="Calibri" panose="020F0502020204030204" pitchFamily="34" charset="0"/>
-              <a:ea typeface="Calibri" panose="020F0502020204030204" pitchFamily="34" charset="0"/>
-              <a:cs typeface="Calibri" panose="020F0502020204030204" pitchFamily="34" charset="0"/>
-            </a:endParaRPr>
-          </a:p>
-          <a:p>
-            <a:pPr>
-              <a:buFont typeface="Wingdings" panose="05000000000000000000" pitchFamily="2" charset="2"/>
-              <a:buChar char="Ø"/>
-            </a:pPr>
             <a:r>
               <a:rPr lang="en-CA" b="1" dirty="0">
                 <a:latin typeface="Calibri" panose="020F0502020204030204" pitchFamily="34" charset="0"/>
@@ -25916,7 +25657,7 @@
         </p:blipFill>
         <p:spPr>
           <a:xfrm>
-            <a:off x="142569" y="2927194"/>
+            <a:off x="142569" y="1828799"/>
             <a:ext cx="11906862" cy="2746531"/>
           </a:xfrm>
           <a:prstGeom prst="rect">
@@ -25985,7 +25726,7 @@
                                         <p:tgtEl>
                                           <p:spTgt spid="5">
                                             <p:txEl>
-                                              <p:pRg st="1" end="1"/>
+                                              <p:pRg st="0" end="0"/>
                                             </p:txEl>
                                           </p:spTgt>
                                         </p:tgtEl>
@@ -26003,7 +25744,7 @@
                                         <p:tgtEl>
                                           <p:spTgt spid="5">
                                             <p:txEl>
-                                              <p:pRg st="1" end="1"/>
+                                              <p:pRg st="0" end="0"/>
                                             </p:txEl>
                                           </p:spTgt>
                                         </p:tgtEl>
@@ -26408,17 +26149,6 @@
               <a:buFont typeface="Wingdings" panose="05000000000000000000" pitchFamily="2" charset="2"/>
               <a:buChar char="Ø"/>
             </a:pPr>
-            <a:endParaRPr lang="en-CA" b="1" dirty="0">
-              <a:latin typeface="Calibri" panose="020F0502020204030204" pitchFamily="34" charset="0"/>
-              <a:ea typeface="Calibri" panose="020F0502020204030204" pitchFamily="34" charset="0"/>
-              <a:cs typeface="Calibri" panose="020F0502020204030204" pitchFamily="34" charset="0"/>
-            </a:endParaRPr>
-          </a:p>
-          <a:p>
-            <a:pPr>
-              <a:buFont typeface="Wingdings" panose="05000000000000000000" pitchFamily="2" charset="2"/>
-              <a:buChar char="Ø"/>
-            </a:pPr>
             <a:r>
               <a:rPr lang="en-CA" b="1" dirty="0">
                 <a:latin typeface="Calibri" panose="020F0502020204030204" pitchFamily="34" charset="0"/>
@@ -26541,8 +26271,8 @@
         </p:blipFill>
         <p:spPr>
           <a:xfrm>
-            <a:off x="104467" y="2516734"/>
-            <a:ext cx="10779433" cy="4284284"/>
+            <a:off x="114627" y="2181454"/>
+            <a:ext cx="11356013" cy="4513446"/>
           </a:xfrm>
           <a:prstGeom prst="rect">
             <a:avLst/>
@@ -26610,7 +26340,7 @@
                                         <p:tgtEl>
                                           <p:spTgt spid="5">
                                             <p:txEl>
-                                              <p:pRg st="1" end="1"/>
+                                              <p:pRg st="0" end="0"/>
                                             </p:txEl>
                                           </p:spTgt>
                                         </p:tgtEl>
@@ -26628,7 +26358,7 @@
                                         <p:tgtEl>
                                           <p:spTgt spid="5">
                                             <p:txEl>
-                                              <p:pRg st="1" end="1"/>
+                                              <p:pRg st="0" end="0"/>
                                             </p:txEl>
                                           </p:spTgt>
                                         </p:tgtEl>
@@ -26706,7 +26436,7 @@
                                         <p:tgtEl>
                                           <p:spTgt spid="5">
                                             <p:txEl>
-                                              <p:pRg st="2" end="2"/>
+                                              <p:pRg st="1" end="1"/>
                                             </p:txEl>
                                           </p:spTgt>
                                         </p:tgtEl>
@@ -26724,7 +26454,7 @@
                                         <p:tgtEl>
                                           <p:spTgt spid="5">
                                             <p:txEl>
-                                              <p:pRg st="2" end="2"/>
+                                              <p:pRg st="1" end="1"/>
                                             </p:txEl>
                                           </p:spTgt>
                                         </p:tgtEl>
